--- a/results/autobench-claudecode-summary.pptx
+++ b/results/autobench-claudecode-summary.pptx
@@ -3258,7 +3258,7 @@
                 </a:solidFill>
                 <a:latin typeface="Arial"/>
               </a:rPr>
-              <a:t>Last modified 2026-09-09 10:27 EDT</a:t>
+              <a:t>Last modified 2026-09-09 10:34 EDT</a:t>
             </a:r>
           </a:p>
         </p:txBody>
@@ -15775,7 +15775,7 @@
                 </a:solidFill>
                 <a:latin typeface="Arial"/>
               </a:rPr>
-              <a:t>2 · PRICING  ·  RATE CARD, 2026-09-09</a:t>
+              <a:t>2 · PRICING  ·  RATE CARD</a:t>
             </a:r>
           </a:p>
         </p:txBody>
@@ -16481,8 +16481,8 @@
         </p:nvSpPr>
         <p:spPr>
           <a:xfrm>
-            <a:off x="640080" y="3611880"/>
-            <a:ext cx="10881360" cy="320040"/>
+            <a:off x="640080" y="3429000"/>
+            <a:ext cx="10881360" cy="502920"/>
           </a:xfrm>
           <a:prstGeom prst="rect">
             <a:avLst/>
@@ -16497,13 +16497,25 @@
           <a:p>
             <a:pPr algn="l"/>
             <a:r>
-              <a:rPr sz="1600" b="1">
-                <a:solidFill>
-                  <a:srgbClr val="2C5F2D"/>
-                </a:solidFill>
-                <a:latin typeface="Arial"/>
-              </a:rPr>
-              <a:t>sonnet-5 is priced at 2/3 of sonnet-4-6 — the single most consequential fact in the analysis.</a:t>
+              <a:rPr sz="1200" b="0">
+                <a:solidFill>
+                  <a:srgbClr val="6B6B6B"/>
+                </a:solidFill>
+                <a:latin typeface="Arial"/>
+              </a:rPr>
+              <a:t>Transcribed by hand from the gateway model pages on 2026-09-09. That page needs interactive internal web</a:t>
+            </a:r>
+          </a:p>
+          <a:p>
+            <a:pPr algn="l"/>
+            <a:r>
+              <a:rPr sz="1200" b="0">
+                <a:solidFill>
+                  <a:srgbClr val="6B6B6B"/>
+                </a:solidFill>
+                <a:latin typeface="Arial"/>
+              </a:rPr>
+              <a:t>authorization and fills itself by script, so no automated pull is possible or attempted.</a:t>
             </a:r>
           </a:p>
         </p:txBody>
@@ -16516,8 +16528,8 @@
         </p:nvSpPr>
         <p:spPr>
           <a:xfrm>
-            <a:off x="640080" y="4114800"/>
-            <a:ext cx="10881360" cy="274320"/>
+            <a:off x="640080" y="3977639"/>
+            <a:ext cx="10881360" cy="320040"/>
           </a:xfrm>
           <a:prstGeom prst="rect">
             <a:avLst/>
@@ -16532,13 +16544,13 @@
           <a:p>
             <a:pPr algn="l"/>
             <a:r>
-              <a:rPr sz="1500" b="1">
-                <a:solidFill>
-                  <a:srgbClr val="1E2761"/>
-                </a:solidFill>
-                <a:latin typeface="Arial"/>
-              </a:rPr>
-              <a:t>The cache caveat</a:t>
+              <a:rPr sz="1600" b="1">
+                <a:solidFill>
+                  <a:srgbClr val="2C5F2D"/>
+                </a:solidFill>
+                <a:latin typeface="Arial"/>
+              </a:rPr>
+              <a:t>sonnet-5 is priced at 2/3 of sonnet-4-6 — the single most consequential fact in the analysis.</a:t>
             </a:r>
           </a:p>
         </p:txBody>
@@ -16552,7 +16564,7 @@
         <p:spPr>
           <a:xfrm>
             <a:off x="640080" y="4434840"/>
-            <a:ext cx="10881360" cy="1371600"/>
+            <a:ext cx="10881360" cy="274320"/>
           </a:xfrm>
           <a:prstGeom prst="rect">
             <a:avLst/>
@@ -16565,13 +16577,48 @@
           </a:bodyPr>
           <a:lstStyle/>
           <a:p>
+            <a:pPr algn="l"/>
+            <a:r>
+              <a:rPr sz="1500" b="1">
+                <a:solidFill>
+                  <a:srgbClr val="1E2761"/>
+                </a:solidFill>
+                <a:latin typeface="Arial"/>
+              </a:rPr>
+              <a:t>The cache caveat</a:t>
+            </a:r>
+          </a:p>
+        </p:txBody>
+      </p:sp>
+      <p:sp>
+        <p:nvSpPr>
+          <p:cNvPr id="9" name="TextBox 8"/>
+          <p:cNvSpPr txBox="1"/>
+          <p:nvPr/>
+        </p:nvSpPr>
+        <p:spPr>
+          <a:xfrm>
+            <a:off x="640080" y="4754880"/>
+            <a:ext cx="10881360" cy="1371600"/>
+          </a:xfrm>
+          <a:prstGeom prst="rect">
+            <a:avLst/>
+          </a:prstGeom>
+          <a:noFill/>
+        </p:spPr>
+        <p:txBody>
+          <a:bodyPr wrap="square" anchor="t" lIns="0" rIns="0">
+            <a:spAutoFit/>
+          </a:bodyPr>
+          <a:lstStyle/>
+          <a:p>
             <a:pPr algn="l">
               <a:spcAft>
-                <a:spcPts val="300"/>
+                <a:spcPts val="200"/>
               </a:spcAft>
             </a:pPr>
             <a:r>
-              <a:rPr sz="1300" b="0">
+              <a:rPr sz="1250" b="0">
                 <a:solidFill>
                   <a:srgbClr val="2B2B2B"/>
                 </a:solidFill>
@@ -16583,11 +16630,11 @@
           <a:p>
             <a:pPr algn="l">
               <a:spcAft>
-                <a:spcPts val="300"/>
+                <a:spcPts val="200"/>
               </a:spcAft>
             </a:pPr>
             <a:r>
-              <a:rPr sz="1300" b="0">
+              <a:rPr sz="1250" b="0">
                 <a:solidFill>
                   <a:srgbClr val="2B2B2B"/>
                 </a:solidFill>
@@ -16599,11 +16646,11 @@
           <a:p>
             <a:pPr algn="l">
               <a:spcAft>
-                <a:spcPts val="300"/>
+                <a:spcPts val="200"/>
               </a:spcAft>
             </a:pPr>
             <a:r>
-              <a:rPr sz="1300" b="0">
+              <a:rPr sz="1250" b="0">
                 <a:solidFill>
                   <a:srgbClr val="2B2B2B"/>
                 </a:solidFill>
@@ -16615,27 +16662,27 @@
           <a:p>
             <a:pPr algn="l">
               <a:spcAft>
-                <a:spcPts val="300"/>
+                <a:spcPts val="200"/>
               </a:spcAft>
             </a:pPr>
             <a:r>
-              <a:rPr sz="1300" b="0">
+              <a:rPr sz="1250" b="0">
                 <a:solidFill>
                   <a:srgbClr val="2B2B2B"/>
                 </a:solidFill>
                 <a:latin typeface="Arial"/>
               </a:rPr>
-              <a:t>B lands ~4–5× below A. Which the gateway bills is UNVERIFIED (/model/info returns 403 for a non-admin key).</a:t>
+              <a:t>B lands ~4–5× below A. Which the gateway actually bills is UNVERIFIED.</a:t>
             </a:r>
           </a:p>
           <a:p>
             <a:pPr algn="l">
               <a:spcAft>
-                <a:spcPts val="300"/>
+                <a:spcPts val="200"/>
               </a:spcAft>
             </a:pPr>
             <a:r>
-              <a:rPr sz="1300" b="0">
+              <a:rPr sz="1250" b="0">
                 <a:solidFill>
                   <a:srgbClr val="2B2B2B"/>
                 </a:solidFill>
@@ -16648,7 +16695,7 @@
       </p:sp>
       <p:sp>
         <p:nvSpPr>
-          <p:cNvPr id="9" name="TextBox 8"/>
+          <p:cNvPr id="10" name="TextBox 9"/>
           <p:cNvSpPr txBox="1"/>
           <p:nvPr/>
         </p:nvSpPr>

--- a/results/autobench-claudecode-summary.pptx
+++ b/results/autobench-claudecode-summary.pptx
@@ -21,6 +21,7 @@
     <p:sldId id="269" r:id="rId20"/>
     <p:sldId id="270" r:id="rId21"/>
     <p:sldId id="271" r:id="rId22"/>
+    <p:sldId id="272" r:id="rId23"/>
   </p:sldIdLst>
   <p:sldSz cx="12191695" cy="6858000" type="screen4x3"/>
   <p:notesSz cx="6858000" cy="9144000"/>
@@ -3258,7 +3259,7 @@
                 </a:solidFill>
                 <a:latin typeface="Arial"/>
               </a:rPr>
-              <a:t>Last modified 2026-09-09 10:34 EDT</a:t>
+              <a:t>Last modified 2026-09-09 11:14 EDT</a:t>
             </a:r>
           </a:p>
         </p:txBody>
@@ -6275,7 +6276,7 @@
                 </a:solidFill>
                 <a:latin typeface="Arial"/>
               </a:rPr>
-              <a:t>3 · FINDINGS  ·  FINDING 4 · OVERHEAD</a:t>
+              <a:t>3 · FINDINGS  ·  FINDING 4 · TWO DIFFERENT QUESTIONS</a:t>
             </a:r>
           </a:p>
         </p:txBody>
@@ -6310,7 +6311,7 @@
                 </a:solidFill>
                 <a:latin typeface="Arial"/>
               </a:rPr>
-              <a:t>Skill cost is a property of skill × model</a:t>
+              <a:t>Token-efficiency is not cost-efficiency</a:t>
             </a:r>
           </a:p>
         </p:txBody>
@@ -6359,52 +6360,17 @@
           </a:p>
         </p:txBody>
       </p:sp>
-      <p:sp>
-        <p:nvSpPr>
-          <p:cNvPr id="5" name="TextBox 4"/>
-          <p:cNvSpPr txBox="1"/>
-          <p:nvPr/>
-        </p:nvSpPr>
-        <p:spPr>
-          <a:xfrm>
-            <a:off x="640080" y="1783080"/>
-            <a:ext cx="10881360" cy="274320"/>
-          </a:xfrm>
-          <a:prstGeom prst="rect">
-            <a:avLst/>
-          </a:prstGeom>
-          <a:noFill/>
-        </p:spPr>
-        <p:txBody>
-          <a:bodyPr wrap="square" anchor="t" lIns="0" rIns="0">
-            <a:spAutoFit/>
-          </a:bodyPr>
-          <a:lstStyle/>
-          <a:p>
-            <a:pPr algn="l"/>
-            <a:r>
-              <a:rPr sz="1400" b="0">
-                <a:solidFill>
-                  <a:srgbClr val="6B6B6B"/>
-                </a:solidFill>
-                <a:latin typeface="Arial"/>
-              </a:rPr>
-              <a:t>skill-on ÷ skill-off tokens, same skill (xlsx), same tasks</a:t>
-            </a:r>
-          </a:p>
-        </p:txBody>
-      </p:sp>
       <p:graphicFrame>
         <p:nvGraphicFramePr>
-          <p:cNvPr id="6" name="Table 5"/>
+          <p:cNvPr id="5" name="Table 4"/>
           <p:cNvGraphicFramePr>
             <a:graphicFrameLocks noGrp="1"/>
           </p:cNvGraphicFramePr>
           <p:nvPr/>
         </p:nvGraphicFramePr>
         <p:xfrm>
-          <a:off x="640080" y="2194560"/>
-          <a:ext cx="10881360" cy="877824"/>
+          <a:off x="640080" y="1783080"/>
+          <a:ext cx="10881360" cy="1170432"/>
         </p:xfrm>
         <a:graphic>
           <a:graphicData uri="http://schemas.openxmlformats.org/drawingml/2006/table">
@@ -6413,11 +6379,9 @@
                 <a:tableStyleId>{5C22544A-7EE6-4342-B048-85BDC9FD1C3A}</a:tableStyleId>
               </a:tblPr>
               <a:tblGrid>
-                <a:gridCol w="3566160"/>
-                <a:gridCol w="1828800"/>
-                <a:gridCol w="1828800"/>
-                <a:gridCol w="1828800"/>
-                <a:gridCol w="1828800"/>
+                <a:gridCol w="2103120"/>
+                <a:gridCol w="4389120"/>
+                <a:gridCol w="4389120"/>
               </a:tblGrid>
               <a:tr h="292608">
                 <a:tc>
@@ -6426,14 +6390,28 @@
                     <a:lstStyle/>
                     <a:p>
                       <a:pPr algn="l"/>
-                      <a:r>
-                        <a:rPr sz="1500" b="1">
+                    </a:p>
+                  </a:txBody>
+                  <a:tcPr marL="64008" marR="64008" marT="18288" marB="18288">
+                    <a:solidFill>
+                      <a:srgbClr val="1E2761"/>
+                    </a:solidFill>
+                  </a:tcPr>
+                </a:tc>
+                <a:tc>
+                  <a:txBody>
+                    <a:bodyPr/>
+                    <a:lstStyle/>
+                    <a:p>
+                      <a:pPr algn="r"/>
+                      <a:r>
+                        <a:rPr sz="1300" b="1">
                           <a:solidFill>
                             <a:srgbClr val="FFFFFF"/>
                           </a:solidFill>
                           <a:latin typeface="Arial"/>
                         </a:rPr>
-                        <a:t>task</a:t>
+                        <a:t>token-efficiency</a:t>
                       </a:r>
                     </a:p>
                   </a:txBody>
@@ -6450,82 +6428,13 @@
                     <a:p>
                       <a:pPr algn="r"/>
                       <a:r>
-                        <a:rPr sz="1500" b="1">
+                        <a:rPr sz="1300" b="1">
                           <a:solidFill>
                             <a:srgbClr val="FFFFFF"/>
                           </a:solidFill>
                           <a:latin typeface="Arial"/>
                         </a:rPr>
-                        <a:t>haiku-4-5</a:t>
-                      </a:r>
-                    </a:p>
-                  </a:txBody>
-                  <a:tcPr marL="64008" marR="64008" marT="18288" marB="18288">
-                    <a:solidFill>
-                      <a:srgbClr val="1E2761"/>
-                    </a:solidFill>
-                  </a:tcPr>
-                </a:tc>
-                <a:tc>
-                  <a:txBody>
-                    <a:bodyPr/>
-                    <a:lstStyle/>
-                    <a:p>
-                      <a:pPr algn="r"/>
-                      <a:r>
-                        <a:rPr sz="1500" b="1">
-                          <a:solidFill>
-                            <a:srgbClr val="FFFFFF"/>
-                          </a:solidFill>
-                          <a:latin typeface="Arial"/>
-                        </a:rPr>
-                        <a:t>sonnet-4-6</a:t>
-                      </a:r>
-                    </a:p>
-                  </a:txBody>
-                  <a:tcPr marL="64008" marR="64008" marT="18288" marB="18288">
-                    <a:solidFill>
-                      <a:srgbClr val="1E2761"/>
-                    </a:solidFill>
-                  </a:tcPr>
-                </a:tc>
-                <a:tc>
-                  <a:txBody>
-                    <a:bodyPr/>
-                    <a:lstStyle/>
-                    <a:p>
-                      <a:pPr algn="r"/>
-                      <a:r>
-                        <a:rPr sz="1500" b="1">
-                          <a:solidFill>
-                            <a:srgbClr val="FFFFFF"/>
-                          </a:solidFill>
-                          <a:latin typeface="Arial"/>
-                        </a:rPr>
-                        <a:t>sonnet-5</a:t>
-                      </a:r>
-                    </a:p>
-                  </a:txBody>
-                  <a:tcPr marL="64008" marR="64008" marT="18288" marB="18288">
-                    <a:solidFill>
-                      <a:srgbClr val="1E2761"/>
-                    </a:solidFill>
-                  </a:tcPr>
-                </a:tc>
-                <a:tc>
-                  <a:txBody>
-                    <a:bodyPr/>
-                    <a:lstStyle/>
-                    <a:p>
-                      <a:pPr algn="r"/>
-                      <a:r>
-                        <a:rPr sz="1500" b="1">
-                          <a:solidFill>
-                            <a:srgbClr val="FFFFFF"/>
-                          </a:solidFill>
-                          <a:latin typeface="Arial"/>
-                        </a:rPr>
-                        <a:t>opus-5</a:t>
+                        <a:t>cost-efficiency</a:t>
                       </a:r>
                     </a:p>
                   </a:txBody>
@@ -6544,13 +6453,13 @@
                     <a:p>
                       <a:pPr algn="l"/>
                       <a:r>
-                        <a:rPr sz="1500" b="0">
+                        <a:rPr sz="1300" b="0">
                           <a:solidFill>
                             <a:srgbClr val="2B2B2B"/>
                           </a:solidFill>
                           <a:latin typeface="Arial"/>
                         </a:rPr>
-                        <a:t>xlsx-fin-colors</a:t>
+                        <a:t>measures</a:t>
                       </a:r>
                     </a:p>
                   </a:txBody>
@@ -6567,13 +6476,13 @@
                     <a:p>
                       <a:pPr algn="r"/>
                       <a:r>
-                        <a:rPr sz="1500" b="0">
-                          <a:solidFill>
-                            <a:srgbClr val="B85042"/>
-                          </a:solidFill>
-                          <a:latin typeface="Arial"/>
-                        </a:rPr>
-                        <a:t>2.88×</a:t>
+                        <a:rPr sz="1300" b="0">
+                          <a:solidFill>
+                            <a:srgbClr val="2B2B2B"/>
+                          </a:solidFill>
+                          <a:latin typeface="Arial"/>
+                        </a:rPr>
+                        <a:t>tokens per SOLVED task</a:t>
                       </a:r>
                     </a:p>
                   </a:txBody>
@@ -6590,59 +6499,13 @@
                     <a:p>
                       <a:pPr algn="r"/>
                       <a:r>
-                        <a:rPr sz="1500" b="0">
+                        <a:rPr sz="1300" b="0">
                           <a:solidFill>
                             <a:srgbClr val="2B2B2B"/>
                           </a:solidFill>
                           <a:latin typeface="Arial"/>
                         </a:rPr>
-                        <a:t>1.50×</a:t>
-                      </a:r>
-                    </a:p>
-                  </a:txBody>
-                  <a:tcPr marL="64008" marR="64008" marT="18288" marB="18288">
-                    <a:solidFill>
-                      <a:srgbClr val="FAF9F5"/>
-                    </a:solidFill>
-                  </a:tcPr>
-                </a:tc>
-                <a:tc>
-                  <a:txBody>
-                    <a:bodyPr/>
-                    <a:lstStyle/>
-                    <a:p>
-                      <a:pPr algn="r"/>
-                      <a:r>
-                        <a:rPr sz="1500" b="0">
-                          <a:solidFill>
-                            <a:srgbClr val="2B2B2B"/>
-                          </a:solidFill>
-                          <a:latin typeface="Arial"/>
-                        </a:rPr>
-                        <a:t>2.01×</a:t>
-                      </a:r>
-                    </a:p>
-                  </a:txBody>
-                  <a:tcPr marL="64008" marR="64008" marT="18288" marB="18288">
-                    <a:solidFill>
-                      <a:srgbClr val="FAF9F5"/>
-                    </a:solidFill>
-                  </a:tcPr>
-                </a:tc>
-                <a:tc>
-                  <a:txBody>
-                    <a:bodyPr/>
-                    <a:lstStyle/>
-                    <a:p>
-                      <a:pPr algn="r"/>
-                      <a:r>
-                        <a:rPr sz="1500" b="0">
-                          <a:solidFill>
-                            <a:srgbClr val="2C5F2D"/>
-                          </a:solidFill>
-                          <a:latin typeface="Arial"/>
-                        </a:rPr>
-                        <a:t>0.93×</a:t>
+                        <a:t>dollars per SOLVED task</a:t>
                       </a:r>
                     </a:p>
                   </a:txBody>
@@ -6661,13 +6524,13 @@
                     <a:p>
                       <a:pPr algn="l"/>
                       <a:r>
-                        <a:rPr sz="1500" b="0">
+                        <a:rPr sz="1300" b="0">
                           <a:solidFill>
                             <a:srgbClr val="2B2B2B"/>
                           </a:solidFill>
                           <a:latin typeface="Arial"/>
                         </a:rPr>
-                        <a:t>xlsx-fin-font-clean</a:t>
+                        <a:t>binding when</a:t>
                       </a:r>
                     </a:p>
                   </a:txBody>
@@ -6684,13 +6547,13 @@
                     <a:p>
                       <a:pPr algn="r"/>
                       <a:r>
-                        <a:rPr sz="1500" b="0">
-                          <a:solidFill>
-                            <a:srgbClr val="B85042"/>
-                          </a:solidFill>
-                          <a:latin typeface="Arial"/>
-                        </a:rPr>
-                        <a:t>2.37×</a:t>
+                        <a:rPr sz="1300" b="0">
+                          <a:solidFill>
+                            <a:srgbClr val="2B2B2B"/>
+                          </a:solidFill>
+                          <a:latin typeface="Arial"/>
+                        </a:rPr>
+                        <a:t>context window, rate limits, latency</a:t>
                       </a:r>
                     </a:p>
                   </a:txBody>
@@ -6707,13 +6570,13 @@
                     <a:p>
                       <a:pPr algn="r"/>
                       <a:r>
-                        <a:rPr sz="1500" b="0">
+                        <a:rPr sz="1300" b="0">
                           <a:solidFill>
                             <a:srgbClr val="2B2B2B"/>
                           </a:solidFill>
                           <a:latin typeface="Arial"/>
                         </a:rPr>
-                        <a:t>2.08×</a:t>
+                        <a:t>you are paying the bill</a:t>
                       </a:r>
                     </a:p>
                   </a:txBody>
@@ -6723,6 +6586,31 @@
                     </a:solidFill>
                   </a:tcPr>
                 </a:tc>
+              </a:tr>
+              <a:tr h="292608">
+                <a:tc>
+                  <a:txBody>
+                    <a:bodyPr/>
+                    <a:lstStyle/>
+                    <a:p>
+                      <a:pPr algn="l"/>
+                      <a:r>
+                        <a:rPr sz="1300" b="0">
+                          <a:solidFill>
+                            <a:srgbClr val="2B2B2B"/>
+                          </a:solidFill>
+                          <a:latin typeface="Arial"/>
+                        </a:rPr>
+                        <a:t>driven by</a:t>
+                      </a:r>
+                    </a:p>
+                  </a:txBody>
+                  <a:tcPr marL="64008" marR="64008" marT="18288" marB="18288">
+                    <a:solidFill>
+                      <a:srgbClr val="FAF9F5"/>
+                    </a:solidFill>
+                  </a:tcPr>
+                </a:tc>
                 <a:tc>
                   <a:txBody>
                     <a:bodyPr/>
@@ -6730,19 +6618,19 @@
                     <a:p>
                       <a:pPr algn="r"/>
                       <a:r>
-                        <a:rPr sz="1500" b="0">
+                        <a:rPr sz="1300" b="0">
                           <a:solidFill>
                             <a:srgbClr val="2B2B2B"/>
                           </a:solidFill>
                           <a:latin typeface="Arial"/>
                         </a:rPr>
-                        <a:t>1.56×</a:t>
-                      </a:r>
-                    </a:p>
-                  </a:txBody>
-                  <a:tcPr marL="64008" marR="64008" marT="18288" marB="18288">
-                    <a:solidFill>
-                      <a:srgbClr val="FFFFFF"/>
+                        <a:t>how much context and how many calls</a:t>
+                      </a:r>
+                    </a:p>
+                  </a:txBody>
+                  <a:tcPr marL="64008" marR="64008" marT="18288" marB="18288">
+                    <a:solidFill>
+                      <a:srgbClr val="FAF9F5"/>
                     </a:solidFill>
                   </a:tcPr>
                 </a:tc>
@@ -6753,19 +6641,19 @@
                     <a:p>
                       <a:pPr algn="r"/>
                       <a:r>
-                        <a:rPr sz="1500" b="0">
-                          <a:solidFill>
-                            <a:srgbClr val="2C5F2D"/>
-                          </a:solidFill>
-                          <a:latin typeface="Arial"/>
-                        </a:rPr>
-                        <a:t>1.01×</a:t>
-                      </a:r>
-                    </a:p>
-                  </a:txBody>
-                  <a:tcPr marL="64008" marR="64008" marT="18288" marB="18288">
-                    <a:solidFill>
-                      <a:srgbClr val="FFFFFF"/>
+                        <a:rPr sz="1300" b="0">
+                          <a:solidFill>
+                            <a:srgbClr val="2B2B2B"/>
+                          </a:solidFill>
+                          <a:latin typeface="Arial"/>
+                        </a:rPr>
+                        <a:t>the same, weighted by unit price</a:t>
+                      </a:r>
+                    </a:p>
+                  </a:txBody>
+                  <a:tcPr marL="64008" marR="64008" marT="18288" marB="18288">
+                    <a:solidFill>
+                      <a:srgbClr val="FAF9F5"/>
                     </a:solidFill>
                   </a:tcPr>
                 </a:tc>
@@ -6776,14 +6664,14 @@
       </p:graphicFrame>
       <p:sp>
         <p:nvSpPr>
-          <p:cNvPr id="7" name="TextBox 6"/>
+          <p:cNvPr id="6" name="TextBox 5"/>
           <p:cNvSpPr txBox="1"/>
           <p:nvPr/>
         </p:nvSpPr>
         <p:spPr>
           <a:xfrm>
-            <a:off x="640080" y="3337560"/>
-            <a:ext cx="10881360" cy="320040"/>
+            <a:off x="640080" y="3200400"/>
+            <a:ext cx="10881360" cy="502920"/>
           </a:xfrm>
           <a:prstGeom prst="rect">
             <a:avLst/>
@@ -6798,116 +6686,706 @@
           <a:p>
             <a:pPr algn="l"/>
             <a:r>
-              <a:rPr sz="1700" b="1">
-                <a:solidFill>
-                  <a:srgbClr val="1E2761"/>
-                </a:solidFill>
-                <a:latin typeface="Arial"/>
-              </a:rPr>
-              <a:t>“What does this skill cost?” has no single answer.</a:t>
-            </a:r>
-          </a:p>
-        </p:txBody>
-      </p:sp>
-      <p:sp>
-        <p:nvSpPr>
-          <p:cNvPr id="8" name="TextBox 7"/>
-          <p:cNvSpPr txBox="1"/>
-          <p:nvPr/>
-        </p:nvSpPr>
-        <p:spPr>
-          <a:xfrm>
-            <a:off x="640080" y="3749039"/>
-            <a:ext cx="10881360" cy="1463040"/>
-          </a:xfrm>
-          <a:prstGeom prst="rect">
-            <a:avLst/>
-          </a:prstGeom>
-          <a:noFill/>
-        </p:spPr>
-        <p:txBody>
-          <a:bodyPr wrap="square" anchor="t" lIns="0" rIns="0">
-            <a:spAutoFit/>
-          </a:bodyPr>
-          <a:lstStyle/>
-          <a:p>
-            <a:pPr algn="l">
-              <a:spcAft>
-                <a:spcPts val="400"/>
-              </a:spcAft>
-            </a:pPr>
-            <a:r>
-              <a:rPr sz="1400" b="0">
+              <a:rPr sz="1300" b="0">
                 <a:solidFill>
                   <a:srgbClr val="2B2B2B"/>
                 </a:solidFill>
                 <a:latin typeface="Arial"/>
               </a:rPr>
-              <a:t>opus-5 absorbs the skill for free (0.93× / 1.01×) — largely because it already works ~2× the calls on the</a:t>
-            </a:r>
-          </a:p>
-          <a:p>
-            <a:pPr algn="l">
-              <a:spcAft>
-                <a:spcPts val="400"/>
-              </a:spcAft>
-            </a:pPr>
-            <a:r>
-              <a:rPr sz="1400" b="0">
+              <a:t>They diverge because unit price spans 5× (haiku $0.76 → opus-5 $3.80 per 1M input), which swamps the</a:t>
+            </a:r>
+          </a:p>
+          <a:p>
+            <a:pPr algn="l"/>
+            <a:r>
+              <a:rPr sz="1300" b="0">
                 <a:solidFill>
                   <a:srgbClr val="2B2B2B"/>
                 </a:solidFill>
                 <a:latin typeface="Arial"/>
               </a:rPr>
-              <a:t>OFF arm, so the guidance replaces effort rather than adding to it. On haiku the same skill costs ~2.5×.</a:t>
-            </a:r>
-          </a:p>
-          <a:p>
-            <a:pPr algn="l">
-              <a:spcAft>
-                <a:spcPts val="400"/>
-              </a:spcAft>
-            </a:pPr>
-            <a:r>
-              <a:rPr sz="1400" b="0">
-                <a:solidFill>
-                  <a:srgbClr val="2B2B2B"/>
-                </a:solidFill>
-                <a:latin typeface="Arial"/>
-              </a:rPr>
-              <a:t/>
-            </a:r>
-          </a:p>
-          <a:p>
-            <a:pPr algn="l">
-              <a:spcAft>
-                <a:spcPts val="400"/>
-              </a:spcAft>
-            </a:pPr>
-            <a:r>
-              <a:rPr sz="1400" b="0">
-                <a:solidFill>
-                  <a:srgbClr val="2B2B2B"/>
-                </a:solidFill>
-                <a:latin typeface="Arial"/>
-              </a:rPr>
-              <a:t>Caveat: this rests on ONE skill. Whether “free on opus-5” is an opus property or an xlsx property is</a:t>
-            </a:r>
-          </a:p>
-          <a:p>
-            <a:pPr algn="l">
-              <a:spcAft>
-                <a:spcPts val="400"/>
-              </a:spcAft>
-            </a:pPr>
-            <a:r>
-              <a:rPr sz="1400" b="0">
-                <a:solidFill>
-                  <a:srgbClr val="2B2B2B"/>
-                </a:solidFill>
-                <a:latin typeface="Arial"/>
-              </a:rPr>
-              <a:t>currently indistinguishable — three more tasks on docx / pptx / pdf would separate them.</a:t>
+              <a:t>~2× spread in token counts. On cortex-pyfix-001 the two rankings are EXACTLY INVERTED:</a:t>
+            </a:r>
+          </a:p>
+        </p:txBody>
+      </p:sp>
+      <p:graphicFrame>
+        <p:nvGraphicFramePr>
+          <p:cNvPr id="7" name="Table 6"/>
+          <p:cNvGraphicFramePr>
+            <a:graphicFrameLocks noGrp="1"/>
+          </p:cNvGraphicFramePr>
+          <p:nvPr/>
+        </p:nvGraphicFramePr>
+        <p:xfrm>
+          <a:off x="640080" y="3794760"/>
+          <a:ext cx="10515600" cy="1463040"/>
+        </p:xfrm>
+        <a:graphic>
+          <a:graphicData uri="http://schemas.openxmlformats.org/drawingml/2006/table">
+            <a:tbl>
+              <a:tblPr firstRow="1" bandRow="1">
+                <a:tableStyleId>{5C22544A-7EE6-4342-B048-85BDC9FD1C3A}</a:tableStyleId>
+              </a:tblPr>
+              <a:tblGrid>
+                <a:gridCol w="2834640"/>
+                <a:gridCol w="2377440"/>
+                <a:gridCol w="1463040"/>
+                <a:gridCol w="2377440"/>
+                <a:gridCol w="1463040"/>
+              </a:tblGrid>
+              <a:tr h="292608">
+                <a:tc>
+                  <a:txBody>
+                    <a:bodyPr/>
+                    <a:lstStyle/>
+                    <a:p>
+                      <a:pPr algn="l"/>
+                      <a:r>
+                        <a:rPr sz="1300" b="1">
+                          <a:solidFill>
+                            <a:srgbClr val="FFFFFF"/>
+                          </a:solidFill>
+                          <a:latin typeface="Arial"/>
+                        </a:rPr>
+                        <a:t>model</a:t>
+                      </a:r>
+                    </a:p>
+                  </a:txBody>
+                  <a:tcPr marL="64008" marR="64008" marT="18288" marB="18288">
+                    <a:solidFill>
+                      <a:srgbClr val="1E2761"/>
+                    </a:solidFill>
+                  </a:tcPr>
+                </a:tc>
+                <a:tc>
+                  <a:txBody>
+                    <a:bodyPr/>
+                    <a:lstStyle/>
+                    <a:p>
+                      <a:pPr algn="r"/>
+                      <a:r>
+                        <a:rPr sz="1300" b="1">
+                          <a:solidFill>
+                            <a:srgbClr val="FFFFFF"/>
+                          </a:solidFill>
+                          <a:latin typeface="Arial"/>
+                        </a:rPr>
+                        <a:t>tokens/solved</a:t>
+                      </a:r>
+                    </a:p>
+                  </a:txBody>
+                  <a:tcPr marL="64008" marR="64008" marT="18288" marB="18288">
+                    <a:solidFill>
+                      <a:srgbClr val="1E2761"/>
+                    </a:solidFill>
+                  </a:tcPr>
+                </a:tc>
+                <a:tc>
+                  <a:txBody>
+                    <a:bodyPr/>
+                    <a:lstStyle/>
+                    <a:p>
+                      <a:pPr algn="r"/>
+                      <a:r>
+                        <a:rPr sz="1300" b="1">
+                          <a:solidFill>
+                            <a:srgbClr val="FFFFFF"/>
+                          </a:solidFill>
+                          <a:latin typeface="Arial"/>
+                        </a:rPr>
+                        <a:t>rank</a:t>
+                      </a:r>
+                    </a:p>
+                  </a:txBody>
+                  <a:tcPr marL="64008" marR="64008" marT="18288" marB="18288">
+                    <a:solidFill>
+                      <a:srgbClr val="1E2761"/>
+                    </a:solidFill>
+                  </a:tcPr>
+                </a:tc>
+                <a:tc>
+                  <a:txBody>
+                    <a:bodyPr/>
+                    <a:lstStyle/>
+                    <a:p>
+                      <a:pPr algn="r"/>
+                      <a:r>
+                        <a:rPr sz="1300" b="1">
+                          <a:solidFill>
+                            <a:srgbClr val="FFFFFF"/>
+                          </a:solidFill>
+                          <a:latin typeface="Arial"/>
+                        </a:rPr>
+                        <a:t>$/solved</a:t>
+                      </a:r>
+                    </a:p>
+                  </a:txBody>
+                  <a:tcPr marL="64008" marR="64008" marT="18288" marB="18288">
+                    <a:solidFill>
+                      <a:srgbClr val="1E2761"/>
+                    </a:solidFill>
+                  </a:tcPr>
+                </a:tc>
+                <a:tc>
+                  <a:txBody>
+                    <a:bodyPr/>
+                    <a:lstStyle/>
+                    <a:p>
+                      <a:pPr algn="r"/>
+                      <a:r>
+                        <a:rPr sz="1300" b="1">
+                          <a:solidFill>
+                            <a:srgbClr val="FFFFFF"/>
+                          </a:solidFill>
+                          <a:latin typeface="Arial"/>
+                        </a:rPr>
+                        <a:t>rank</a:t>
+                      </a:r>
+                    </a:p>
+                  </a:txBody>
+                  <a:tcPr marL="64008" marR="64008" marT="18288" marB="18288">
+                    <a:solidFill>
+                      <a:srgbClr val="1E2761"/>
+                    </a:solidFill>
+                  </a:tcPr>
+                </a:tc>
+              </a:tr>
+              <a:tr h="292608">
+                <a:tc>
+                  <a:txBody>
+                    <a:bodyPr/>
+                    <a:lstStyle/>
+                    <a:p>
+                      <a:pPr algn="l"/>
+                      <a:r>
+                        <a:rPr sz="1300" b="0">
+                          <a:solidFill>
+                            <a:srgbClr val="2B2B2B"/>
+                          </a:solidFill>
+                          <a:latin typeface="Arial"/>
+                        </a:rPr>
+                        <a:t>opus-5</a:t>
+                      </a:r>
+                    </a:p>
+                  </a:txBody>
+                  <a:tcPr marL="64008" marR="64008" marT="18288" marB="18288">
+                    <a:solidFill>
+                      <a:srgbClr val="FAF9F5"/>
+                    </a:solidFill>
+                  </a:tcPr>
+                </a:tc>
+                <a:tc>
+                  <a:txBody>
+                    <a:bodyPr/>
+                    <a:lstStyle/>
+                    <a:p>
+                      <a:pPr algn="r"/>
+                      <a:r>
+                        <a:rPr sz="1300" b="0">
+                          <a:solidFill>
+                            <a:srgbClr val="2B2B2B"/>
+                          </a:solidFill>
+                          <a:latin typeface="Arial"/>
+                        </a:rPr>
+                        <a:t>144,834</a:t>
+                      </a:r>
+                    </a:p>
+                  </a:txBody>
+                  <a:tcPr marL="64008" marR="64008" marT="18288" marB="18288">
+                    <a:solidFill>
+                      <a:srgbClr val="FAF9F5"/>
+                    </a:solidFill>
+                  </a:tcPr>
+                </a:tc>
+                <a:tc>
+                  <a:txBody>
+                    <a:bodyPr/>
+                    <a:lstStyle/>
+                    <a:p>
+                      <a:pPr algn="r"/>
+                      <a:r>
+                        <a:rPr sz="1300" b="0">
+                          <a:solidFill>
+                            <a:srgbClr val="2C5F2D"/>
+                          </a:solidFill>
+                          <a:latin typeface="Arial"/>
+                        </a:rPr>
+                        <a:t>1st</a:t>
+                      </a:r>
+                    </a:p>
+                  </a:txBody>
+                  <a:tcPr marL="64008" marR="64008" marT="18288" marB="18288">
+                    <a:solidFill>
+                      <a:srgbClr val="FAF9F5"/>
+                    </a:solidFill>
+                  </a:tcPr>
+                </a:tc>
+                <a:tc>
+                  <a:txBody>
+                    <a:bodyPr/>
+                    <a:lstStyle/>
+                    <a:p>
+                      <a:pPr algn="r"/>
+                      <a:r>
+                        <a:rPr sz="1300" b="0">
+                          <a:solidFill>
+                            <a:srgbClr val="2B2B2B"/>
+                          </a:solidFill>
+                          <a:latin typeface="Arial"/>
+                        </a:rPr>
+                        <a:t>0.1030</a:t>
+                      </a:r>
+                    </a:p>
+                  </a:txBody>
+                  <a:tcPr marL="64008" marR="64008" marT="18288" marB="18288">
+                    <a:solidFill>
+                      <a:srgbClr val="FAF9F5"/>
+                    </a:solidFill>
+                  </a:tcPr>
+                </a:tc>
+                <a:tc>
+                  <a:txBody>
+                    <a:bodyPr/>
+                    <a:lstStyle/>
+                    <a:p>
+                      <a:pPr algn="r"/>
+                      <a:r>
+                        <a:rPr sz="1300" b="0">
+                          <a:solidFill>
+                            <a:srgbClr val="B85042"/>
+                          </a:solidFill>
+                          <a:latin typeface="Arial"/>
+                        </a:rPr>
+                        <a:t>4th</a:t>
+                      </a:r>
+                    </a:p>
+                  </a:txBody>
+                  <a:tcPr marL="64008" marR="64008" marT="18288" marB="18288">
+                    <a:solidFill>
+                      <a:srgbClr val="FAF9F5"/>
+                    </a:solidFill>
+                  </a:tcPr>
+                </a:tc>
+              </a:tr>
+              <a:tr h="292608">
+                <a:tc>
+                  <a:txBody>
+                    <a:bodyPr/>
+                    <a:lstStyle/>
+                    <a:p>
+                      <a:pPr algn="l"/>
+                      <a:r>
+                        <a:rPr sz="1300" b="0">
+                          <a:solidFill>
+                            <a:srgbClr val="2B2B2B"/>
+                          </a:solidFill>
+                          <a:latin typeface="Arial"/>
+                        </a:rPr>
+                        <a:t>sonnet-4-6</a:t>
+                      </a:r>
+                    </a:p>
+                  </a:txBody>
+                  <a:tcPr marL="64008" marR="64008" marT="18288" marB="18288">
+                    <a:solidFill>
+                      <a:srgbClr val="FFFFFF"/>
+                    </a:solidFill>
+                  </a:tcPr>
+                </a:tc>
+                <a:tc>
+                  <a:txBody>
+                    <a:bodyPr/>
+                    <a:lstStyle/>
+                    <a:p>
+                      <a:pPr algn="r"/>
+                      <a:r>
+                        <a:rPr sz="1300" b="0">
+                          <a:solidFill>
+                            <a:srgbClr val="2B2B2B"/>
+                          </a:solidFill>
+                          <a:latin typeface="Arial"/>
+                        </a:rPr>
+                        <a:t>196,634</a:t>
+                      </a:r>
+                    </a:p>
+                  </a:txBody>
+                  <a:tcPr marL="64008" marR="64008" marT="18288" marB="18288">
+                    <a:solidFill>
+                      <a:srgbClr val="FFFFFF"/>
+                    </a:solidFill>
+                  </a:tcPr>
+                </a:tc>
+                <a:tc>
+                  <a:txBody>
+                    <a:bodyPr/>
+                    <a:lstStyle/>
+                    <a:p>
+                      <a:pPr algn="r"/>
+                      <a:r>
+                        <a:rPr sz="1300" b="0">
+                          <a:solidFill>
+                            <a:srgbClr val="2B2B2B"/>
+                          </a:solidFill>
+                          <a:latin typeface="Arial"/>
+                        </a:rPr>
+                        <a:t>2nd</a:t>
+                      </a:r>
+                    </a:p>
+                  </a:txBody>
+                  <a:tcPr marL="64008" marR="64008" marT="18288" marB="18288">
+                    <a:solidFill>
+                      <a:srgbClr val="FFFFFF"/>
+                    </a:solidFill>
+                  </a:tcPr>
+                </a:tc>
+                <a:tc>
+                  <a:txBody>
+                    <a:bodyPr/>
+                    <a:lstStyle/>
+                    <a:p>
+                      <a:pPr algn="r"/>
+                      <a:r>
+                        <a:rPr sz="1300" b="0">
+                          <a:solidFill>
+                            <a:srgbClr val="2B2B2B"/>
+                          </a:solidFill>
+                          <a:latin typeface="Arial"/>
+                        </a:rPr>
+                        <a:t>0.0842</a:t>
+                      </a:r>
+                    </a:p>
+                  </a:txBody>
+                  <a:tcPr marL="64008" marR="64008" marT="18288" marB="18288">
+                    <a:solidFill>
+                      <a:srgbClr val="FFFFFF"/>
+                    </a:solidFill>
+                  </a:tcPr>
+                </a:tc>
+                <a:tc>
+                  <a:txBody>
+                    <a:bodyPr/>
+                    <a:lstStyle/>
+                    <a:p>
+                      <a:pPr algn="r"/>
+                      <a:r>
+                        <a:rPr sz="1300" b="0">
+                          <a:solidFill>
+                            <a:srgbClr val="2B2B2B"/>
+                          </a:solidFill>
+                          <a:latin typeface="Arial"/>
+                        </a:rPr>
+                        <a:t>3rd</a:t>
+                      </a:r>
+                    </a:p>
+                  </a:txBody>
+                  <a:tcPr marL="64008" marR="64008" marT="18288" marB="18288">
+                    <a:solidFill>
+                      <a:srgbClr val="FFFFFF"/>
+                    </a:solidFill>
+                  </a:tcPr>
+                </a:tc>
+              </a:tr>
+              <a:tr h="292608">
+                <a:tc>
+                  <a:txBody>
+                    <a:bodyPr/>
+                    <a:lstStyle/>
+                    <a:p>
+                      <a:pPr algn="l"/>
+                      <a:r>
+                        <a:rPr sz="1300" b="0">
+                          <a:solidFill>
+                            <a:srgbClr val="2B2B2B"/>
+                          </a:solidFill>
+                          <a:latin typeface="Arial"/>
+                        </a:rPr>
+                        <a:t>sonnet-5</a:t>
+                      </a:r>
+                    </a:p>
+                  </a:txBody>
+                  <a:tcPr marL="64008" marR="64008" marT="18288" marB="18288">
+                    <a:solidFill>
+                      <a:srgbClr val="FAF9F5"/>
+                    </a:solidFill>
+                  </a:tcPr>
+                </a:tc>
+                <a:tc>
+                  <a:txBody>
+                    <a:bodyPr/>
+                    <a:lstStyle/>
+                    <a:p>
+                      <a:pPr algn="r"/>
+                      <a:r>
+                        <a:rPr sz="1300" b="0">
+                          <a:solidFill>
+                            <a:srgbClr val="2B2B2B"/>
+                          </a:solidFill>
+                          <a:latin typeface="Arial"/>
+                        </a:rPr>
+                        <a:t>200,732</a:t>
+                      </a:r>
+                    </a:p>
+                  </a:txBody>
+                  <a:tcPr marL="64008" marR="64008" marT="18288" marB="18288">
+                    <a:solidFill>
+                      <a:srgbClr val="FAF9F5"/>
+                    </a:solidFill>
+                  </a:tcPr>
+                </a:tc>
+                <a:tc>
+                  <a:txBody>
+                    <a:bodyPr/>
+                    <a:lstStyle/>
+                    <a:p>
+                      <a:pPr algn="r"/>
+                      <a:r>
+                        <a:rPr sz="1300" b="0">
+                          <a:solidFill>
+                            <a:srgbClr val="2B2B2B"/>
+                          </a:solidFill>
+                          <a:latin typeface="Arial"/>
+                        </a:rPr>
+                        <a:t>3rd</a:t>
+                      </a:r>
+                    </a:p>
+                  </a:txBody>
+                  <a:tcPr marL="64008" marR="64008" marT="18288" marB="18288">
+                    <a:solidFill>
+                      <a:srgbClr val="FAF9F5"/>
+                    </a:solidFill>
+                  </a:tcPr>
+                </a:tc>
+                <a:tc>
+                  <a:txBody>
+                    <a:bodyPr/>
+                    <a:lstStyle/>
+                    <a:p>
+                      <a:pPr algn="r"/>
+                      <a:r>
+                        <a:rPr sz="1300" b="0">
+                          <a:solidFill>
+                            <a:srgbClr val="2B2B2B"/>
+                          </a:solidFill>
+                          <a:latin typeface="Arial"/>
+                        </a:rPr>
+                        <a:t>0.0588</a:t>
+                      </a:r>
+                    </a:p>
+                  </a:txBody>
+                  <a:tcPr marL="64008" marR="64008" marT="18288" marB="18288">
+                    <a:solidFill>
+                      <a:srgbClr val="FAF9F5"/>
+                    </a:solidFill>
+                  </a:tcPr>
+                </a:tc>
+                <a:tc>
+                  <a:txBody>
+                    <a:bodyPr/>
+                    <a:lstStyle/>
+                    <a:p>
+                      <a:pPr algn="r"/>
+                      <a:r>
+                        <a:rPr sz="1300" b="0">
+                          <a:solidFill>
+                            <a:srgbClr val="2B2B2B"/>
+                          </a:solidFill>
+                          <a:latin typeface="Arial"/>
+                        </a:rPr>
+                        <a:t>2nd</a:t>
+                      </a:r>
+                    </a:p>
+                  </a:txBody>
+                  <a:tcPr marL="64008" marR="64008" marT="18288" marB="18288">
+                    <a:solidFill>
+                      <a:srgbClr val="FAF9F5"/>
+                    </a:solidFill>
+                  </a:tcPr>
+                </a:tc>
+              </a:tr>
+              <a:tr h="292608">
+                <a:tc>
+                  <a:txBody>
+                    <a:bodyPr/>
+                    <a:lstStyle/>
+                    <a:p>
+                      <a:pPr algn="l"/>
+                      <a:r>
+                        <a:rPr sz="1300" b="0">
+                          <a:solidFill>
+                            <a:srgbClr val="2B2B2B"/>
+                          </a:solidFill>
+                          <a:latin typeface="Arial"/>
+                        </a:rPr>
+                        <a:t>haiku-4-5</a:t>
+                      </a:r>
+                    </a:p>
+                  </a:txBody>
+                  <a:tcPr marL="64008" marR="64008" marT="18288" marB="18288">
+                    <a:solidFill>
+                      <a:srgbClr val="FFFFFF"/>
+                    </a:solidFill>
+                  </a:tcPr>
+                </a:tc>
+                <a:tc>
+                  <a:txBody>
+                    <a:bodyPr/>
+                    <a:lstStyle/>
+                    <a:p>
+                      <a:pPr algn="r"/>
+                      <a:r>
+                        <a:rPr sz="1300" b="0">
+                          <a:solidFill>
+                            <a:srgbClr val="2B2B2B"/>
+                          </a:solidFill>
+                          <a:latin typeface="Arial"/>
+                        </a:rPr>
+                        <a:t>204,034</a:t>
+                      </a:r>
+                    </a:p>
+                  </a:txBody>
+                  <a:tcPr marL="64008" marR="64008" marT="18288" marB="18288">
+                    <a:solidFill>
+                      <a:srgbClr val="FFFFFF"/>
+                    </a:solidFill>
+                  </a:tcPr>
+                </a:tc>
+                <a:tc>
+                  <a:txBody>
+                    <a:bodyPr/>
+                    <a:lstStyle/>
+                    <a:p>
+                      <a:pPr algn="r"/>
+                      <a:r>
+                        <a:rPr sz="1300" b="0">
+                          <a:solidFill>
+                            <a:srgbClr val="B85042"/>
+                          </a:solidFill>
+                          <a:latin typeface="Arial"/>
+                        </a:rPr>
+                        <a:t>4th</a:t>
+                      </a:r>
+                    </a:p>
+                  </a:txBody>
+                  <a:tcPr marL="64008" marR="64008" marT="18288" marB="18288">
+                    <a:solidFill>
+                      <a:srgbClr val="FFFFFF"/>
+                    </a:solidFill>
+                  </a:tcPr>
+                </a:tc>
+                <a:tc>
+                  <a:txBody>
+                    <a:bodyPr/>
+                    <a:lstStyle/>
+                    <a:p>
+                      <a:pPr algn="r"/>
+                      <a:r>
+                        <a:rPr sz="1300" b="0">
+                          <a:solidFill>
+                            <a:srgbClr val="2B2B2B"/>
+                          </a:solidFill>
+                          <a:latin typeface="Arial"/>
+                        </a:rPr>
+                        <a:t>0.0313</a:t>
+                      </a:r>
+                    </a:p>
+                  </a:txBody>
+                  <a:tcPr marL="64008" marR="64008" marT="18288" marB="18288">
+                    <a:solidFill>
+                      <a:srgbClr val="FFFFFF"/>
+                    </a:solidFill>
+                  </a:tcPr>
+                </a:tc>
+                <a:tc>
+                  <a:txBody>
+                    <a:bodyPr/>
+                    <a:lstStyle/>
+                    <a:p>
+                      <a:pPr algn="r"/>
+                      <a:r>
+                        <a:rPr sz="1300" b="0">
+                          <a:solidFill>
+                            <a:srgbClr val="2C5F2D"/>
+                          </a:solidFill>
+                          <a:latin typeface="Arial"/>
+                        </a:rPr>
+                        <a:t>1st</a:t>
+                      </a:r>
+                    </a:p>
+                  </a:txBody>
+                  <a:tcPr marL="64008" marR="64008" marT="18288" marB="18288">
+                    <a:solidFill>
+                      <a:srgbClr val="FFFFFF"/>
+                    </a:solidFill>
+                  </a:tcPr>
+                </a:tc>
+              </a:tr>
+            </a:tbl>
+          </a:graphicData>
+        </a:graphic>
+      </p:graphicFrame>
+      <p:sp>
+        <p:nvSpPr>
+          <p:cNvPr id="8" name="Rounded Rectangle 7"/>
+          <p:cNvSpPr/>
+          <p:nvPr/>
+        </p:nvSpPr>
+        <p:spPr>
+          <a:xfrm>
+            <a:off x="640080" y="5440680"/>
+            <a:ext cx="10241280" cy="731520"/>
+          </a:xfrm>
+          <a:prstGeom prst="roundRect">
+            <a:avLst/>
+          </a:prstGeom>
+          <a:solidFill>
+            <a:srgbClr val="1E2761"/>
+          </a:solidFill>
+          <a:ln w="15875">
+            <a:solidFill>
+              <a:srgbClr val="1E2761"/>
+            </a:solidFill>
+          </a:ln>
+          <a:effectLst/>
+        </p:spPr>
+        <p:style>
+          <a:lnRef idx="1">
+            <a:schemeClr val="accent1"/>
+          </a:lnRef>
+          <a:fillRef idx="3">
+            <a:schemeClr val="accent1"/>
+          </a:fillRef>
+          <a:effectRef idx="2">
+            <a:schemeClr val="accent1"/>
+          </a:effectRef>
+          <a:fontRef idx="minor">
+            <a:schemeClr val="lt1"/>
+          </a:fontRef>
+        </p:style>
+        <p:txBody>
+          <a:bodyPr rtlCol="0" anchor="ctr" wrap="square"/>
+          <a:lstStyle/>
+          <a:p>
+            <a:pPr algn="ctr"/>
+            <a:r>
+              <a:rPr sz="1400" b="1">
+                <a:solidFill>
+                  <a:srgbClr val="FFFFFF"/>
+                </a:solidFill>
+                <a:latin typeface="Arial"/>
+              </a:rPr>
+              <a:t>opus-5 is the MOST token-efficient and the LEAST cost-efficient model tested.</a:t>
+            </a:r>
+          </a:p>
+          <a:p>
+            <a:pPr algn="ctr"/>
+            <a:r>
+              <a:rPr sz="1400" b="1">
+                <a:solidFill>
+                  <a:srgbClr val="FFFFFF"/>
+                </a:solidFill>
+                <a:latin typeface="Arial"/>
+              </a:rPr>
+              <a:t>Quoting one number and calling it “efficiency” picks the answer by accident.</a:t>
             </a:r>
           </a:p>
         </p:txBody>
@@ -7003,7 +7481,997 @@
                 </a:solidFill>
                 <a:latin typeface="Arial"/>
               </a:rPr>
-              <a:t>3 · FINDINGS  ·  FINDING 5 · SELECTION</a:t>
+              <a:t>3 · FINDINGS  ·  FINDING 5 · OVERHEAD</a:t>
+            </a:r>
+          </a:p>
+        </p:txBody>
+      </p:sp>
+      <p:sp>
+        <p:nvSpPr>
+          <p:cNvPr id="3" name="TextBox 2"/>
+          <p:cNvSpPr txBox="1"/>
+          <p:nvPr/>
+        </p:nvSpPr>
+        <p:spPr>
+          <a:xfrm>
+            <a:off x="640080" y="685800"/>
+            <a:ext cx="10881360" cy="731520"/>
+          </a:xfrm>
+          <a:prstGeom prst="rect">
+            <a:avLst/>
+          </a:prstGeom>
+          <a:noFill/>
+        </p:spPr>
+        <p:txBody>
+          <a:bodyPr wrap="square" anchor="t" lIns="0" rIns="0">
+            <a:spAutoFit/>
+          </a:bodyPr>
+          <a:lstStyle/>
+          <a:p>
+            <a:pPr algn="l"/>
+            <a:r>
+              <a:rPr sz="3000" b="1">
+                <a:solidFill>
+                  <a:srgbClr val="1E2761"/>
+                </a:solidFill>
+                <a:latin typeface="Arial"/>
+              </a:rPr>
+              <a:t>Skill cost is a property of skill × model</a:t>
+            </a:r>
+          </a:p>
+        </p:txBody>
+      </p:sp>
+      <p:sp>
+        <p:nvSpPr>
+          <p:cNvPr id="4" name="Rectangle 3"/>
+          <p:cNvSpPr/>
+          <p:nvPr/>
+        </p:nvSpPr>
+        <p:spPr>
+          <a:xfrm>
+            <a:off x="640080" y="1481328"/>
+            <a:ext cx="1005840" cy="45720"/>
+          </a:xfrm>
+          <a:prstGeom prst="rect">
+            <a:avLst/>
+          </a:prstGeom>
+          <a:solidFill>
+            <a:srgbClr val="CADCFC"/>
+          </a:solidFill>
+          <a:ln>
+            <a:noFill/>
+          </a:ln>
+          <a:effectLst/>
+        </p:spPr>
+        <p:style>
+          <a:lnRef idx="1">
+            <a:schemeClr val="accent1"/>
+          </a:lnRef>
+          <a:fillRef idx="3">
+            <a:schemeClr val="accent1"/>
+          </a:fillRef>
+          <a:effectRef idx="2">
+            <a:schemeClr val="accent1"/>
+          </a:effectRef>
+          <a:fontRef idx="minor">
+            <a:schemeClr val="lt1"/>
+          </a:fontRef>
+        </p:style>
+        <p:txBody>
+          <a:bodyPr rtlCol="0" anchor="ctr"/>
+          <a:lstStyle/>
+          <a:p>
+            <a:pPr algn="ctr"/>
+          </a:p>
+        </p:txBody>
+      </p:sp>
+      <p:sp>
+        <p:nvSpPr>
+          <p:cNvPr id="5" name="TextBox 4"/>
+          <p:cNvSpPr txBox="1"/>
+          <p:nvPr/>
+        </p:nvSpPr>
+        <p:spPr>
+          <a:xfrm>
+            <a:off x="640080" y="1737360"/>
+            <a:ext cx="10881360" cy="502920"/>
+          </a:xfrm>
+          <a:prstGeom prst="rect">
+            <a:avLst/>
+          </a:prstGeom>
+          <a:noFill/>
+        </p:spPr>
+        <p:txBody>
+          <a:bodyPr wrap="square" anchor="t" lIns="0" rIns="0">
+            <a:spAutoFit/>
+          </a:bodyPr>
+          <a:lstStyle/>
+          <a:p>
+            <a:pPr algn="l"/>
+            <a:r>
+              <a:rPr sz="1300" b="0">
+                <a:solidFill>
+                  <a:srgbClr val="6B6B6B"/>
+                </a:solidFill>
+                <a:latin typeface="Arial"/>
+              </a:rPr>
+              <a:t>skill-on ÷ skill-off, same skill (xlsx), same task, same model. Tokens AND dollars — they differ,</a:t>
+            </a:r>
+          </a:p>
+          <a:p>
+            <a:pPr algn="l"/>
+            <a:r>
+              <a:rPr sz="1300" b="0">
+                <a:solidFill>
+                  <a:srgbClr val="6B6B6B"/>
+                </a:solidFill>
+                <a:latin typeface="Arial"/>
+              </a:rPr>
+              <a:t>because the input/output/cache mix shifts between arms even at a fixed unit price.</a:t>
+            </a:r>
+          </a:p>
+        </p:txBody>
+      </p:sp>
+      <p:graphicFrame>
+        <p:nvGraphicFramePr>
+          <p:cNvPr id="6" name="Table 5"/>
+          <p:cNvGraphicFramePr>
+            <a:graphicFrameLocks noGrp="1"/>
+          </p:cNvGraphicFramePr>
+          <p:nvPr/>
+        </p:nvGraphicFramePr>
+        <p:xfrm>
+          <a:off x="640080" y="2377440"/>
+          <a:ext cx="10881360" cy="1463040"/>
+        </p:xfrm>
+        <a:graphic>
+          <a:graphicData uri="http://schemas.openxmlformats.org/drawingml/2006/table">
+            <a:tbl>
+              <a:tblPr firstRow="1" bandRow="1">
+                <a:tableStyleId>{5C22544A-7EE6-4342-B048-85BDC9FD1C3A}</a:tableStyleId>
+              </a:tblPr>
+              <a:tblGrid>
+                <a:gridCol w="3566160"/>
+                <a:gridCol w="1828800"/>
+                <a:gridCol w="1828800"/>
+                <a:gridCol w="1828800"/>
+                <a:gridCol w="1828800"/>
+              </a:tblGrid>
+              <a:tr h="292608">
+                <a:tc>
+                  <a:txBody>
+                    <a:bodyPr/>
+                    <a:lstStyle/>
+                    <a:p>
+                      <a:pPr algn="l"/>
+                      <a:r>
+                        <a:rPr sz="1300" b="1">
+                          <a:solidFill>
+                            <a:srgbClr val="FFFFFF"/>
+                          </a:solidFill>
+                          <a:latin typeface="Arial"/>
+                        </a:rPr>
+                        <a:t>task / measure</a:t>
+                      </a:r>
+                    </a:p>
+                  </a:txBody>
+                  <a:tcPr marL="64008" marR="64008" marT="18288" marB="18288">
+                    <a:solidFill>
+                      <a:srgbClr val="1E2761"/>
+                    </a:solidFill>
+                  </a:tcPr>
+                </a:tc>
+                <a:tc>
+                  <a:txBody>
+                    <a:bodyPr/>
+                    <a:lstStyle/>
+                    <a:p>
+                      <a:pPr algn="r"/>
+                      <a:r>
+                        <a:rPr sz="1300" b="1">
+                          <a:solidFill>
+                            <a:srgbClr val="FFFFFF"/>
+                          </a:solidFill>
+                          <a:latin typeface="Arial"/>
+                        </a:rPr>
+                        <a:t>haiku-4-5</a:t>
+                      </a:r>
+                    </a:p>
+                  </a:txBody>
+                  <a:tcPr marL="64008" marR="64008" marT="18288" marB="18288">
+                    <a:solidFill>
+                      <a:srgbClr val="1E2761"/>
+                    </a:solidFill>
+                  </a:tcPr>
+                </a:tc>
+                <a:tc>
+                  <a:txBody>
+                    <a:bodyPr/>
+                    <a:lstStyle/>
+                    <a:p>
+                      <a:pPr algn="r"/>
+                      <a:r>
+                        <a:rPr sz="1300" b="1">
+                          <a:solidFill>
+                            <a:srgbClr val="FFFFFF"/>
+                          </a:solidFill>
+                          <a:latin typeface="Arial"/>
+                        </a:rPr>
+                        <a:t>sonnet-4-6</a:t>
+                      </a:r>
+                    </a:p>
+                  </a:txBody>
+                  <a:tcPr marL="64008" marR="64008" marT="18288" marB="18288">
+                    <a:solidFill>
+                      <a:srgbClr val="1E2761"/>
+                    </a:solidFill>
+                  </a:tcPr>
+                </a:tc>
+                <a:tc>
+                  <a:txBody>
+                    <a:bodyPr/>
+                    <a:lstStyle/>
+                    <a:p>
+                      <a:pPr algn="r"/>
+                      <a:r>
+                        <a:rPr sz="1300" b="1">
+                          <a:solidFill>
+                            <a:srgbClr val="FFFFFF"/>
+                          </a:solidFill>
+                          <a:latin typeface="Arial"/>
+                        </a:rPr>
+                        <a:t>sonnet-5</a:t>
+                      </a:r>
+                    </a:p>
+                  </a:txBody>
+                  <a:tcPr marL="64008" marR="64008" marT="18288" marB="18288">
+                    <a:solidFill>
+                      <a:srgbClr val="1E2761"/>
+                    </a:solidFill>
+                  </a:tcPr>
+                </a:tc>
+                <a:tc>
+                  <a:txBody>
+                    <a:bodyPr/>
+                    <a:lstStyle/>
+                    <a:p>
+                      <a:pPr algn="r"/>
+                      <a:r>
+                        <a:rPr sz="1300" b="1">
+                          <a:solidFill>
+                            <a:srgbClr val="FFFFFF"/>
+                          </a:solidFill>
+                          <a:latin typeface="Arial"/>
+                        </a:rPr>
+                        <a:t>opus-5</a:t>
+                      </a:r>
+                    </a:p>
+                  </a:txBody>
+                  <a:tcPr marL="64008" marR="64008" marT="18288" marB="18288">
+                    <a:solidFill>
+                      <a:srgbClr val="1E2761"/>
+                    </a:solidFill>
+                  </a:tcPr>
+                </a:tc>
+              </a:tr>
+              <a:tr h="292608">
+                <a:tc>
+                  <a:txBody>
+                    <a:bodyPr/>
+                    <a:lstStyle/>
+                    <a:p>
+                      <a:pPr algn="l"/>
+                      <a:r>
+                        <a:rPr sz="1300" b="0">
+                          <a:solidFill>
+                            <a:srgbClr val="2B2B2B"/>
+                          </a:solidFill>
+                          <a:latin typeface="Arial"/>
+                        </a:rPr>
+                        <a:t>xlsx-fin-colors — tokens</a:t>
+                      </a:r>
+                    </a:p>
+                  </a:txBody>
+                  <a:tcPr marL="64008" marR="64008" marT="18288" marB="18288">
+                    <a:solidFill>
+                      <a:srgbClr val="FAF9F5"/>
+                    </a:solidFill>
+                  </a:tcPr>
+                </a:tc>
+                <a:tc>
+                  <a:txBody>
+                    <a:bodyPr/>
+                    <a:lstStyle/>
+                    <a:p>
+                      <a:pPr algn="r"/>
+                      <a:r>
+                        <a:rPr sz="1300" b="0">
+                          <a:solidFill>
+                            <a:srgbClr val="B85042"/>
+                          </a:solidFill>
+                          <a:latin typeface="Arial"/>
+                        </a:rPr>
+                        <a:t>2.88×</a:t>
+                      </a:r>
+                    </a:p>
+                  </a:txBody>
+                  <a:tcPr marL="64008" marR="64008" marT="18288" marB="18288">
+                    <a:solidFill>
+                      <a:srgbClr val="FAF9F5"/>
+                    </a:solidFill>
+                  </a:tcPr>
+                </a:tc>
+                <a:tc>
+                  <a:txBody>
+                    <a:bodyPr/>
+                    <a:lstStyle/>
+                    <a:p>
+                      <a:pPr algn="r"/>
+                      <a:r>
+                        <a:rPr sz="1300" b="0">
+                          <a:solidFill>
+                            <a:srgbClr val="2B2B2B"/>
+                          </a:solidFill>
+                          <a:latin typeface="Arial"/>
+                        </a:rPr>
+                        <a:t>1.50×</a:t>
+                      </a:r>
+                    </a:p>
+                  </a:txBody>
+                  <a:tcPr marL="64008" marR="64008" marT="18288" marB="18288">
+                    <a:solidFill>
+                      <a:srgbClr val="FAF9F5"/>
+                    </a:solidFill>
+                  </a:tcPr>
+                </a:tc>
+                <a:tc>
+                  <a:txBody>
+                    <a:bodyPr/>
+                    <a:lstStyle/>
+                    <a:p>
+                      <a:pPr algn="r"/>
+                      <a:r>
+                        <a:rPr sz="1300" b="0">
+                          <a:solidFill>
+                            <a:srgbClr val="2B2B2B"/>
+                          </a:solidFill>
+                          <a:latin typeface="Arial"/>
+                        </a:rPr>
+                        <a:t>2.01×</a:t>
+                      </a:r>
+                    </a:p>
+                  </a:txBody>
+                  <a:tcPr marL="64008" marR="64008" marT="18288" marB="18288">
+                    <a:solidFill>
+                      <a:srgbClr val="FAF9F5"/>
+                    </a:solidFill>
+                  </a:tcPr>
+                </a:tc>
+                <a:tc>
+                  <a:txBody>
+                    <a:bodyPr/>
+                    <a:lstStyle/>
+                    <a:p>
+                      <a:pPr algn="r"/>
+                      <a:r>
+                        <a:rPr sz="1300" b="0">
+                          <a:solidFill>
+                            <a:srgbClr val="2C5F2D"/>
+                          </a:solidFill>
+                          <a:latin typeface="Arial"/>
+                        </a:rPr>
+                        <a:t>0.93×</a:t>
+                      </a:r>
+                    </a:p>
+                  </a:txBody>
+                  <a:tcPr marL="64008" marR="64008" marT="18288" marB="18288">
+                    <a:solidFill>
+                      <a:srgbClr val="FAF9F5"/>
+                    </a:solidFill>
+                  </a:tcPr>
+                </a:tc>
+              </a:tr>
+              <a:tr h="292608">
+                <a:tc>
+                  <a:txBody>
+                    <a:bodyPr/>
+                    <a:lstStyle/>
+                    <a:p>
+                      <a:pPr algn="l"/>
+                      <a:r>
+                        <a:rPr sz="1300" b="0">
+                          <a:solidFill>
+                            <a:srgbClr val="2B2B2B"/>
+                          </a:solidFill>
+                          <a:latin typeface="Arial"/>
+                        </a:rPr>
+                        <a:t>xlsx-fin-colors — dollars</a:t>
+                      </a:r>
+                    </a:p>
+                  </a:txBody>
+                  <a:tcPr marL="64008" marR="64008" marT="18288" marB="18288">
+                    <a:solidFill>
+                      <a:srgbClr val="FFFFFF"/>
+                    </a:solidFill>
+                  </a:tcPr>
+                </a:tc>
+                <a:tc>
+                  <a:txBody>
+                    <a:bodyPr/>
+                    <a:lstStyle/>
+                    <a:p>
+                      <a:pPr algn="r"/>
+                      <a:r>
+                        <a:rPr sz="1300" b="0">
+                          <a:solidFill>
+                            <a:srgbClr val="B85042"/>
+                          </a:solidFill>
+                          <a:latin typeface="Arial"/>
+                        </a:rPr>
+                        <a:t>1.97×</a:t>
+                      </a:r>
+                    </a:p>
+                  </a:txBody>
+                  <a:tcPr marL="64008" marR="64008" marT="18288" marB="18288">
+                    <a:solidFill>
+                      <a:srgbClr val="FFFFFF"/>
+                    </a:solidFill>
+                  </a:tcPr>
+                </a:tc>
+                <a:tc>
+                  <a:txBody>
+                    <a:bodyPr/>
+                    <a:lstStyle/>
+                    <a:p>
+                      <a:pPr algn="r"/>
+                      <a:r>
+                        <a:rPr sz="1300" b="0">
+                          <a:solidFill>
+                            <a:srgbClr val="2B2B2B"/>
+                          </a:solidFill>
+                          <a:latin typeface="Arial"/>
+                        </a:rPr>
+                        <a:t>1.33×</a:t>
+                      </a:r>
+                    </a:p>
+                  </a:txBody>
+                  <a:tcPr marL="64008" marR="64008" marT="18288" marB="18288">
+                    <a:solidFill>
+                      <a:srgbClr val="FFFFFF"/>
+                    </a:solidFill>
+                  </a:tcPr>
+                </a:tc>
+                <a:tc>
+                  <a:txBody>
+                    <a:bodyPr/>
+                    <a:lstStyle/>
+                    <a:p>
+                      <a:pPr algn="r"/>
+                      <a:r>
+                        <a:rPr sz="1300" b="0">
+                          <a:solidFill>
+                            <a:srgbClr val="2B2B2B"/>
+                          </a:solidFill>
+                          <a:latin typeface="Arial"/>
+                        </a:rPr>
+                        <a:t>1.88×</a:t>
+                      </a:r>
+                    </a:p>
+                  </a:txBody>
+                  <a:tcPr marL="64008" marR="64008" marT="18288" marB="18288">
+                    <a:solidFill>
+                      <a:srgbClr val="FFFFFF"/>
+                    </a:solidFill>
+                  </a:tcPr>
+                </a:tc>
+                <a:tc>
+                  <a:txBody>
+                    <a:bodyPr/>
+                    <a:lstStyle/>
+                    <a:p>
+                      <a:pPr algn="r"/>
+                      <a:r>
+                        <a:rPr sz="1300" b="0">
+                          <a:solidFill>
+                            <a:srgbClr val="2C5F2D"/>
+                          </a:solidFill>
+                          <a:latin typeface="Arial"/>
+                        </a:rPr>
+                        <a:t>1.06×</a:t>
+                      </a:r>
+                    </a:p>
+                  </a:txBody>
+                  <a:tcPr marL="64008" marR="64008" marT="18288" marB="18288">
+                    <a:solidFill>
+                      <a:srgbClr val="FFFFFF"/>
+                    </a:solidFill>
+                  </a:tcPr>
+                </a:tc>
+              </a:tr>
+              <a:tr h="292608">
+                <a:tc>
+                  <a:txBody>
+                    <a:bodyPr/>
+                    <a:lstStyle/>
+                    <a:p>
+                      <a:pPr algn="l"/>
+                      <a:r>
+                        <a:rPr sz="1300" b="0">
+                          <a:solidFill>
+                            <a:srgbClr val="2B2B2B"/>
+                          </a:solidFill>
+                          <a:latin typeface="Arial"/>
+                        </a:rPr>
+                        <a:t>xlsx-fin-font-clean — tokens</a:t>
+                      </a:r>
+                    </a:p>
+                  </a:txBody>
+                  <a:tcPr marL="64008" marR="64008" marT="18288" marB="18288">
+                    <a:solidFill>
+                      <a:srgbClr val="FAF9F5"/>
+                    </a:solidFill>
+                  </a:tcPr>
+                </a:tc>
+                <a:tc>
+                  <a:txBody>
+                    <a:bodyPr/>
+                    <a:lstStyle/>
+                    <a:p>
+                      <a:pPr algn="r"/>
+                      <a:r>
+                        <a:rPr sz="1300" b="0">
+                          <a:solidFill>
+                            <a:srgbClr val="B85042"/>
+                          </a:solidFill>
+                          <a:latin typeface="Arial"/>
+                        </a:rPr>
+                        <a:t>2.37×</a:t>
+                      </a:r>
+                    </a:p>
+                  </a:txBody>
+                  <a:tcPr marL="64008" marR="64008" marT="18288" marB="18288">
+                    <a:solidFill>
+                      <a:srgbClr val="FAF9F5"/>
+                    </a:solidFill>
+                  </a:tcPr>
+                </a:tc>
+                <a:tc>
+                  <a:txBody>
+                    <a:bodyPr/>
+                    <a:lstStyle/>
+                    <a:p>
+                      <a:pPr algn="r"/>
+                      <a:r>
+                        <a:rPr sz="1300" b="0">
+                          <a:solidFill>
+                            <a:srgbClr val="2B2B2B"/>
+                          </a:solidFill>
+                          <a:latin typeface="Arial"/>
+                        </a:rPr>
+                        <a:t>2.08×</a:t>
+                      </a:r>
+                    </a:p>
+                  </a:txBody>
+                  <a:tcPr marL="64008" marR="64008" marT="18288" marB="18288">
+                    <a:solidFill>
+                      <a:srgbClr val="FAF9F5"/>
+                    </a:solidFill>
+                  </a:tcPr>
+                </a:tc>
+                <a:tc>
+                  <a:txBody>
+                    <a:bodyPr/>
+                    <a:lstStyle/>
+                    <a:p>
+                      <a:pPr algn="r"/>
+                      <a:r>
+                        <a:rPr sz="1300" b="0">
+                          <a:solidFill>
+                            <a:srgbClr val="2B2B2B"/>
+                          </a:solidFill>
+                          <a:latin typeface="Arial"/>
+                        </a:rPr>
+                        <a:t>1.56×</a:t>
+                      </a:r>
+                    </a:p>
+                  </a:txBody>
+                  <a:tcPr marL="64008" marR="64008" marT="18288" marB="18288">
+                    <a:solidFill>
+                      <a:srgbClr val="FAF9F5"/>
+                    </a:solidFill>
+                  </a:tcPr>
+                </a:tc>
+                <a:tc>
+                  <a:txBody>
+                    <a:bodyPr/>
+                    <a:lstStyle/>
+                    <a:p>
+                      <a:pPr algn="r"/>
+                      <a:r>
+                        <a:rPr sz="1300" b="0">
+                          <a:solidFill>
+                            <a:srgbClr val="2C5F2D"/>
+                          </a:solidFill>
+                          <a:latin typeface="Arial"/>
+                        </a:rPr>
+                        <a:t>1.01×</a:t>
+                      </a:r>
+                    </a:p>
+                  </a:txBody>
+                  <a:tcPr marL="64008" marR="64008" marT="18288" marB="18288">
+                    <a:solidFill>
+                      <a:srgbClr val="FAF9F5"/>
+                    </a:solidFill>
+                  </a:tcPr>
+                </a:tc>
+              </a:tr>
+              <a:tr h="292608">
+                <a:tc>
+                  <a:txBody>
+                    <a:bodyPr/>
+                    <a:lstStyle/>
+                    <a:p>
+                      <a:pPr algn="l"/>
+                      <a:r>
+                        <a:rPr sz="1300" b="0">
+                          <a:solidFill>
+                            <a:srgbClr val="2B2B2B"/>
+                          </a:solidFill>
+                          <a:latin typeface="Arial"/>
+                        </a:rPr>
+                        <a:t>xlsx-fin-font-clean — dollars</a:t>
+                      </a:r>
+                    </a:p>
+                  </a:txBody>
+                  <a:tcPr marL="64008" marR="64008" marT="18288" marB="18288">
+                    <a:solidFill>
+                      <a:srgbClr val="FFFFFF"/>
+                    </a:solidFill>
+                  </a:tcPr>
+                </a:tc>
+                <a:tc>
+                  <a:txBody>
+                    <a:bodyPr/>
+                    <a:lstStyle/>
+                    <a:p>
+                      <a:pPr algn="r"/>
+                      <a:r>
+                        <a:rPr sz="1300" b="0">
+                          <a:solidFill>
+                            <a:srgbClr val="B85042"/>
+                          </a:solidFill>
+                          <a:latin typeface="Arial"/>
+                        </a:rPr>
+                        <a:t>2.24×</a:t>
+                      </a:r>
+                    </a:p>
+                  </a:txBody>
+                  <a:tcPr marL="64008" marR="64008" marT="18288" marB="18288">
+                    <a:solidFill>
+                      <a:srgbClr val="FFFFFF"/>
+                    </a:solidFill>
+                  </a:tcPr>
+                </a:tc>
+                <a:tc>
+                  <a:txBody>
+                    <a:bodyPr/>
+                    <a:lstStyle/>
+                    <a:p>
+                      <a:pPr algn="r"/>
+                      <a:r>
+                        <a:rPr sz="1300" b="0">
+                          <a:solidFill>
+                            <a:srgbClr val="2B2B2B"/>
+                          </a:solidFill>
+                          <a:latin typeface="Arial"/>
+                        </a:rPr>
+                        <a:t>1.71×</a:t>
+                      </a:r>
+                    </a:p>
+                  </a:txBody>
+                  <a:tcPr marL="64008" marR="64008" marT="18288" marB="18288">
+                    <a:solidFill>
+                      <a:srgbClr val="FFFFFF"/>
+                    </a:solidFill>
+                  </a:tcPr>
+                </a:tc>
+                <a:tc>
+                  <a:txBody>
+                    <a:bodyPr/>
+                    <a:lstStyle/>
+                    <a:p>
+                      <a:pPr algn="r"/>
+                      <a:r>
+                        <a:rPr sz="1300" b="0">
+                          <a:solidFill>
+                            <a:srgbClr val="2B2B2B"/>
+                          </a:solidFill>
+                          <a:latin typeface="Arial"/>
+                        </a:rPr>
+                        <a:t>1.41×</a:t>
+                      </a:r>
+                    </a:p>
+                  </a:txBody>
+                  <a:tcPr marL="64008" marR="64008" marT="18288" marB="18288">
+                    <a:solidFill>
+                      <a:srgbClr val="FFFFFF"/>
+                    </a:solidFill>
+                  </a:tcPr>
+                </a:tc>
+                <a:tc>
+                  <a:txBody>
+                    <a:bodyPr/>
+                    <a:lstStyle/>
+                    <a:p>
+                      <a:pPr algn="r"/>
+                      <a:r>
+                        <a:rPr sz="1300" b="0">
+                          <a:solidFill>
+                            <a:srgbClr val="2C5F2D"/>
+                          </a:solidFill>
+                          <a:latin typeface="Arial"/>
+                        </a:rPr>
+                        <a:t>1.08×</a:t>
+                      </a:r>
+                    </a:p>
+                  </a:txBody>
+                  <a:tcPr marL="64008" marR="64008" marT="18288" marB="18288">
+                    <a:solidFill>
+                      <a:srgbClr val="FFFFFF"/>
+                    </a:solidFill>
+                  </a:tcPr>
+                </a:tc>
+              </a:tr>
+            </a:tbl>
+          </a:graphicData>
+        </a:graphic>
+      </p:graphicFrame>
+      <p:sp>
+        <p:nvSpPr>
+          <p:cNvPr id="7" name="TextBox 6"/>
+          <p:cNvSpPr txBox="1"/>
+          <p:nvPr/>
+        </p:nvSpPr>
+        <p:spPr>
+          <a:xfrm>
+            <a:off x="640080" y="4023360"/>
+            <a:ext cx="10881360" cy="320040"/>
+          </a:xfrm>
+          <a:prstGeom prst="rect">
+            <a:avLst/>
+          </a:prstGeom>
+          <a:noFill/>
+        </p:spPr>
+        <p:txBody>
+          <a:bodyPr wrap="square" anchor="t" lIns="0" rIns="0">
+            <a:spAutoFit/>
+          </a:bodyPr>
+          <a:lstStyle/>
+          <a:p>
+            <a:pPr algn="l"/>
+            <a:r>
+              <a:rPr sz="1700" b="1">
+                <a:solidFill>
+                  <a:srgbClr val="1E2761"/>
+                </a:solidFill>
+                <a:latin typeface="Arial"/>
+              </a:rPr>
+              <a:t>“What does this skill cost?” has no single answer.</a:t>
+            </a:r>
+          </a:p>
+        </p:txBody>
+      </p:sp>
+      <p:sp>
+        <p:nvSpPr>
+          <p:cNvPr id="8" name="TextBox 7"/>
+          <p:cNvSpPr txBox="1"/>
+          <p:nvPr/>
+        </p:nvSpPr>
+        <p:spPr>
+          <a:xfrm>
+            <a:off x="640080" y="4434840"/>
+            <a:ext cx="10881360" cy="1645920"/>
+          </a:xfrm>
+          <a:prstGeom prst="rect">
+            <a:avLst/>
+          </a:prstGeom>
+          <a:noFill/>
+        </p:spPr>
+        <p:txBody>
+          <a:bodyPr wrap="square" anchor="t" lIns="0" rIns="0">
+            <a:spAutoFit/>
+          </a:bodyPr>
+          <a:lstStyle/>
+          <a:p>
+            <a:pPr algn="l">
+              <a:spcAft>
+                <a:spcPts val="300"/>
+              </a:spcAft>
+            </a:pPr>
+            <a:r>
+              <a:rPr sz="1300" b="0">
+                <a:solidFill>
+                  <a:srgbClr val="2B2B2B"/>
+                </a:solidFill>
+                <a:latin typeface="Arial"/>
+              </a:rPr>
+              <a:t>On opus-5 the skill adds only 6–8% in dollars; on haiku it roughly doubles the bill. Opus-5 barely notices it</a:t>
+            </a:r>
+          </a:p>
+          <a:p>
+            <a:pPr algn="l">
+              <a:spcAft>
+                <a:spcPts val="300"/>
+              </a:spcAft>
+            </a:pPr>
+            <a:r>
+              <a:rPr sz="1300" b="0">
+                <a:solidFill>
+                  <a:srgbClr val="2B2B2B"/>
+                </a:solidFill>
+                <a:latin typeface="Arial"/>
+              </a:rPr>
+              <a:t>because it already works ~2× the calls WITHOUT the skill (10 vs 8 on colors), so the guidance replaces</a:t>
+            </a:r>
+          </a:p>
+          <a:p>
+            <a:pPr algn="l">
+              <a:spcAft>
+                <a:spcPts val="300"/>
+              </a:spcAft>
+            </a:pPr>
+            <a:r>
+              <a:rPr sz="1300" b="0">
+                <a:solidFill>
+                  <a:srgbClr val="2B2B2B"/>
+                </a:solidFill>
+                <a:latin typeface="Arial"/>
+              </a:rPr>
+              <a:t>exploration rather than adding to it. That is why its token ratio can dip below 1.0.</a:t>
+            </a:r>
+          </a:p>
+          <a:p>
+            <a:pPr algn="l">
+              <a:spcAft>
+                <a:spcPts val="300"/>
+              </a:spcAft>
+            </a:pPr>
+            <a:r>
+              <a:rPr sz="1300" b="0">
+                <a:solidFill>
+                  <a:srgbClr val="2B2B2B"/>
+                </a:solidFill>
+                <a:latin typeface="Arial"/>
+              </a:rPr>
+              <a:t/>
+            </a:r>
+          </a:p>
+          <a:p>
+            <a:pPr algn="l">
+              <a:spcAft>
+                <a:spcPts val="300"/>
+              </a:spcAft>
+            </a:pPr>
+            <a:r>
+              <a:rPr sz="1300" b="0">
+                <a:solidFill>
+                  <a:srgbClr val="2B2B2B"/>
+                </a:solidFill>
+                <a:latin typeface="Arial"/>
+              </a:rPr>
+              <a:t>Caveat: this rests on ONE skill. Whether the effect belongs to opus-5 or to xlsx is currently</a:t>
+            </a:r>
+          </a:p>
+          <a:p>
+            <a:pPr algn="l">
+              <a:spcAft>
+                <a:spcPts val="300"/>
+              </a:spcAft>
+            </a:pPr>
+            <a:r>
+              <a:rPr sz="1300" b="0">
+                <a:solidFill>
+                  <a:srgbClr val="2B2B2B"/>
+                </a:solidFill>
+                <a:latin typeface="Arial"/>
+              </a:rPr>
+              <a:t>indistinguishable — three more tasks on docx / pptx / pdf would separate them.</a:t>
+            </a:r>
+          </a:p>
+        </p:txBody>
+      </p:sp>
+      <p:sp>
+        <p:nvSpPr>
+          <p:cNvPr id="9" name="TextBox 8"/>
+          <p:cNvSpPr txBox="1"/>
+          <p:nvPr/>
+        </p:nvSpPr>
+        <p:spPr>
+          <a:xfrm>
+            <a:off x="11064240" y="6355080"/>
+            <a:ext cx="457200" cy="274320"/>
+          </a:xfrm>
+          <a:prstGeom prst="rect">
+            <a:avLst/>
+          </a:prstGeom>
+          <a:noFill/>
+        </p:spPr>
+        <p:txBody>
+          <a:bodyPr wrap="square" anchor="t" lIns="0" rIns="0">
+            <a:spAutoFit/>
+          </a:bodyPr>
+          <a:lstStyle/>
+          <a:p>
+            <a:pPr algn="r"/>
+            <a:r>
+              <a:rPr sz="1100" b="0">
+                <a:solidFill>
+                  <a:srgbClr val="6B6B6B"/>
+                </a:solidFill>
+                <a:latin typeface="Arial"/>
+              </a:rPr>
+              <a:t>14</a:t>
+            </a:r>
+          </a:p>
+        </p:txBody>
+      </p:sp>
+    </p:spTree>
+  </p:cSld>
+  <p:clrMapOvr>
+    <a:masterClrMapping/>
+  </p:clrMapOvr>
+</p:sld>
+</file>
+
+<file path=ppt/slides/slide15.xml><?xml version="1.0" encoding="utf-8"?>
+<p:sld xmlns:a="http://schemas.openxmlformats.org/drawingml/2006/main" xmlns:p="http://schemas.openxmlformats.org/presentationml/2006/main" xmlns:r="http://schemas.openxmlformats.org/officeDocument/2006/relationships">
+  <p:cSld>
+    <p:bg>
+      <p:bgPr>
+        <a:solidFill>
+          <a:srgbClr val="FAF9F5"/>
+        </a:solidFill>
+        <a:effectLst/>
+      </p:bgPr>
+    </p:bg>
+    <p:spTree>
+      <p:nvGrpSpPr>
+        <p:cNvPr id="1" name=""/>
+        <p:cNvGrpSpPr/>
+        <p:nvPr/>
+      </p:nvGrpSpPr>
+      <p:grpSpPr/>
+      <p:sp>
+        <p:nvSpPr>
+          <p:cNvPr id="2" name="TextBox 1"/>
+          <p:cNvSpPr txBox="1"/>
+          <p:nvPr/>
+        </p:nvSpPr>
+        <p:spPr>
+          <a:xfrm>
+            <a:off x="640080" y="411480"/>
+            <a:ext cx="10881360" cy="274320"/>
+          </a:xfrm>
+          <a:prstGeom prst="rect">
+            <a:avLst/>
+          </a:prstGeom>
+          <a:noFill/>
+        </p:spPr>
+        <p:txBody>
+          <a:bodyPr wrap="square" anchor="t" lIns="0" rIns="0">
+            <a:spAutoFit/>
+          </a:bodyPr>
+          <a:lstStyle/>
+          <a:p>
+            <a:pPr algn="l"/>
+            <a:r>
+              <a:rPr sz="1100" b="1">
+                <a:solidFill>
+                  <a:srgbClr val="6B6B6B"/>
+                </a:solidFill>
+                <a:latin typeface="Arial"/>
+              </a:rPr>
+              <a:t>3 · FINDINGS  ·  FINDING 6 · SELECTION</a:t>
             </a:r>
           </a:p>
         </p:txBody>
@@ -7776,7 +9244,7 @@
                 </a:solidFill>
                 <a:latin typeface="Arial"/>
               </a:rPr>
-              <a:t>14</a:t>
+              <a:t>15</a:t>
             </a:r>
           </a:p>
         </p:txBody>
@@ -7789,7 +9257,7 @@
 </p:sld>
 </file>
 
-<file path=ppt/slides/slide15.xml><?xml version="1.0" encoding="utf-8"?>
+<file path=ppt/slides/slide16.xml><?xml version="1.0" encoding="utf-8"?>
 <p:sld xmlns:a="http://schemas.openxmlformats.org/drawingml/2006/main" xmlns:p="http://schemas.openxmlformats.org/presentationml/2006/main" xmlns:r="http://schemas.openxmlformats.org/officeDocument/2006/relationships">
   <p:cSld>
     <p:bg>
@@ -8454,7 +9922,7 @@
                 </a:solidFill>
                 <a:latin typeface="Arial"/>
               </a:rPr>
-              <a:t>15</a:t>
+              <a:t>16</a:t>
             </a:r>
           </a:p>
         </p:txBody>
@@ -8467,7 +9935,7 @@
 </p:sld>
 </file>
 
-<file path=ppt/slides/slide16.xml><?xml version="1.0" encoding="utf-8"?>
+<file path=ppt/slides/slide17.xml><?xml version="1.0" encoding="utf-8"?>
 <p:sld xmlns:a="http://schemas.openxmlformats.org/drawingml/2006/main" xmlns:p="http://schemas.openxmlformats.org/presentationml/2006/main" xmlns:r="http://schemas.openxmlformats.org/officeDocument/2006/relationships">
   <p:cSld>
     <p:bg>
@@ -9085,7 +10553,7 @@
                 </a:solidFill>
                 <a:latin typeface="Arial"/>
               </a:rPr>
-              <a:t>16</a:t>
+              <a:t>17</a:t>
             </a:r>
           </a:p>
         </p:txBody>
@@ -10100,7 +11568,7 @@
                 </a:solidFill>
                 <a:latin typeface="Arial"/>
               </a:rPr>
-              <a:t>Skill cost is a property of skill × model</a:t>
+              <a:t>Token-efficiency is not cost-efficiency</a:t>
             </a:r>
           </a:p>
         </p:txBody>
@@ -10170,7 +11638,7 @@
                 </a:solidFill>
                 <a:latin typeface="Arial"/>
               </a:rPr>
-              <a:t>Skill selection is reliable</a:t>
+              <a:t>Skill cost is a property of skill × model</a:t>
             </a:r>
           </a:p>
         </p:txBody>
@@ -10183,8 +11651,8 @@
         </p:nvSpPr>
         <p:spPr>
           <a:xfrm>
-            <a:off x="6309360" y="4251959"/>
-            <a:ext cx="4937760" cy="274320"/>
+            <a:off x="6309360" y="3977639"/>
+            <a:ext cx="457200" cy="274320"/>
           </a:xfrm>
           <a:prstGeom prst="rect">
             <a:avLst/>
@@ -10197,15 +11665,15 @@
           </a:bodyPr>
           <a:lstStyle/>
           <a:p>
-            <a:pPr algn="l"/>
-            <a:r>
-              <a:rPr sz="1200" b="1">
-                <a:solidFill>
-                  <a:srgbClr val="1E2761"/>
-                </a:solidFill>
-                <a:latin typeface="Arial"/>
-              </a:rPr>
-              <a:t>4 · CONCLUSION</a:t>
+            <a:pPr algn="r"/>
+            <a:r>
+              <a:rPr sz="1400" b="1">
+                <a:solidFill>
+                  <a:srgbClr val="CADCFC"/>
+                </a:solidFill>
+                <a:latin typeface="Arial"/>
+              </a:rPr>
+              <a:t>15</a:t>
             </a:r>
           </a:p>
         </p:txBody>
@@ -10218,8 +11686,8 @@
         </p:nvSpPr>
         <p:spPr>
           <a:xfrm>
-            <a:off x="6309360" y="4617720"/>
-            <a:ext cx="457200" cy="274320"/>
+            <a:off x="6949440" y="3977639"/>
+            <a:ext cx="4480560" cy="274320"/>
           </a:xfrm>
           <a:prstGeom prst="rect">
             <a:avLst/>
@@ -10232,15 +11700,15 @@
           </a:bodyPr>
           <a:lstStyle/>
           <a:p>
-            <a:pPr algn="r"/>
-            <a:r>
-              <a:rPr sz="1400" b="1">
-                <a:solidFill>
-                  <a:srgbClr val="CADCFC"/>
-                </a:solidFill>
-                <a:latin typeface="Arial"/>
-              </a:rPr>
-              <a:t>15</a:t>
+            <a:pPr algn="l"/>
+            <a:r>
+              <a:rPr sz="1400" b="0">
+                <a:solidFill>
+                  <a:srgbClr val="2B2B2B"/>
+                </a:solidFill>
+                <a:latin typeface="Arial"/>
+              </a:rPr>
+              <a:t>Skill selection is reliable</a:t>
             </a:r>
           </a:p>
         </p:txBody>
@@ -10253,8 +11721,8 @@
         </p:nvSpPr>
         <p:spPr>
           <a:xfrm>
-            <a:off x="6949440" y="4617720"/>
-            <a:ext cx="4480560" cy="274320"/>
+            <a:off x="6309360" y="4599431"/>
+            <a:ext cx="4937760" cy="274320"/>
           </a:xfrm>
           <a:prstGeom prst="rect">
             <a:avLst/>
@@ -10269,13 +11737,13 @@
           <a:p>
             <a:pPr algn="l"/>
             <a:r>
-              <a:rPr sz="1400" b="0">
-                <a:solidFill>
-                  <a:srgbClr val="2B2B2B"/>
-                </a:solidFill>
-                <a:latin typeface="Arial"/>
-              </a:rPr>
-              <a:t>Model selection recommendation</a:t>
+              <a:rPr sz="1200" b="1">
+                <a:solidFill>
+                  <a:srgbClr val="1E2761"/>
+                </a:solidFill>
+                <a:latin typeface="Arial"/>
+              </a:rPr>
+              <a:t>4 · CONCLUSION</a:t>
             </a:r>
           </a:p>
         </p:txBody>
@@ -10345,7 +11813,7 @@
                 </a:solidFill>
                 <a:latin typeface="Arial"/>
               </a:rPr>
-              <a:t>Limitations, stated plainly</a:t>
+              <a:t>Model selection recommendation</a:t>
             </a:r>
           </a:p>
         </p:txBody>
@@ -10358,8 +11826,8 @@
         </p:nvSpPr>
         <p:spPr>
           <a:xfrm>
-            <a:off x="640080" y="5852160"/>
-            <a:ext cx="10881360" cy="548640"/>
+            <a:off x="6309360" y="5312664"/>
+            <a:ext cx="457200" cy="274320"/>
           </a:xfrm>
           <a:prstGeom prst="rect">
             <a:avLst/>
@@ -10372,8 +11840,78 @@
           </a:bodyPr>
           <a:lstStyle/>
           <a:p>
+            <a:pPr algn="r"/>
+            <a:r>
+              <a:rPr sz="1400" b="1">
+                <a:solidFill>
+                  <a:srgbClr val="CADCFC"/>
+                </a:solidFill>
+                <a:latin typeface="Arial"/>
+              </a:rPr>
+              <a:t>17</a:t>
+            </a:r>
+          </a:p>
+        </p:txBody>
+      </p:sp>
+      <p:sp>
+        <p:nvSpPr>
+          <p:cNvPr id="38" name="TextBox 37"/>
+          <p:cNvSpPr txBox="1"/>
+          <p:nvPr/>
+        </p:nvSpPr>
+        <p:spPr>
+          <a:xfrm>
+            <a:off x="6949440" y="5312664"/>
+            <a:ext cx="4480560" cy="274320"/>
+          </a:xfrm>
+          <a:prstGeom prst="rect">
+            <a:avLst/>
+          </a:prstGeom>
+          <a:noFill/>
+        </p:spPr>
+        <p:txBody>
+          <a:bodyPr wrap="square" anchor="t" lIns="0" rIns="0">
+            <a:spAutoFit/>
+          </a:bodyPr>
+          <a:lstStyle/>
+          <a:p>
             <a:pPr algn="l"/>
             <a:r>
+              <a:rPr sz="1400" b="0">
+                <a:solidFill>
+                  <a:srgbClr val="2B2B2B"/>
+                </a:solidFill>
+                <a:latin typeface="Arial"/>
+              </a:rPr>
+              <a:t>Limitations, stated plainly</a:t>
+            </a:r>
+          </a:p>
+        </p:txBody>
+      </p:sp>
+      <p:sp>
+        <p:nvSpPr>
+          <p:cNvPr id="39" name="TextBox 38"/>
+          <p:cNvSpPr txBox="1"/>
+          <p:nvPr/>
+        </p:nvSpPr>
+        <p:spPr>
+          <a:xfrm>
+            <a:off x="640080" y="5852160"/>
+            <a:ext cx="10881360" cy="548640"/>
+          </a:xfrm>
+          <a:prstGeom prst="rect">
+            <a:avLst/>
+          </a:prstGeom>
+          <a:noFill/>
+        </p:spPr>
+        <p:txBody>
+          <a:bodyPr wrap="square" anchor="t" lIns="0" rIns="0">
+            <a:spAutoFit/>
+          </a:bodyPr>
+          <a:lstStyle/>
+          <a:p>
+            <a:pPr algn="l"/>
+            <a:r>
               <a:rPr sz="1200" b="0">
                 <a:solidFill>
                   <a:srgbClr val="6B6B6B"/>
@@ -10399,7 +11937,7 @@
       </p:sp>
       <p:sp>
         <p:nvSpPr>
-          <p:cNvPr id="38" name="TextBox 37"/>
+          <p:cNvPr id="40" name="TextBox 39"/>
           <p:cNvSpPr txBox="1"/>
           <p:nvPr/>
         </p:nvSpPr>
@@ -12545,7 +14083,7 @@
         </p:nvGraphicFramePr>
         <p:xfrm>
           <a:off x="640080" y="2240280"/>
-          <a:ext cx="10881360" cy="2340864"/>
+          <a:ext cx="10881360" cy="2926080"/>
         </p:xfrm>
         <a:graphic>
           <a:graphicData uri="http://schemas.openxmlformats.org/drawingml/2006/table">
@@ -12565,7 +14103,7 @@
                     <a:p>
                       <a:pPr algn="l"/>
                       <a:r>
-                        <a:rPr sz="1300" b="1">
+                        <a:rPr sz="1200" b="1">
                           <a:solidFill>
                             <a:srgbClr val="FFFFFF"/>
                           </a:solidFill>
@@ -12588,7 +14126,7 @@
                     <a:p>
                       <a:pPr algn="r"/>
                       <a:r>
-                        <a:rPr sz="1300" b="1">
+                        <a:rPr sz="1200" b="1">
                           <a:solidFill>
                             <a:srgbClr val="FFFFFF"/>
                           </a:solidFill>
@@ -12613,7 +14151,7 @@
                     <a:p>
                       <a:pPr algn="l"/>
                       <a:r>
-                        <a:rPr sz="1300" b="0">
+                        <a:rPr sz="1200" b="0">
                           <a:solidFill>
                             <a:srgbClr val="2B2B2B"/>
                           </a:solidFill>
@@ -12636,7 +14174,7 @@
                     <a:p>
                       <a:pPr algn="r"/>
                       <a:r>
-                        <a:rPr sz="1300" b="0">
+                        <a:rPr sz="1200" b="0">
                           <a:solidFill>
                             <a:srgbClr val="2B2B2B"/>
                           </a:solidFill>
@@ -12661,7 +14199,7 @@
                     <a:p>
                       <a:pPr algn="l"/>
                       <a:r>
-                        <a:rPr sz="1300" b="0">
+                        <a:rPr sz="1200" b="0">
                           <a:solidFill>
                             <a:srgbClr val="2B2B2B"/>
                           </a:solidFill>
@@ -12684,7 +14222,7 @@
                     <a:p>
                       <a:pPr algn="r"/>
                       <a:r>
-                        <a:rPr sz="1300" b="0">
+                        <a:rPr sz="1200" b="0">
                           <a:solidFill>
                             <a:srgbClr val="2B2B2B"/>
                           </a:solidFill>
@@ -12709,7 +14247,7 @@
                     <a:p>
                       <a:pPr algn="l"/>
                       <a:r>
-                        <a:rPr sz="1300" b="0">
+                        <a:rPr sz="1200" b="0">
                           <a:solidFill>
                             <a:srgbClr val="2B2B2B"/>
                           </a:solidFill>
@@ -12732,13 +14270,13 @@
                     <a:p>
                       <a:pPr algn="r"/>
                       <a:r>
-                        <a:rPr sz="1300" b="0">
+                        <a:rPr sz="1200" b="0">
                           <a:solidFill>
                             <a:srgbClr val="2B2B2B"/>
                           </a:solidFill>
                           <a:latin typeface="Arial"/>
                         </a:rPr>
-                        <a:t>one (task × arm × model), measured over n repetitions</a:t>
+                        <a:t>one (task × arm × model), measured over n repetitions — e.g. xlsx-fin-colors / ON / sonnet-5, n=5</a:t>
                       </a:r>
                     </a:p>
                   </a:txBody>
@@ -12757,7 +14295,7 @@
                     <a:p>
                       <a:pPr algn="l"/>
                       <a:r>
-                        <a:rPr sz="1300" b="0">
+                        <a:rPr sz="1200" b="0">
                           <a:solidFill>
                             <a:srgbClr val="2B2B2B"/>
                           </a:solidFill>
@@ -12780,7 +14318,7 @@
                     <a:p>
                       <a:pPr algn="r"/>
                       <a:r>
-                        <a:rPr sz="1300" b="0">
+                        <a:rPr sz="1200" b="0">
                           <a:solidFill>
                             <a:srgbClr val="2B2B2B"/>
                           </a:solidFill>
@@ -12805,7 +14343,7 @@
                     <a:p>
                       <a:pPr algn="l"/>
                       <a:r>
-                        <a:rPr sz="1300" b="0">
+                        <a:rPr sz="1200" b="0">
                           <a:solidFill>
                             <a:srgbClr val="2B2B2B"/>
                           </a:solidFill>
@@ -12828,7 +14366,7 @@
                     <a:p>
                       <a:pPr algn="r"/>
                       <a:r>
-                        <a:rPr sz="1300" b="0">
+                        <a:rPr sz="1200" b="0">
                           <a:solidFill>
                             <a:srgbClr val="2B2B2B"/>
                           </a:solidFill>
@@ -12853,7 +14391,7 @@
                     <a:p>
                       <a:pPr algn="l"/>
                       <a:r>
-                        <a:rPr sz="1300" b="0">
+                        <a:rPr sz="1200" b="0">
                           <a:solidFill>
                             <a:srgbClr val="2B2B2B"/>
                           </a:solidFill>
@@ -12876,7 +14414,7 @@
                     <a:p>
                       <a:pPr algn="r"/>
                       <a:r>
-                        <a:rPr sz="1300" b="0">
+                        <a:rPr sz="1200" b="0">
                           <a:solidFill>
                             <a:srgbClr val="2B2B2B"/>
                           </a:solidFill>
@@ -12901,12 +14439,108 @@
                     <a:p>
                       <a:pPr algn="l"/>
                       <a:r>
-                        <a:rPr sz="1300" b="0">
+                        <a:rPr sz="1200" b="0">
                           <a:solidFill>
                             <a:srgbClr val="2B2B2B"/>
                           </a:solidFill>
                           <a:latin typeface="Arial"/>
                         </a:rPr>
+                        <a:t>Token-efficiency</a:t>
+                      </a:r>
+                    </a:p>
+                  </a:txBody>
+                  <a:tcPr marL="64008" marR="64008" marT="18288" marB="18288">
+                    <a:solidFill>
+                      <a:srgbClr val="FAF9F5"/>
+                    </a:solidFill>
+                  </a:tcPr>
+                </a:tc>
+                <a:tc>
+                  <a:txBody>
+                    <a:bodyPr/>
+                    <a:lstStyle/>
+                    <a:p>
+                      <a:pPr algn="r"/>
+                      <a:r>
+                        <a:rPr sz="1200" b="0">
+                          <a:solidFill>
+                            <a:srgbClr val="2B2B2B"/>
+                          </a:solidFill>
+                          <a:latin typeface="Arial"/>
+                        </a:rPr>
+                        <a:t>tokens consumed per SOLVED task — what the context window and rate limits see</a:t>
+                      </a:r>
+                    </a:p>
+                  </a:txBody>
+                  <a:tcPr marL="64008" marR="64008" marT="18288" marB="18288">
+                    <a:solidFill>
+                      <a:srgbClr val="FAF9F5"/>
+                    </a:solidFill>
+                  </a:tcPr>
+                </a:tc>
+              </a:tr>
+              <a:tr h="292608">
+                <a:tc>
+                  <a:txBody>
+                    <a:bodyPr/>
+                    <a:lstStyle/>
+                    <a:p>
+                      <a:pPr algn="l"/>
+                      <a:r>
+                        <a:rPr sz="1200" b="0">
+                          <a:solidFill>
+                            <a:srgbClr val="2B2B2B"/>
+                          </a:solidFill>
+                          <a:latin typeface="Arial"/>
+                        </a:rPr>
+                        <a:t>Cost-efficiency</a:t>
+                      </a:r>
+                    </a:p>
+                  </a:txBody>
+                  <a:tcPr marL="64008" marR="64008" marT="18288" marB="18288">
+                    <a:solidFill>
+                      <a:srgbClr val="FFFFFF"/>
+                    </a:solidFill>
+                  </a:tcPr>
+                </a:tc>
+                <a:tc>
+                  <a:txBody>
+                    <a:bodyPr/>
+                    <a:lstStyle/>
+                    <a:p>
+                      <a:pPr algn="r"/>
+                      <a:r>
+                        <a:rPr sz="1200" b="0">
+                          <a:solidFill>
+                            <a:srgbClr val="2B2B2B"/>
+                          </a:solidFill>
+                          <a:latin typeface="Arial"/>
+                        </a:rPr>
+                        <a:t>dollars per SOLVED task — token-efficiency weighted by that model's unit price</a:t>
+                      </a:r>
+                    </a:p>
+                  </a:txBody>
+                  <a:tcPr marL="64008" marR="64008" marT="18288" marB="18288">
+                    <a:solidFill>
+                      <a:srgbClr val="FFFFFF"/>
+                    </a:solidFill>
+                  </a:tcPr>
+                </a:tc>
+              </a:tr>
+              <a:tr h="292608">
+                <a:tc>
+                  <a:txBody>
+                    <a:bodyPr/>
+                    <a:lstStyle/>
+                    <a:p>
+                      <a:pPr algn="l"/>
+                      <a:r>
+                        <a:rPr sz="1200" b="0">
+                          <a:solidFill>
+                            <a:srgbClr val="2B2B2B"/>
+                          </a:solidFill>
+                          <a:latin typeface="Arial"/>
+                        </a:rPr>
                         <a:t>Cost per solved task</a:t>
                       </a:r>
                     </a:p>
@@ -12924,13 +14558,13 @@
                     <a:p>
                       <a:pPr algn="r"/>
                       <a:r>
-                        <a:rPr sz="1300" b="0">
+                        <a:rPr sz="1200" b="0">
                           <a:solidFill>
                             <a:srgbClr val="2B2B2B"/>
                           </a:solidFill>
                           <a:latin typeface="Arial"/>
                         </a:rPr>
-                        <a:t>median tokens ÷ pass rate — charges a model for its failures</a:t>
+                        <a:t>median ÷ pass rate, so a model is charged for its failures</a:t>
                       </a:r>
                     </a:p>
                   </a:txBody>

--- a/results/autobench-claudecode-summary.pptx
+++ b/results/autobench-claudecode-summary.pptx
@@ -3259,7 +3259,7 @@
                 </a:solidFill>
                 <a:latin typeface="Arial"/>
               </a:rPr>
-              <a:t>Last modified 2026-09-09 11:14 EDT</a:t>
+              <a:t>Last modified 2026-09-09 11:33 EDT</a:t>
             </a:r>
           </a:p>
         </p:txBody>
@@ -4118,8 +4118,8 @@
         </p:nvSpPr>
         <p:spPr>
           <a:xfrm>
-            <a:off x="640080" y="1737360"/>
-            <a:ext cx="10698480" cy="685800"/>
+            <a:off x="640080" y="1719072"/>
+            <a:ext cx="10698480" cy="713232"/>
           </a:xfrm>
           <a:prstGeom prst="roundRect">
             <a:avLst/>
@@ -4160,7 +4160,7 @@
                 </a:solidFill>
                 <a:latin typeface="Arial"/>
               </a:rPr>
-              <a:t>total tokens   =   tokens per call   ×   number of calls</a:t>
+              <a:t>tokens per task   =   tokens per LLM CALL   ×   LLM calls per task</a:t>
             </a:r>
           </a:p>
           <a:p>
@@ -4172,7 +4172,7 @@
                 </a:solidFill>
                 <a:latin typeface="Arial"/>
               </a:rPr>
-              <a:t>                       (a MODEL property)        (a TASK property)</a:t>
+              <a:t>                              (a MODEL property)              (a TASK property)</a:t>
             </a:r>
           </a:p>
         </p:txBody>
@@ -4207,7 +4207,7 @@
                 </a:solidFill>
                 <a:latin typeface="Arial"/>
               </a:rPr>
-              <a:t>Factor 1 — tokens per call: ratio vs sonnet-4-6, across five structurally different cells</a:t>
+              <a:t>Factor 1 — tokens per LLM call: ratio vs sonnet-4-6, across five structurally different cells</a:t>
             </a:r>
           </a:p>
         </p:txBody>
@@ -4413,7 +4413,7 @@
                           </a:solidFill>
                           <a:latin typeface="Arial"/>
                         </a:rPr>
-                        <a:t>≈ same per-call context</a:t>
+                        <a:t>≈ same context per LLM call</a:t>
                       </a:r>
                     </a:p>
                   </a:txBody>
@@ -4507,7 +4507,7 @@
                           </a:solidFill>
                           <a:latin typeface="Arial"/>
                         </a:rPr>
-                        <a:t>≈1.23× more per call</a:t>
+                        <a:t>≈1.23× more per LLM call</a:t>
                       </a:r>
                     </a:p>
                   </a:txBody>
@@ -4601,7 +4601,7 @@
                           </a:solidFill>
                           <a:latin typeface="Arial"/>
                         </a:rPr>
-                        <a:t>≈0.90× — leaner per call</a:t>
+                        <a:t>≈0.90× — leaner per LLM call</a:t>
                       </a:r>
                     </a:p>
                   </a:txBody>
@@ -4646,7 +4646,7 @@
                 </a:solidFill>
                 <a:latin typeface="Arial"/>
               </a:rPr>
-              <a:t>Factor 2 — number of calls: NOT constant. 0.40–1.00× for haiku, 0.83–2.00× for opus-5, by task.</a:t>
+              <a:t>Factor 2 — LLM calls per task: NOT constant. 0.40–1.00× for haiku, 0.83–2.00× for opus-5, by task.</a:t>
             </a:r>
           </a:p>
         </p:txBody>
@@ -4659,8 +4659,8 @@
         </p:nvSpPr>
         <p:spPr>
           <a:xfrm>
-            <a:off x="640080" y="4709160"/>
-            <a:ext cx="10698480" cy="777240"/>
+            <a:off x="640080" y="4681728"/>
+            <a:ext cx="10698480" cy="868680"/>
           </a:xfrm>
           <a:prstGeom prst="roundRect">
             <a:avLst/>
@@ -4695,25 +4695,37 @@
           <a:p>
             <a:pPr algn="ctr"/>
             <a:r>
-              <a:rPr sz="1400" b="1">
+              <a:rPr sz="1300" b="1">
                 <a:solidFill>
                   <a:srgbClr val="1E2761"/>
                 </a:solidFill>
                 <a:latin typeface="Arial"/>
               </a:rPr>
-              <a:t>So a model has a stable per-call appetite you can budget with — but how many calls it</a:t>
+              <a:t>One TASK is one `claude -p` run and makes SEVERAL LLM calls (5–24 observed), each re-sending the</a:t>
             </a:r>
           </a:p>
           <a:p>
             <a:pPr algn="ctr"/>
             <a:r>
-              <a:rPr sz="1400" b="1">
+              <a:rPr sz="1300" b="1">
                 <a:solidFill>
                   <a:srgbClr val="1E2761"/>
                 </a:solidFill>
                 <a:latin typeface="Arial"/>
               </a:rPr>
-              <a:t>takes depends on the job. A raw token total multiplies the two and hides both.</a:t>
+              <a:t>growing conversation. A model has a stable appetite per LLM call — how many calls the job needs is a</a:t>
+            </a:r>
+          </a:p>
+          <a:p>
+            <a:pPr algn="ctr"/>
+            <a:r>
+              <a:rPr sz="1300" b="1">
+                <a:solidFill>
+                  <a:srgbClr val="1E2761"/>
+                </a:solidFill>
+                <a:latin typeface="Arial"/>
+              </a:rPr>
+              <a:t>separate matter. A raw token total multiplies the two and hides both.</a:t>
             </a:r>
           </a:p>
         </p:txBody>
@@ -6771,7 +6783,7 @@
                           </a:solidFill>
                           <a:latin typeface="Arial"/>
                         </a:rPr>
-                        <a:t>tokens/solved</a:t>
+                        <a:t>tokens/solved task</a:t>
                       </a:r>
                     </a:p>
                   </a:txBody>
@@ -6817,7 +6829,7 @@
                           </a:solidFill>
                           <a:latin typeface="Arial"/>
                         </a:rPr>
-                        <a:t>$/solved</a:t>
+                        <a:t>$/solved task</a:t>
                       </a:r>
                     </a:p>
                   </a:txBody>
@@ -14082,8 +14094,8 @@
           <p:nvPr/>
         </p:nvGraphicFramePr>
         <p:xfrm>
-          <a:off x="640080" y="2240280"/>
-          <a:ext cx="10881360" cy="2926080"/>
+          <a:off x="640080" y="2194560"/>
+          <a:ext cx="10881360" cy="3511296"/>
         </p:xfrm>
         <a:graphic>
           <a:graphicData uri="http://schemas.openxmlformats.org/drawingml/2006/table">
@@ -14103,7 +14115,7 @@
                     <a:p>
                       <a:pPr algn="l"/>
                       <a:r>
-                        <a:rPr sz="1200" b="1">
+                        <a:rPr sz="1150" b="1">
                           <a:solidFill>
                             <a:srgbClr val="FFFFFF"/>
                           </a:solidFill>
@@ -14126,7 +14138,7 @@
                     <a:p>
                       <a:pPr algn="r"/>
                       <a:r>
-                        <a:rPr sz="1200" b="1">
+                        <a:rPr sz="1150" b="1">
                           <a:solidFill>
                             <a:srgbClr val="FFFFFF"/>
                           </a:solidFill>
@@ -14151,7 +14163,7 @@
                     <a:p>
                       <a:pPr algn="l"/>
                       <a:r>
-                        <a:rPr sz="1200" b="0">
+                        <a:rPr sz="1150" b="0">
                           <a:solidFill>
                             <a:srgbClr val="2B2B2B"/>
                           </a:solidFill>
@@ -14174,7 +14186,7 @@
                     <a:p>
                       <a:pPr algn="r"/>
                       <a:r>
-                        <a:rPr sz="1200" b="0">
+                        <a:rPr sz="1150" b="0">
                           <a:solidFill>
                             <a:srgbClr val="2B2B2B"/>
                           </a:solidFill>
@@ -14199,7 +14211,7 @@
                     <a:p>
                       <a:pPr algn="l"/>
                       <a:r>
-                        <a:rPr sz="1200" b="0">
+                        <a:rPr sz="1150" b="0">
                           <a:solidFill>
                             <a:srgbClr val="2B2B2B"/>
                           </a:solidFill>
@@ -14222,7 +14234,7 @@
                     <a:p>
                       <a:pPr algn="r"/>
                       <a:r>
-                        <a:rPr sz="1200" b="0">
+                        <a:rPr sz="1150" b="0">
                           <a:solidFill>
                             <a:srgbClr val="2B2B2B"/>
                           </a:solidFill>
@@ -14247,7 +14259,7 @@
                     <a:p>
                       <a:pPr algn="l"/>
                       <a:r>
-                        <a:rPr sz="1200" b="0">
+                        <a:rPr sz="1150" b="0">
                           <a:solidFill>
                             <a:srgbClr val="2B2B2B"/>
                           </a:solidFill>
@@ -14270,7 +14282,7 @@
                     <a:p>
                       <a:pPr algn="r"/>
                       <a:r>
-                        <a:rPr sz="1200" b="0">
+                        <a:rPr sz="1150" b="0">
                           <a:solidFill>
                             <a:srgbClr val="2B2B2B"/>
                           </a:solidFill>
@@ -14295,13 +14307,13 @@
                     <a:p>
                       <a:pPr algn="l"/>
                       <a:r>
-                        <a:rPr sz="1200" b="0">
+                        <a:rPr sz="1150" b="0">
                           <a:solidFill>
                             <a:srgbClr val="2B2B2B"/>
                           </a:solidFill>
                           <a:latin typeface="Arial"/>
                         </a:rPr>
-                        <a:t>Compliance task</a:t>
+                        <a:t>Task / repetition</a:t>
                       </a:r>
                     </a:p>
                   </a:txBody>
@@ -14318,13 +14330,13 @@
                     <a:p>
                       <a:pPr algn="r"/>
                       <a:r>
-                        <a:rPr sz="1200" b="0">
+                        <a:rPr sz="1150" b="0">
                           <a:solidFill>
                             <a:srgbClr val="2B2B2B"/>
                           </a:solidFill>
                           <a:latin typeface="Arial"/>
                         </a:rPr>
-                        <a:t>ordinary request; hidden verdict checks a skill convention was followed</a:t>
+                        <a:t>ONE headless `claude -p` invocation in a fresh workspace</a:t>
                       </a:r>
                     </a:p>
                   </a:txBody>
@@ -14343,13 +14355,13 @@
                     <a:p>
                       <a:pPr algn="l"/>
                       <a:r>
-                        <a:rPr sz="1200" b="0">
+                        <a:rPr sz="1150" b="0">
                           <a:solidFill>
                             <a:srgbClr val="2B2B2B"/>
                           </a:solidFill>
                           <a:latin typeface="Arial"/>
                         </a:rPr>
-                        <a:t>Selection task</a:t>
+                        <a:t>LLM call</a:t>
                       </a:r>
                     </a:p>
                   </a:txBody>
@@ -14366,13 +14378,13 @@
                     <a:p>
                       <a:pPr algn="r"/>
                       <a:r>
-                        <a:rPr sz="1200" b="0">
+                        <a:rPr sz="1150" b="0">
                           <a:solidFill>
                             <a:srgbClr val="2B2B2B"/>
                           </a:solidFill>
                           <a:latin typeface="Arial"/>
                         </a:rPr>
-                        <a:t>names no skill; verdict is whether the model chose the right one</a:t>
+                        <a:t>ONE /v1/chat/completions on the wire. A task makes SEVERAL — 5 to 24 here</a:t>
                       </a:r>
                     </a:p>
                   </a:txBody>
@@ -14391,13 +14403,13 @@
                     <a:p>
                       <a:pPr algn="l"/>
                       <a:r>
-                        <a:rPr sz="1200" b="0">
+                        <a:rPr sz="1150" b="0">
                           <a:solidFill>
                             <a:srgbClr val="2B2B2B"/>
                           </a:solidFill>
                           <a:latin typeface="Arial"/>
                         </a:rPr>
-                        <a:t>Confound</a:t>
+                        <a:t>Compliance task</a:t>
                       </a:r>
                     </a:p>
                   </a:txBody>
@@ -14414,13 +14426,13 @@
                     <a:p>
                       <a:pPr algn="r"/>
                       <a:r>
-                        <a:rPr sz="1200" b="0">
+                        <a:rPr sz="1150" b="0">
                           <a:solidFill>
                             <a:srgbClr val="2B2B2B"/>
                           </a:solidFill>
                           <a:latin typeface="Arial"/>
                         </a:rPr>
-                        <a:t>a repetition whose measurement is untrustworthy — reported, never averaged</a:t>
+                        <a:t>ordinary request; hidden verdict checks a skill convention was followed</a:t>
                       </a:r>
                     </a:p>
                   </a:txBody>
@@ -14439,13 +14451,13 @@
                     <a:p>
                       <a:pPr algn="l"/>
                       <a:r>
-                        <a:rPr sz="1200" b="0">
+                        <a:rPr sz="1150" b="0">
                           <a:solidFill>
                             <a:srgbClr val="2B2B2B"/>
                           </a:solidFill>
                           <a:latin typeface="Arial"/>
                         </a:rPr>
-                        <a:t>Token-efficiency</a:t>
+                        <a:t>Selection task</a:t>
                       </a:r>
                     </a:p>
                   </a:txBody>
@@ -14462,13 +14474,13 @@
                     <a:p>
                       <a:pPr algn="r"/>
                       <a:r>
-                        <a:rPr sz="1200" b="0">
+                        <a:rPr sz="1150" b="0">
                           <a:solidFill>
                             <a:srgbClr val="2B2B2B"/>
                           </a:solidFill>
                           <a:latin typeface="Arial"/>
                         </a:rPr>
-                        <a:t>tokens consumed per SOLVED task — what the context window and rate limits see</a:t>
+                        <a:t>names no skill; verdict is whether the model chose the right one</a:t>
                       </a:r>
                     </a:p>
                   </a:txBody>
@@ -14487,13 +14499,13 @@
                     <a:p>
                       <a:pPr algn="l"/>
                       <a:r>
-                        <a:rPr sz="1200" b="0">
+                        <a:rPr sz="1150" b="0">
                           <a:solidFill>
                             <a:srgbClr val="2B2B2B"/>
                           </a:solidFill>
                           <a:latin typeface="Arial"/>
                         </a:rPr>
-                        <a:t>Cost-efficiency</a:t>
+                        <a:t>Confound</a:t>
                       </a:r>
                     </a:p>
                   </a:txBody>
@@ -14510,13 +14522,13 @@
                     <a:p>
                       <a:pPr algn="r"/>
                       <a:r>
-                        <a:rPr sz="1200" b="0">
+                        <a:rPr sz="1150" b="0">
                           <a:solidFill>
                             <a:srgbClr val="2B2B2B"/>
                           </a:solidFill>
                           <a:latin typeface="Arial"/>
                         </a:rPr>
-                        <a:t>dollars per SOLVED task — token-efficiency weighted by that model's unit price</a:t>
+                        <a:t>a repetition whose measurement is untrustworthy — reported, never averaged</a:t>
                       </a:r>
                     </a:p>
                   </a:txBody>
@@ -14535,12 +14547,108 @@
                     <a:p>
                       <a:pPr algn="l"/>
                       <a:r>
-                        <a:rPr sz="1200" b="0">
+                        <a:rPr sz="1150" b="0">
                           <a:solidFill>
                             <a:srgbClr val="2B2B2B"/>
                           </a:solidFill>
                           <a:latin typeface="Arial"/>
                         </a:rPr>
+                        <a:t>Token-efficiency</a:t>
+                      </a:r>
+                    </a:p>
+                  </a:txBody>
+                  <a:tcPr marL="64008" marR="64008" marT="18288" marB="18288">
+                    <a:solidFill>
+                      <a:srgbClr val="FAF9F5"/>
+                    </a:solidFill>
+                  </a:tcPr>
+                </a:tc>
+                <a:tc>
+                  <a:txBody>
+                    <a:bodyPr/>
+                    <a:lstStyle/>
+                    <a:p>
+                      <a:pPr algn="r"/>
+                      <a:r>
+                        <a:rPr sz="1150" b="0">
+                          <a:solidFill>
+                            <a:srgbClr val="2B2B2B"/>
+                          </a:solidFill>
+                          <a:latin typeface="Arial"/>
+                        </a:rPr>
+                        <a:t>tokens consumed per SOLVED task — what the context window and rate limits see</a:t>
+                      </a:r>
+                    </a:p>
+                  </a:txBody>
+                  <a:tcPr marL="64008" marR="64008" marT="18288" marB="18288">
+                    <a:solidFill>
+                      <a:srgbClr val="FAF9F5"/>
+                    </a:solidFill>
+                  </a:tcPr>
+                </a:tc>
+              </a:tr>
+              <a:tr h="292608">
+                <a:tc>
+                  <a:txBody>
+                    <a:bodyPr/>
+                    <a:lstStyle/>
+                    <a:p>
+                      <a:pPr algn="l"/>
+                      <a:r>
+                        <a:rPr sz="1150" b="0">
+                          <a:solidFill>
+                            <a:srgbClr val="2B2B2B"/>
+                          </a:solidFill>
+                          <a:latin typeface="Arial"/>
+                        </a:rPr>
+                        <a:t>Cost-efficiency</a:t>
+                      </a:r>
+                    </a:p>
+                  </a:txBody>
+                  <a:tcPr marL="64008" marR="64008" marT="18288" marB="18288">
+                    <a:solidFill>
+                      <a:srgbClr val="FFFFFF"/>
+                    </a:solidFill>
+                  </a:tcPr>
+                </a:tc>
+                <a:tc>
+                  <a:txBody>
+                    <a:bodyPr/>
+                    <a:lstStyle/>
+                    <a:p>
+                      <a:pPr algn="r"/>
+                      <a:r>
+                        <a:rPr sz="1150" b="0">
+                          <a:solidFill>
+                            <a:srgbClr val="2B2B2B"/>
+                          </a:solidFill>
+                          <a:latin typeface="Arial"/>
+                        </a:rPr>
+                        <a:t>dollars per SOLVED task — token-efficiency weighted by that model's unit price</a:t>
+                      </a:r>
+                    </a:p>
+                  </a:txBody>
+                  <a:tcPr marL="64008" marR="64008" marT="18288" marB="18288">
+                    <a:solidFill>
+                      <a:srgbClr val="FFFFFF"/>
+                    </a:solidFill>
+                  </a:tcPr>
+                </a:tc>
+              </a:tr>
+              <a:tr h="292608">
+                <a:tc>
+                  <a:txBody>
+                    <a:bodyPr/>
+                    <a:lstStyle/>
+                    <a:p>
+                      <a:pPr algn="l"/>
+                      <a:r>
+                        <a:rPr sz="1150" b="0">
+                          <a:solidFill>
+                            <a:srgbClr val="2B2B2B"/>
+                          </a:solidFill>
+                          <a:latin typeface="Arial"/>
+                        </a:rPr>
                         <a:t>Cost per solved task</a:t>
                       </a:r>
                     </a:p>
@@ -14558,7 +14666,7 @@
                     <a:p>
                       <a:pPr algn="r"/>
                       <a:r>
-                        <a:rPr sz="1200" b="0">
+                        <a:rPr sz="1150" b="0">
                           <a:solidFill>
                             <a:srgbClr val="2B2B2B"/>
                           </a:solidFill>

--- a/results/autobench-claudecode-summary.pptx
+++ b/results/autobench-claudecode-summary.pptx
@@ -3259,7 +3259,7 @@
                 </a:solidFill>
                 <a:latin typeface="Arial"/>
               </a:rPr>
-              <a:t>Last modified 2026-09-09 11:33 EDT</a:t>
+              <a:t>Last modified 2026-09-09 11:39 EDT</a:t>
             </a:r>
           </a:p>
         </p:txBody>

--- a/results/autobench-claudecode-summary.pptx
+++ b/results/autobench-claudecode-summary.pptx
@@ -3259,7 +3259,7 @@
                 </a:solidFill>
                 <a:latin typeface="Arial"/>
               </a:rPr>
-              <a:t>Last modified 2026-09-09 11:39 EDT</a:t>
+              <a:t>Last modified 2026-09-09 12:03 EDT</a:t>
             </a:r>
           </a:p>
         </p:txBody>
@@ -4185,8 +4185,8 @@
         </p:nvSpPr>
         <p:spPr>
           <a:xfrm>
-            <a:off x="640080" y="2560320"/>
-            <a:ext cx="10881360" cy="274320"/>
+            <a:off x="640080" y="2487168"/>
+            <a:ext cx="10881360" cy="731520"/>
           </a:xfrm>
           <a:prstGeom prst="rect">
             <a:avLst/>
@@ -4199,15 +4199,51 @@
           </a:bodyPr>
           <a:lstStyle/>
           <a:p>
-            <a:pPr algn="l"/>
-            <a:r>
-              <a:rPr sz="1400" b="0">
+            <a:pPr algn="l">
+              <a:spcAft>
+                <a:spcPts val="100"/>
+              </a:spcAft>
+            </a:pPr>
+            <a:r>
+              <a:rPr sz="1250" b="0">
                 <a:solidFill>
                   <a:srgbClr val="6B6B6B"/>
                 </a:solidFill>
                 <a:latin typeface="Arial"/>
               </a:rPr>
-              <a:t>Factor 1 — tokens per LLM call: ratio vs sonnet-4-6, across five structurally different cells</a:t>
+              <a:t>Factor 1 — tokens per LLM call: ratio vs sonnet-4-6, across five structurally different cells.</a:t>
+            </a:r>
+          </a:p>
+          <a:p>
+            <a:pPr algn="l">
+              <a:spcAft>
+                <a:spcPts val="100"/>
+              </a:spcAft>
+            </a:pPr>
+            <a:r>
+              <a:rPr sz="1250" b="0">
+                <a:solidFill>
+                  <a:srgbClr val="6B6B6B"/>
+                </a:solidFill>
+                <a:latin typeface="Arial"/>
+              </a:rPr>
+              <a:t>“spread” = highest ratio minus lowest. Small spread means the ratio is a property of the MODEL, not of the task</a:t>
+            </a:r>
+          </a:p>
+          <a:p>
+            <a:pPr algn="l">
+              <a:spcAft>
+                <a:spcPts val="100"/>
+              </a:spcAft>
+            </a:pPr>
+            <a:r>
+              <a:rPr sz="1250" b="0">
+                <a:solidFill>
+                  <a:srgbClr val="6B6B6B"/>
+                </a:solidFill>
+                <a:latin typeface="Arial"/>
+              </a:rPr>
+              <a:t>(≤0.15 is reported as CONSTANT).</a:t>
             </a:r>
           </a:p>
         </p:txBody>
@@ -4221,7 +4257,7 @@
           <p:nvPr/>
         </p:nvGraphicFramePr>
         <p:xfrm>
-          <a:off x="640080" y="2926080"/>
+          <a:off x="640080" y="3310128"/>
           <a:ext cx="10881360" cy="1170432"/>
         </p:xfrm>
         <a:graphic>
@@ -4273,7 +4309,7 @@
                           </a:solidFill>
                           <a:latin typeface="Arial"/>
                         </a:rPr>
-                        <a:t>range</a:t>
+                        <a:t>range across the 5 cells</a:t>
                       </a:r>
                     </a:p>
                   </a:txBody>
@@ -4624,7 +4660,7 @@
         </p:nvSpPr>
         <p:spPr>
           <a:xfrm>
-            <a:off x="640080" y="4297680"/>
+            <a:off x="640080" y="4617720"/>
             <a:ext cx="10881360" cy="320040"/>
           </a:xfrm>
           <a:prstGeom prst="rect">
@@ -4659,8 +4695,8 @@
         </p:nvSpPr>
         <p:spPr>
           <a:xfrm>
-            <a:off x="640080" y="4681728"/>
-            <a:ext cx="10698480" cy="868680"/>
+            <a:off x="640080" y="4983480"/>
+            <a:ext cx="10698480" cy="685800"/>
           </a:xfrm>
           <a:prstGeom prst="roundRect">
             <a:avLst/>
@@ -4695,37 +4731,25 @@
           <a:p>
             <a:pPr algn="ctr"/>
             <a:r>
-              <a:rPr sz="1300" b="1">
+              <a:rPr sz="1250" b="1">
                 <a:solidFill>
                   <a:srgbClr val="1E2761"/>
                 </a:solidFill>
                 <a:latin typeface="Arial"/>
               </a:rPr>
-              <a:t>One TASK is one `claude -p` run and makes SEVERAL LLM calls (5–24 observed), each re-sending the</a:t>
+              <a:t>One TASK is one `claude -p` run making SEVERAL LLM calls (5–24), each re-sending the growing conversation.</a:t>
             </a:r>
           </a:p>
           <a:p>
             <a:pPr algn="ctr"/>
             <a:r>
-              <a:rPr sz="1300" b="1">
+              <a:rPr sz="1250" b="1">
                 <a:solidFill>
                   <a:srgbClr val="1E2761"/>
                 </a:solidFill>
                 <a:latin typeface="Arial"/>
               </a:rPr>
-              <a:t>growing conversation. A model has a stable appetite per LLM call — how many calls the job needs is a</a:t>
-            </a:r>
-          </a:p>
-          <a:p>
-            <a:pPr algn="ctr"/>
-            <a:r>
-              <a:rPr sz="1300" b="1">
-                <a:solidFill>
-                  <a:srgbClr val="1E2761"/>
-                </a:solidFill>
-                <a:latin typeface="Arial"/>
-              </a:rPr>
-              <a:t>separate matter. A raw token total multiplies the two and hides both.</a:t>
+              <a:t>A raw token total multiplies the two factors and hides both.</a:t>
             </a:r>
           </a:p>
         </p:txBody>
@@ -4738,8 +4762,8 @@
         </p:nvSpPr>
         <p:spPr>
           <a:xfrm>
-            <a:off x="640080" y="5623560"/>
-            <a:ext cx="10881360" cy="548640"/>
+            <a:off x="640080" y="5852160"/>
+            <a:ext cx="10881360" cy="274320"/>
           </a:xfrm>
           <a:prstGeom prst="rect">
             <a:avLst/>
@@ -4754,25 +4778,13 @@
           <a:p>
             <a:pPr algn="l"/>
             <a:r>
-              <a:rPr sz="1300" b="0">
+              <a:rPr sz="1200" b="0">
                 <a:solidFill>
                   <a:srgbClr val="6B6B6B"/>
                 </a:solidFill>
                 <a:latin typeface="Arial"/>
               </a:rPr>
-              <a:t>Cache reads are 81–97% of prompt tokens in every cell — highest on sonnet-5 and opus-5. Reporting</a:t>
-            </a:r>
-          </a:p>
-          <a:p>
-            <a:pPr algn="l"/>
-            <a:r>
-              <a:rPr sz="1300" b="0">
-                <a:solidFill>
-                  <a:srgbClr val="6B6B6B"/>
-                </a:solidFill>
-                <a:latin typeface="Arial"/>
-              </a:rPr>
-              <a:t>“input tokens” alone for this workload is meaningless.</a:t>
+              <a:t>That re-sending is also why cache reads are 81–97% of prompt tokens in every cell.</a:t>
             </a:r>
           </a:p>
         </p:txBody>
@@ -9587,19 +9599,19 @@
           <a:p>
             <a:pPr algn="ctr"/>
             <a:r>
-              <a:rPr sz="1200" b="0">
+              <a:rPr sz="1150" b="0">
                 <a:solidFill>
                   <a:srgbClr val="2B2B2B"/>
                 </a:solidFill>
                 <a:latin typeface="Arial"/>
               </a:rPr>
-              <a:t>USE WHERE RETRIES ARE OK</a:t>
+              <a:t>ONLY WITH A VALIDATOR</a:t>
             </a:r>
           </a:p>
           <a:p>
             <a:pPr algn="ctr"/>
             <a:r>
-              <a:rPr sz="1200" b="0">
+              <a:rPr sz="1150" b="0">
                 <a:solidFill>
                   <a:srgbClr val="2B2B2B"/>
                 </a:solidFill>
@@ -9611,7 +9623,7 @@
           <a:p>
             <a:pPr algn="ctr"/>
             <a:r>
-              <a:rPr sz="1200" b="0">
+              <a:rPr sz="1150" b="0">
                 <a:solidFill>
                   <a:srgbClr val="2B2B2B"/>
                 </a:solidFill>
@@ -9623,7 +9635,7 @@
           <a:p>
             <a:pPr algn="ctr"/>
             <a:r>
-              <a:rPr sz="1200" b="0">
+              <a:rPr sz="1150" b="0">
                 <a:solidFill>
                   <a:srgbClr val="2B2B2B"/>
                 </a:solidFill>
@@ -9635,61 +9647,85 @@
           <a:p>
             <a:pPr algn="ctr"/>
             <a:r>
-              <a:rPr sz="1200" b="0">
+              <a:rPr sz="1150" b="0">
                 <a:solidFill>
                   <a:srgbClr val="2B2B2B"/>
                 </a:solidFill>
                 <a:latin typeface="Arial"/>
               </a:rPr>
-              <a:t>Cheapest in every cell by 2–4×</a:t>
+              <a:t>Most cost-efficient everywhere by</a:t>
             </a:r>
           </a:p>
           <a:p>
             <a:pPr algn="ctr"/>
             <a:r>
-              <a:rPr sz="1200" b="0">
+              <a:rPr sz="1150" b="0">
                 <a:solidFill>
                   <a:srgbClr val="2B2B2B"/>
                 </a:solidFill>
                 <a:latin typeface="Arial"/>
               </a:rPr>
-              <a:t>and fastest (14–39s vs 59–78s).</a:t>
+              <a:t>2–4×, and fastest. But it failed</a:t>
             </a:r>
           </a:p>
           <a:p>
             <a:pPr algn="ctr"/>
             <a:r>
-              <a:rPr sz="1200" b="0">
+              <a:rPr sz="1150" b="0">
                 <a:solidFill>
                   <a:srgbClr val="2B2B2B"/>
                 </a:solidFill>
                 <a:latin typeface="Arial"/>
               </a:rPr>
-              <a:t>But passed the harder task only</a:t>
+              <a:t>3 of 5 WITH the skill supplied —</a:t>
             </a:r>
           </a:p>
           <a:p>
             <a:pPr algn="ctr"/>
             <a:r>
-              <a:rPr sz="1200" b="0">
+              <a:rPr sz="1150" b="0">
                 <a:solidFill>
                   <a:srgbClr val="2B2B2B"/>
                 </a:solidFill>
                 <a:latin typeface="Arial"/>
               </a:rPr>
-              <a:t>40% of the time WITH the skill.</a:t>
+              <a:t>and one failure hardcoded values</a:t>
             </a:r>
           </a:p>
           <a:p>
             <a:pPr algn="ctr"/>
             <a:r>
-              <a:rPr sz="1200" b="0">
+              <a:rPr sz="1150" b="0">
                 <a:solidFill>
                   <a:srgbClr val="2B2B2B"/>
                 </a:solidFill>
                 <a:latin typeface="Arial"/>
               </a:rPr>
-              <a:t>Not for first-attempt correctness.</a:t>
+              <a:t>instead of formulas, which LOOKS</a:t>
+            </a:r>
+          </a:p>
+          <a:p>
+            <a:pPr algn="ctr"/>
+            <a:r>
+              <a:rPr sz="1150" b="0">
+                <a:solidFill>
+                  <a:srgbClr val="2B2B2B"/>
+                </a:solidFill>
+                <a:latin typeface="Arial"/>
+              </a:rPr>
+              <a:t>correct. Retry only works if you</a:t>
+            </a:r>
+          </a:p>
+          <a:p>
+            <a:pPr algn="ctr"/>
+            <a:r>
+              <a:rPr sz="1150" b="0">
+                <a:solidFill>
+                  <a:srgbClr val="2B2B2B"/>
+                </a:solidFill>
+                <a:latin typeface="Arial"/>
+              </a:rPr>
+              <a:t>can detect the failure.</a:t>
             </a:r>
           </a:p>
         </p:txBody>
@@ -14695,7 +14731,7 @@
         </p:nvSpPr>
         <p:spPr>
           <a:xfrm>
-            <a:off x="640080" y="4892040"/>
+            <a:off x="640080" y="5843016"/>
             <a:ext cx="10881360" cy="274320"/>
           </a:xfrm>
           <a:prstGeom prst="rect">

--- a/results/autobench-claudecode-summary.pptx
+++ b/results/autobench-claudecode-summary.pptx
@@ -3261,7 +3261,7 @@
                 </a:solidFill>
                 <a:latin typeface="Arial"/>
               </a:rPr>
-              <a:t>Last modified 2026-09-09 12:16 EDT</a:t>
+              <a:t>Last modified 2026-09-09 12:32 EDT</a:t>
             </a:r>
           </a:p>
         </p:txBody>
@@ -8551,7 +8551,7 @@
                 </a:solidFill>
                 <a:latin typeface="Arial"/>
               </a:rPr>
-              <a:t>Downstream calls are counted, not attributed</a:t>
+              <a:t>A subagent's calls land in the totals — and can't be separated out</a:t>
             </a:r>
           </a:p>
         </p:txBody>
@@ -8564,7 +8564,7 @@
         </p:nvSpPr>
         <p:spPr>
           <a:xfrm>
-            <a:off x="640080" y="1481328"/>
+            <a:off x="640080" y="1901952"/>
             <a:ext cx="1005840" cy="45720"/>
           </a:xfrm>
           <a:prstGeom prst="rect">
@@ -8608,8 +8608,8 @@
         </p:nvSpPr>
         <p:spPr>
           <a:xfrm>
-            <a:off x="640080" y="1783080"/>
-            <a:ext cx="10881360" cy="548640"/>
+            <a:off x="640080" y="2084831"/>
+            <a:ext cx="10881360" cy="274320"/>
           </a:xfrm>
           <a:prstGeom prst="rect">
             <a:avLst/>
@@ -8630,19 +8630,7 @@
                 </a:solidFill>
                 <a:latin typeface="Arial"/>
               </a:rPr>
-              <a:t>An LLM call can trigger more LLM calls: a subagent runs its own agent loop. Cortex counts them, because the</a:t>
-            </a:r>
-          </a:p>
-          <a:p>
-            <a:pPr algn="l"/>
-            <a:r>
-              <a:rPr sz="1400" b="0">
-                <a:solidFill>
-                  <a:srgbClr val="2B2B2B"/>
-                </a:solidFill>
-                <a:latin typeface="Arial"/>
-              </a:rPr>
-              <a:t>child's HTTPS_PROXY is inherited by its subprocesses — that traffic crosses the same proxy into the window.</a:t>
+              <a:t>The child's HTTPS_PROXY is inherited by its subprocesses, so a subagent's traffic crosses the same proxy.</a:t>
             </a:r>
           </a:p>
         </p:txBody>
@@ -8656,7 +8644,7 @@
           <p:nvPr/>
         </p:nvGraphicFramePr>
         <p:xfrm>
-          <a:off x="640080" y="2468880"/>
+          <a:off x="640080" y="2423160"/>
           <a:ext cx="10881360" cy="1463040"/>
         </p:xfrm>
         <a:graphic>
@@ -8921,7 +8909,7 @@
         </p:nvSpPr>
         <p:spPr>
           <a:xfrm>
-            <a:off x="640080" y="3977639"/>
+            <a:off x="640080" y="3950208"/>
             <a:ext cx="10881360" cy="274320"/>
           </a:xfrm>
           <a:prstGeom prst="rect">
@@ -8957,7 +8945,7 @@
           <p:nvPr/>
         </p:nvGraphicFramePr>
         <p:xfrm>
-          <a:off x="640080" y="4343400"/>
+          <a:off x="640080" y="4279392"/>
           <a:ext cx="10881360" cy="1170432"/>
         </p:xfrm>
         <a:graphic>
@@ -9267,8 +9255,8 @@
         </p:nvSpPr>
         <p:spPr>
           <a:xfrm>
-            <a:off x="640080" y="5532120"/>
-            <a:ext cx="10241280" cy="868680"/>
+            <a:off x="640080" y="5486400"/>
+            <a:ext cx="10241280" cy="822960"/>
           </a:xfrm>
           <a:prstGeom prst="roundRect">
             <a:avLst/>
@@ -13680,7 +13668,7 @@
                 </a:solidFill>
                 <a:latin typeface="Arial"/>
               </a:rPr>
-              <a:t>Downstream calls are counted, not attributed</a:t>
+              <a:t>A subagent's calls land in the totals</a:t>
             </a:r>
           </a:p>
         </p:txBody>

--- a/results/autobench-claudecode-summary.pptx
+++ b/results/autobench-claudecode-summary.pptx
@@ -3261,7 +3261,7 @@
                 </a:solidFill>
                 <a:latin typeface="Arial"/>
               </a:rPr>
-              <a:t>Last modified 2026-09-09 12:32 EDT</a:t>
+              <a:t>Last modified 2026-09-09 16:37 EDT</a:t>
             </a:r>
           </a:p>
         </p:txBody>
@@ -11847,7 +11847,7 @@
                 </a:solidFill>
                 <a:latin typeface="Arial"/>
               </a:rPr>
-              <a:t>independent cells. Absolute dollar figures are indicative — n=5, and cache billing is unverified.</a:t>
+              <a:t>independent cells. Absolute dollar figures are indicative — n=5–10 per cell, and cache billing is unverified.</a:t>
             </a:r>
           </a:p>
         </p:txBody>
@@ -12159,7 +12159,7 @@
                           </a:solidFill>
                           <a:latin typeface="Arial"/>
                         </a:rPr>
-                        <a:t>n = 5 per cell, some CV to 0.85</a:t>
+                        <a:t>n = 5–10 per cell (uneven), some CV to 0.85</a:t>
                       </a:r>
                     </a:p>
                   </a:txBody>
@@ -12182,7 +12182,7 @@
                           </a:solidFill>
                           <a:latin typeface="Arial"/>
                         </a:rPr>
-                        <a:t>tokens/call constants are solid (5 cells agree); individual dollar figures are indicative</a:t>
+                        <a:t>read the n column, not a single number; tokens/call constants are solid (5 cells agree), individual dollar figures indicative</a:t>
                       </a:r>
                     </a:p>
                   </a:txBody>
@@ -16364,7 +16364,7 @@
                           </a:solidFill>
                           <a:latin typeface="Arial"/>
                         </a:rPr>
-                        <a:t>one (task × arm × model), measured over n repetitions — e.g. xlsx-fin-colors / ON / sonnet-5, n=5</a:t>
+                        <a:t>one (task × arm × model), measured over n repetitions — e.g. xlsx-fin-colors / ON / sonnet-5, n=8</a:t>
                       </a:r>
                     </a:p>
                   </a:txBody>

--- a/results/autobench-claudecode-summary.pptx
+++ b/results/autobench-claudecode-summary.pptx
@@ -3226,7 +3226,7 @@
                 </a:solidFill>
                 <a:latin typeface="Arial"/>
               </a:rPr>
-              <a:t>193 recorded repetitions  ·  4 models  ·  internal LiteLLM</a:t>
+              <a:t>194 recorded repetitions  ·  100 in the n=5 cost grid  ·  4 models  ·  internal LiteLLM</a:t>
             </a:r>
           </a:p>
         </p:txBody>
@@ -3261,7 +3261,7 @@
                 </a:solidFill>
                 <a:latin typeface="Arial"/>
               </a:rPr>
-              <a:t>Last modified 2026-09-09 16:37 EDT</a:t>
+              <a:t>Last modified 2026-09-09 17:13 EDT</a:t>
             </a:r>
           </a:p>
         </p:txBody>
@@ -5414,7 +5414,7 @@
                           </a:solidFill>
                           <a:latin typeface="Arial"/>
                         </a:rPr>
-                        <a:t>0.97 – 1.05</a:t>
+                        <a:t>0.97 – 1.04</a:t>
                       </a:r>
                     </a:p>
                   </a:txBody>
@@ -5508,7 +5508,7 @@
                           </a:solidFill>
                           <a:latin typeface="Arial"/>
                         </a:rPr>
-                        <a:t>1.19 – 1.30</a:t>
+                        <a:t>1.18 – 1.24</a:t>
                       </a:r>
                     </a:p>
                   </a:txBody>
@@ -5531,7 +5531,7 @@
                           </a:solidFill>
                           <a:latin typeface="Arial"/>
                         </a:rPr>
-                        <a:t>0.11</a:t>
+                        <a:t>0.05</a:t>
                       </a:r>
                     </a:p>
                   </a:txBody>
@@ -5554,7 +5554,7 @@
                           </a:solidFill>
                           <a:latin typeface="Arial"/>
                         </a:rPr>
-                        <a:t>≈1.23× more per LLM call</a:t>
+                        <a:t>≈1.21× more per LLM call</a:t>
                       </a:r>
                     </a:p>
                   </a:txBody>
@@ -5602,7 +5602,7 @@
                           </a:solidFill>
                           <a:latin typeface="Arial"/>
                         </a:rPr>
-                        <a:t>0.89 – 0.97</a:t>
+                        <a:t>0.88 – 0.93</a:t>
                       </a:r>
                     </a:p>
                   </a:txBody>
@@ -5625,7 +5625,7 @@
                           </a:solidFill>
                           <a:latin typeface="Arial"/>
                         </a:rPr>
-                        <a:t>0.08</a:t>
+                        <a:t>0.05</a:t>
                       </a:r>
                     </a:p>
                   </a:txBody>
@@ -5748,7 +5748,7 @@
                 </a:solidFill>
                 <a:latin typeface="Arial"/>
               </a:rPr>
-              <a:t>One TASK is one `claude -p` run making SEVERAL LLM calls (5–24), each re-sending the growing conversation.</a:t>
+              <a:t>One TASK is one `claude -p` run making SEVERAL LLM calls (2–29), each re-sending the growing conversation.</a:t>
             </a:r>
           </a:p>
           <a:p>
@@ -6212,7 +6212,7 @@
                           </a:solidFill>
                           <a:latin typeface="Arial"/>
                         </a:rPr>
-                        <a:t>0.1590</a:t>
+                        <a:t>0.1746</a:t>
                       </a:r>
                     </a:p>
                   </a:txBody>
@@ -6235,7 +6235,7 @@
                           </a:solidFill>
                           <a:latin typeface="Arial"/>
                         </a:rPr>
-                        <a:t>0.1678</a:t>
+                        <a:t>0.1608</a:t>
                       </a:r>
                     </a:p>
                   </a:txBody>
@@ -6329,7 +6329,7 @@
                           </a:solidFill>
                           <a:latin typeface="Arial"/>
                         </a:rPr>
-                        <a:t>0.1873</a:t>
+                        <a:t>0.1896</a:t>
                       </a:r>
                     </a:p>
                   </a:txBody>
@@ -6352,7 +6352,7 @@
                           </a:solidFill>
                           <a:latin typeface="Arial"/>
                         </a:rPr>
-                        <a:t>0.1332</a:t>
+                        <a:t>0.1261</a:t>
                       </a:r>
                     </a:p>
                   </a:txBody>
@@ -6446,7 +6446,7 @@
                           </a:solidFill>
                           <a:latin typeface="Arial"/>
                         </a:rPr>
-                        <a:t>0.0837</a:t>
+                        <a:t>0.0839</a:t>
                       </a:r>
                     </a:p>
                   </a:txBody>
@@ -6624,7 +6624,7 @@
                 </a:solidFill>
                 <a:latin typeface="Arial"/>
               </a:rPr>
-              <a:t>sonnet-5 uses MORE tokens than sonnet-4-6</a:t>
+              <a:t>sonnet-5 uses MORE tokens than sonnet-4-6 yet</a:t>
             </a:r>
           </a:p>
           <a:p>
@@ -6636,7 +6636,7 @@
                 </a:solidFill>
                 <a:latin typeface="Arial"/>
               </a:rPr>
-              <a:t>yet costs LESS, at 2/3 the unit price.</a:t>
+              <a:t>costs LESS on all three cells here, at 2/3 the unit price.</a:t>
             </a:r>
           </a:p>
         </p:txBody>
@@ -6671,7 +6671,7 @@
                 </a:solidFill>
                 <a:latin typeface="Arial"/>
               </a:rPr>
-              <a:t>Same cells under scenario A (no cache discount) — ordering identical throughout, so the conclusion does not</a:t>
+              <a:t>Same cells under scenario A (no cache discount). haiku stays cheapest and opus-5 dearest everywhere — but the two</a:t>
             </a:r>
           </a:p>
           <a:p>
@@ -6683,7 +6683,7 @@
                 </a:solidFill>
                 <a:latin typeface="Arial"/>
               </a:rPr>
-              <a:t>depend on the unverified cache assumption:</a:t>
+              <a:t>sonnets SWAP on xlsx-fin-colors, so that one mid-band ordering does depend on the unverified cache assumption:</a:t>
             </a:r>
           </a:p>
         </p:txBody>
@@ -6890,7 +6890,7 @@
                           </a:solidFill>
                           <a:latin typeface="Arial"/>
                         </a:rPr>
-                        <a:t>0.5916</a:t>
+                        <a:t>0.6677</a:t>
                       </a:r>
                     </a:p>
                   </a:txBody>
@@ -6913,7 +6913,7 @@
                           </a:solidFill>
                           <a:latin typeface="Arial"/>
                         </a:rPr>
-                        <a:t>0.9080</a:t>
+                        <a:t>0.8920</a:t>
                       </a:r>
                     </a:p>
                   </a:txBody>
@@ -7007,7 +7007,7 @@
                           </a:solidFill>
                           <a:latin typeface="Arial"/>
                         </a:rPr>
-                        <a:t>0.8462</a:t>
+                        <a:t>0.8484</a:t>
                       </a:r>
                     </a:p>
                   </a:txBody>
@@ -7030,7 +7030,7 @@
                           </a:solidFill>
                           <a:latin typeface="Arial"/>
                         </a:rPr>
-                        <a:t>0.7035</a:t>
+                        <a:t>0.6625</a:t>
                       </a:r>
                     </a:p>
                   </a:txBody>
@@ -7124,7 +7124,7 @@
                           </a:solidFill>
                           <a:latin typeface="Arial"/>
                         </a:rPr>
-                        <a:t>0.4567</a:t>
+                        <a:t>0.4582</a:t>
                       </a:r>
                     </a:p>
                   </a:txBody>
@@ -8086,7 +8086,7 @@
                           </a:solidFill>
                           <a:latin typeface="Arial"/>
                         </a:rPr>
-                        <a:t>0.0842</a:t>
+                        <a:t>0.0839</a:t>
                       </a:r>
                     </a:p>
                   </a:txBody>
@@ -11426,7 +11426,7 @@
                 </a:solidFill>
                 <a:latin typeface="Arial"/>
               </a:rPr>
-              <a:t>than sonnet-4-6 in 2 of 3 cells — 29%</a:t>
+              <a:t>than sonnet-4-6 on all 3 cells (scenario B)</a:t>
             </a:r>
           </a:p>
           <a:p>
@@ -11438,7 +11438,7 @@
                 </a:solidFill>
                 <a:latin typeface="Arial"/>
               </a:rPr>
-              <a:t>on font-clean, 30% on the canary —</a:t>
+              <a:t>— 33% on font-clean, 30% on the</a:t>
             </a:r>
           </a:p>
           <a:p>
@@ -11450,7 +11450,7 @@
                 </a:solidFill>
                 <a:latin typeface="Arial"/>
               </a:rPr>
-              <a:t>despite using MORE tokens.</a:t>
+              <a:t>canary, 8% on colors — despite using</a:t>
             </a:r>
           </a:p>
           <a:p>
@@ -11462,7 +11462,19 @@
                 </a:solidFill>
                 <a:latin typeface="Arial"/>
               </a:rPr>
-              <a:t>2/3 unit price absorbs 1.23×/call.</a:t>
+              <a:t>MORE tokens. 2/3 unit price</a:t>
+            </a:r>
+          </a:p>
+          <a:p>
+            <a:pPr algn="ctr"/>
+            <a:r>
+              <a:rPr sz="1200" b="0">
+                <a:solidFill>
+                  <a:srgbClr val="2B2B2B"/>
+                </a:solidFill>
+                <a:latin typeface="Arial"/>
+              </a:rPr>
+              <a:t>absorbs 1.21×/call.</a:t>
             </a:r>
           </a:p>
         </p:txBody>
@@ -11565,7 +11577,7 @@
                 </a:solidFill>
                 <a:latin typeface="Arial"/>
               </a:rPr>
-              <a:t>Most cost-efficient everywhere by</a:t>
+              <a:t>Most cost-efficient everywhere,</a:t>
             </a:r>
           </a:p>
           <a:p>
@@ -11577,7 +11589,19 @@
                 </a:solidFill>
                 <a:latin typeface="Arial"/>
               </a:rPr>
-              <a:t>2–4×, and fastest. But it failed</a:t>
+              <a:t>by 1.2–4.2× over the next</a:t>
+            </a:r>
+          </a:p>
+          <a:p>
+            <a:pPr algn="ctr"/>
+            <a:r>
+              <a:rPr sz="1150" b="0">
+                <a:solidFill>
+                  <a:srgbClr val="2B2B2B"/>
+                </a:solidFill>
+                <a:latin typeface="Arial"/>
+              </a:rPr>
+              <a:t>cheapest, and fastest. But it failed</a:t>
             </a:r>
           </a:p>
           <a:p>
@@ -11752,7 +11776,7 @@
                 </a:solidFill>
                 <a:latin typeface="Arial"/>
               </a:rPr>
-              <a:t>(1.6–2.1× sonnet-5), no pass-rate</a:t>
+              <a:t>(1.7–2.0× sonnet-5, scenario B), no pass-rate</a:t>
             </a:r>
           </a:p>
           <a:p>
@@ -11835,7 +11859,7 @@
                 </a:solidFill>
                 <a:latin typeface="Arial"/>
               </a:rPr>
-              <a:t>Confidence: the pass-rate and cost orderings hold across BOTH pricing scenarios, and tokens/call holds across five</a:t>
+              <a:t>Confidence: pass rates, the cheapest/dearest ordering and the token/cost inversion all hold across BOTH pricing</a:t>
             </a:r>
           </a:p>
           <a:p>
@@ -11847,7 +11871,19 @@
                 </a:solidFill>
                 <a:latin typeface="Arial"/>
               </a:rPr>
-              <a:t>independent cells. Absolute dollar figures are indicative — n=5–10 per cell, and cache billing is unverified.</a:t>
+              <a:t>scenarios; tokens/call holds across five independent cells. Absolute dollar figures are indicative — n=5 per cell,</a:t>
+            </a:r>
+          </a:p>
+          <a:p>
+            <a:pPr algn="l"/>
+            <a:r>
+              <a:rPr sz="1300" b="0">
+                <a:solidFill>
+                  <a:srgbClr val="CADCFC"/>
+                </a:solidFill>
+                <a:latin typeface="Arial"/>
+              </a:rPr>
+              <a:t>cache billing unverified, and one mid-band pair (the two sonnets on xlsx-fin-colors) swaps between scenarios.</a:t>
             </a:r>
           </a:p>
         </p:txBody>
@@ -12159,7 +12195,7 @@
                           </a:solidFill>
                           <a:latin typeface="Arial"/>
                         </a:rPr>
-                        <a:t>n = 5–10 per cell (uneven), some CV to 0.85</a:t>
+                        <a:t>n = 5 per cell (20 cells), CV to 0.85</a:t>
                       </a:r>
                     </a:p>
                   </a:txBody>
@@ -12182,7 +12218,7 @@
                           </a:solidFill>
                           <a:latin typeface="Arial"/>
                         </a:rPr>
-                        <a:t>read the n column, not a single number; tokens/call constants are solid (5 cells agree), individual dollar figures indicative</a:t>
+                        <a:t>tokens/call constants are solid (5 cells agree); a single cell's median is indicative</a:t>
                       </a:r>
                     </a:p>
                   </a:txBody>
@@ -12230,7 +12266,7 @@
                           </a:solidFill>
                           <a:latin typeface="Arial"/>
                         </a:rPr>
-                        <a:t>largest single uncertainty — 4–5× on ABSOLUTE cost, but changes no ranking</a:t>
+                        <a:t>4–5× on ABSOLUTE cost; no headline ranking changes, but the two sonnets swap on colors</a:t>
                       </a:r>
                     </a:p>
                   </a:txBody>

--- a/results/autobench-claudecode-summary.pptx
+++ b/results/autobench-claudecode-summary.pptx
@@ -3226,7 +3226,7 @@
                 </a:solidFill>
                 <a:latin typeface="Arial"/>
               </a:rPr>
-              <a:t>194 recorded repetitions  ·  100 in the n=5 cost grid  ·  4 models  ·  internal LiteLLM</a:t>
+              <a:t>209 recorded repetitions  ·  149 in the cost grid (18 cells n=5, 2 at n≈30)  ·  4 models  ·  internal LiteLLM</a:t>
             </a:r>
           </a:p>
         </p:txBody>
@@ -3261,7 +3261,7 @@
                 </a:solidFill>
                 <a:latin typeface="Arial"/>
               </a:rPr>
-              <a:t>Last modified 2026-09-09 17:13 EDT</a:t>
+              <a:t>Last modified 2026-09-09 20:33 EDT</a:t>
             </a:r>
           </a:p>
         </p:txBody>
@@ -4651,7 +4651,7 @@
                           </a:solidFill>
                           <a:latin typeface="Arial"/>
                         </a:rPr>
-                        <a:t>0.00 → 0.40   ← fails even when TOLD</a:t>
+                        <a:t>0.00 → 0.52 (n=29)   ← fails even when TOLD</a:t>
                       </a:r>
                     </a:p>
                   </a:txBody>
@@ -4841,7 +4841,7 @@
                           </a:solidFill>
                           <a:latin typeface="Arial"/>
                         </a:rPr>
-                        <a:t>0.20 → 1.00   ← knows it UNAIDED</a:t>
+                        <a:t>0.37 (n=30) → 1.00   ← knows it UNAIDED</a:t>
                       </a:r>
                     </a:p>
                   </a:txBody>
@@ -4881,14 +4881,53 @@
       </p:graphicFrame>
       <p:sp>
         <p:nvSpPr>
-          <p:cNvPr id="7" name="Rounded Rectangle 6"/>
+          <p:cNvPr id="7" name="TextBox 6"/>
+          <p:cNvSpPr txBox="1"/>
+          <p:nvPr/>
+        </p:nvSpPr>
+        <p:spPr>
+          <a:xfrm>
+            <a:off x="640080" y="4224528"/>
+            <a:ext cx="10881360" cy="457200"/>
+          </a:xfrm>
+          <a:prstGeom prst="rect">
+            <a:avLst/>
+          </a:prstGeom>
+          <a:noFill/>
+        </p:spPr>
+        <p:txBody>
+          <a:bodyPr wrap="square" anchor="t" lIns="0" rIns="0">
+            <a:spAutoFit/>
+          </a:bodyPr>
+          <a:lstStyle/>
+          <a:p>
+            <a:pPr algn="l">
+              <a:spcAft>
+                <a:spcPts val="100"/>
+              </a:spcAft>
+            </a:pPr>
+            <a:r>
+              <a:rPr sz="1200" b="0">
+                <a:solidFill>
+                  <a:srgbClr val="6B6B6B"/>
+                </a:solidFill>
+                <a:latin typeface="Arial"/>
+              </a:rPr>
+              <a:t>Every cell is n=5 except the two annotated ones — the only two rates here that are neither 0 nor 1, so the only two sampling error could overturn. They were taken to n≈30: both ROSE (0.40→0.52, 0.20→0.37) and both 95% intervals roughly halved. The n=5 readings were pessimistic, not misdirected.</a:t>
+            </a:r>
+          </a:p>
+        </p:txBody>
+      </p:sp>
+      <p:sp>
+        <p:nvSpPr>
+          <p:cNvPr id="8" name="Rounded Rectangle 7"/>
           <p:cNvSpPr/>
           <p:nvPr/>
         </p:nvSpPr>
         <p:spPr>
           <a:xfrm>
-            <a:off x="640080" y="4480560"/>
-            <a:ext cx="10698480" cy="868680"/>
+            <a:off x="640080" y="4800600"/>
+            <a:ext cx="10698480" cy="731520"/>
           </a:xfrm>
           <a:prstGeom prst="roundRect">
             <a:avLst/>
@@ -4948,7 +4987,7 @@
       </p:sp>
       <p:sp>
         <p:nvSpPr>
-          <p:cNvPr id="8" name="TextBox 7"/>
+          <p:cNvPr id="9" name="TextBox 8"/>
           <p:cNvSpPr txBox="1"/>
           <p:nvPr/>
         </p:nvSpPr>
@@ -5414,7 +5453,7 @@
                           </a:solidFill>
                           <a:latin typeface="Arial"/>
                         </a:rPr>
-                        <a:t>0.97 – 1.04</a:t>
+                        <a:t>0.95 – 1.04</a:t>
                       </a:r>
                     </a:p>
                   </a:txBody>
@@ -5437,7 +5476,7 @@
                           </a:solidFill>
                           <a:latin typeface="Arial"/>
                         </a:rPr>
-                        <a:t>0.07</a:t>
+                        <a:t>0.09</a:t>
                       </a:r>
                     </a:p>
                   </a:txBody>
@@ -6306,7 +6345,7 @@
                           </a:solidFill>
                           <a:latin typeface="Arial"/>
                         </a:rPr>
-                        <a:t>0.1075</a:t>
+                        <a:t>0.0822</a:t>
                       </a:r>
                     </a:p>
                   </a:txBody>
@@ -6984,7 +7023,7 @@
                           </a:solidFill>
                           <a:latin typeface="Arial"/>
                         </a:rPr>
-                        <a:t>0.3364</a:t>
+                        <a:t>0.3501</a:t>
                       </a:r>
                     </a:p>
                   </a:txBody>
@@ -7215,7 +7254,7 @@
                 </a:solidFill>
                 <a:latin typeface="Arial"/>
               </a:rPr>
-              <a:t>haiku's 0.1075 already charges it for a 0.40 pass rate — it is cheapest even after paying for its failures.</a:t>
+              <a:t>haiku's 0.0822 already charges it for a 0.52 pass rate (n=29) — cheapest even after paying for its failures.</a:t>
             </a:r>
           </a:p>
         </p:txBody>
@@ -9750,7 +9789,7 @@
                           </a:solidFill>
                           <a:latin typeface="Arial"/>
                         </a:rPr>
-                        <a:t>1.50×</a:t>
+                        <a:t>1.54×</a:t>
                       </a:r>
                     </a:p>
                   </a:txBody>
@@ -9773,7 +9812,7 @@
                           </a:solidFill>
                           <a:latin typeface="Arial"/>
                         </a:rPr>
-                        <a:t>2.01×</a:t>
+                        <a:t>1.98×</a:t>
                       </a:r>
                     </a:p>
                   </a:txBody>
@@ -9796,7 +9835,7 @@
                           </a:solidFill>
                           <a:latin typeface="Arial"/>
                         </a:rPr>
-                        <a:t>0.93×</a:t>
+                        <a:t>0.94×</a:t>
                       </a:r>
                     </a:p>
                   </a:txBody>
@@ -9867,7 +9906,7 @@
                           </a:solidFill>
                           <a:latin typeface="Arial"/>
                         </a:rPr>
-                        <a:t>1.33×</a:t>
+                        <a:t>1.44×</a:t>
                       </a:r>
                     </a:p>
                   </a:txBody>
@@ -9890,7 +9929,7 @@
                           </a:solidFill>
                           <a:latin typeface="Arial"/>
                         </a:rPr>
-                        <a:t>1.88×</a:t>
+                        <a:t>1.80×</a:t>
                       </a:r>
                     </a:p>
                   </a:txBody>
@@ -9913,7 +9952,7 @@
                           </a:solidFill>
                           <a:latin typeface="Arial"/>
                         </a:rPr>
-                        <a:t>1.06×</a:t>
+                        <a:t>1.04×</a:t>
                       </a:r>
                     </a:p>
                   </a:txBody>
@@ -9961,7 +10000,7 @@
                           </a:solidFill>
                           <a:latin typeface="Arial"/>
                         </a:rPr>
-                        <a:t>2.37×</a:t>
+                        <a:t>3.33×</a:t>
                       </a:r>
                     </a:p>
                   </a:txBody>
@@ -9984,7 +10023,7 @@
                           </a:solidFill>
                           <a:latin typeface="Arial"/>
                         </a:rPr>
-                        <a:t>2.08×</a:t>
+                        <a:t>2.06×</a:t>
                       </a:r>
                     </a:p>
                   </a:txBody>
@@ -10007,7 +10046,7 @@
                           </a:solidFill>
                           <a:latin typeface="Arial"/>
                         </a:rPr>
-                        <a:t>1.56×</a:t>
+                        <a:t>1.44×</a:t>
                       </a:r>
                     </a:p>
                   </a:txBody>
@@ -10078,7 +10117,7 @@
                           </a:solidFill>
                           <a:latin typeface="Arial"/>
                         </a:rPr>
-                        <a:t>2.24×</a:t>
+                        <a:t>2.21×</a:t>
                       </a:r>
                     </a:p>
                   </a:txBody>
@@ -10101,7 +10140,7 @@
                           </a:solidFill>
                           <a:latin typeface="Arial"/>
                         </a:rPr>
-                        <a:t>1.71×</a:t>
+                        <a:t>1.69×</a:t>
                       </a:r>
                     </a:p>
                   </a:txBody>
@@ -10124,7 +10163,7 @@
                           </a:solidFill>
                           <a:latin typeface="Arial"/>
                         </a:rPr>
-                        <a:t>1.41×</a:t>
+                        <a:t>1.32×</a:t>
                       </a:r>
                     </a:p>
                   </a:txBody>
@@ -11589,7 +11628,7 @@
                 </a:solidFill>
                 <a:latin typeface="Arial"/>
               </a:rPr>
-              <a:t>by 1.2–4.2× over the next</a:t>
+              <a:t>by 1.5–4.2× over the next</a:t>
             </a:r>
           </a:p>
           <a:p>
@@ -11613,7 +11652,7 @@
                 </a:solidFill>
                 <a:latin typeface="Arial"/>
               </a:rPr>
-              <a:t>3 of 5 WITH the skill supplied —</a:t>
+              <a:t>14 of 29 WITH the skill supplied,</a:t>
             </a:r>
           </a:p>
           <a:p>
@@ -11625,7 +11664,7 @@
                 </a:solidFill>
                 <a:latin typeface="Arial"/>
               </a:rPr>
-              <a:t>and one failure hardcoded values</a:t>
+              <a:t>and 7 of those 15 assertion failures</a:t>
             </a:r>
           </a:p>
           <a:p>
@@ -11637,7 +11676,7 @@
                 </a:solidFill>
                 <a:latin typeface="Arial"/>
               </a:rPr>
-              <a:t>instead of formulas, which LOOKS</a:t>
+              <a:t>are invisible to review — incl. 3 that</a:t>
             </a:r>
           </a:p>
           <a:p>
@@ -11649,7 +11688,7 @@
                 </a:solidFill>
                 <a:latin typeface="Arial"/>
               </a:rPr>
-              <a:t>correct. Retry only works if you</a:t>
+              <a:t>hardcoded values instead of formulas.</a:t>
             </a:r>
           </a:p>
           <a:p>
@@ -11661,7 +11700,7 @@
                 </a:solidFill>
                 <a:latin typeface="Arial"/>
               </a:rPr>
-              <a:t>can detect the failure.</a:t>
+              <a:t>Retry needs a validator.</a:t>
             </a:r>
           </a:p>
         </p:txBody>
@@ -11871,7 +11910,7 @@
                 </a:solidFill>
                 <a:latin typeface="Arial"/>
               </a:rPr>
-              <a:t>scenarios; tokens/call holds across five independent cells. Absolute dollar figures are indicative — n=5 per cell,</a:t>
+              <a:t>scenarios; tokens/call holds across five independent cells. Absolute dollar figures are indicative — n=5 in 18 cells,</a:t>
             </a:r>
           </a:p>
           <a:p>
@@ -12195,7 +12234,7 @@
                           </a:solidFill>
                           <a:latin typeface="Arial"/>
                         </a:rPr>
-                        <a:t>n = 5 per cell (20 cells), CV to 0.85</a:t>
+                        <a:t>Uneven n: 18 cells at 5, 2 at ≈30</a:t>
                       </a:r>
                     </a:p>
                   </a:txBody>
@@ -12218,7 +12257,7 @@
                           </a:solidFill>
                           <a:latin typeface="Arial"/>
                         </a:rPr>
-                        <a:t>tokens/call constants are solid (5 cells agree); a single cell's median is indicative</a:t>
+                        <a:t>chosen, not accidental — the 2 non-saturated pass rates got the reps. CV to 0.85, so a single cell's median is indicative; tokens/call constants are solid (5 cells agree)</a:t>
                       </a:r>
                     </a:p>
                   </a:txBody>

--- a/results/autobench-claudecode-summary.pptx
+++ b/results/autobench-claudecode-summary.pptx
@@ -3261,7 +3261,7 @@
                 </a:solidFill>
                 <a:latin typeface="Arial"/>
               </a:rPr>
-              <a:t>Last modified 2026-09-09 20:33 EDT</a:t>
+              <a:t>Last modified 2026-09-09 21:09 EDT</a:t>
             </a:r>
           </a:p>
         </p:txBody>
@@ -6657,25 +6657,37 @@
           <a:p>
             <a:pPr algn="ctr"/>
             <a:r>
-              <a:rPr sz="1400" b="1">
+              <a:rPr sz="1250" b="1">
                 <a:solidFill>
                   <a:srgbClr val="FFFFFF"/>
                 </a:solidFill>
                 <a:latin typeface="Arial"/>
               </a:rPr>
-              <a:t>sonnet-5 uses MORE tokens than sonnet-4-6 yet</a:t>
+              <a:t>sonnet-5 uses MORE tokens than sonnet-4-6 yet costs LESS</a:t>
             </a:r>
           </a:p>
           <a:p>
             <a:pPr algn="ctr"/>
             <a:r>
-              <a:rPr sz="1400" b="1">
+              <a:rPr sz="1250" b="1">
                 <a:solidFill>
                   <a:srgbClr val="FFFFFF"/>
                 </a:solidFill>
                 <a:latin typeface="Arial"/>
               </a:rPr>
-              <a:t>costs LESS on all three cells here, at 2/3 the unit price.</a:t>
+              <a:t>on 2 of 3 cells, at 2/3 the unit price. The 3rd (colors) is a</a:t>
+            </a:r>
+          </a:p>
+          <a:p>
+            <a:pPr algn="ctr"/>
+            <a:r>
+              <a:rPr sz="1250" b="1">
+                <a:solidFill>
+                  <a:srgbClr val="FFFFFF"/>
+                </a:solidFill>
+                <a:latin typeface="Arial"/>
+              </a:rPr>
+              <a:t>statistical TIE — 7.9% apart, p = 0.78. Don't quote it.</a:t>
             </a:r>
           </a:p>
         </p:txBody>
@@ -6710,7 +6722,7 @@
                 </a:solidFill>
                 <a:latin typeface="Arial"/>
               </a:rPr>
-              <a:t>Same cells under scenario A (no cache discount). haiku stays cheapest and opus-5 dearest everywhere — but the two</a:t>
+              <a:t>Same cells under scenario A (no cache discount). haiku stays cheapest and opus-5 dearest everywhere — the two sonnets</a:t>
             </a:r>
           </a:p>
           <a:p>
@@ -6722,7 +6734,7 @@
                 </a:solidFill>
                 <a:latin typeface="Arial"/>
               </a:rPr>
-              <a:t>sonnets SWAP on xlsx-fin-colors, so that one mid-band ordering does depend on the unverified cache assumption:</a:t>
+              <a:t>appear to SWAP on xlsx-fin-colors, but neither ordering is established there (p = 0.78 under B, 0.40 under A):</a:t>
             </a:r>
           </a:p>
         </p:txBody>
@@ -11453,7 +11465,7 @@
                 </a:solidFill>
                 <a:latin typeface="Arial"/>
               </a:rPr>
-              <a:t>100% pass on every task, and cheaper</a:t>
+              <a:t>100% pass on every task, and never</a:t>
             </a:r>
           </a:p>
           <a:p>
@@ -11465,7 +11477,7 @@
                 </a:solidFill>
                 <a:latin typeface="Arial"/>
               </a:rPr>
-              <a:t>than sonnet-4-6 on all 3 cells (scenario B)</a:t>
+              <a:t>dearer than sonnet-4-6 (scenario B):</a:t>
             </a:r>
           </a:p>
           <a:p>
@@ -11477,7 +11489,7 @@
                 </a:solidFill>
                 <a:latin typeface="Arial"/>
               </a:rPr>
-              <a:t>— 33% on font-clean, 30% on the</a:t>
+              <a:t>decisively cheaper on the canary</a:t>
             </a:r>
           </a:p>
           <a:p>
@@ -11489,7 +11501,7 @@
                 </a:solidFill>
                 <a:latin typeface="Arial"/>
               </a:rPr>
-              <a:t>canary, 8% on colors — despite using</a:t>
+              <a:t>(30%, p=0.008), near-decisively on</a:t>
             </a:r>
           </a:p>
           <a:p>
@@ -11501,7 +11513,7 @@
                 </a:solidFill>
                 <a:latin typeface="Arial"/>
               </a:rPr>
-              <a:t>MORE tokens. 2/3 unit price</a:t>
+              <a:t>font-clean (33%, p=0.056), a TIE on</a:t>
             </a:r>
           </a:p>
           <a:p>
@@ -11513,7 +11525,31 @@
                 </a:solidFill>
                 <a:latin typeface="Arial"/>
               </a:rPr>
-              <a:t>absorbs 1.21×/call.</a:t>
+              <a:t>colors (8%, p=0.78). Despite MORE</a:t>
+            </a:r>
+          </a:p>
+          <a:p>
+            <a:pPr algn="ctr"/>
+            <a:r>
+              <a:rPr sz="1200" b="0">
+                <a:solidFill>
+                  <a:srgbClr val="2B2B2B"/>
+                </a:solidFill>
+                <a:latin typeface="Arial"/>
+              </a:rPr>
+              <a:t>tokens — 2/3 unit price absorbs</a:t>
+            </a:r>
+          </a:p>
+          <a:p>
+            <a:pPr algn="ctr"/>
+            <a:r>
+              <a:rPr sz="1200" b="0">
+                <a:solidFill>
+                  <a:srgbClr val="2B2B2B"/>
+                </a:solidFill>
+                <a:latin typeface="Arial"/>
+              </a:rPr>
+              <a:t>1.21×/call.</a:t>
             </a:r>
           </a:p>
         </p:txBody>
@@ -11922,7 +11958,7 @@
                 </a:solidFill>
                 <a:latin typeface="Arial"/>
               </a:rPr>
-              <a:t>cache billing unverified, and one mid-band pair (the two sonnets on xlsx-fin-colors) swaps between scenarios.</a:t>
+              <a:t>cache billing unverified, and the two sonnets are indistinguishable on xlsx-fin-colors under EITHER scenario.</a:t>
             </a:r>
           </a:p>
         </p:txBody>
@@ -12111,8 +12147,8 @@
           <p:nvPr/>
         </p:nvGraphicFramePr>
         <p:xfrm>
-          <a:off x="640080" y="1828800"/>
-          <a:ext cx="10881360" cy="2048256"/>
+          <a:off x="640080" y="1783080"/>
+          <a:ext cx="10881360" cy="2340864"/>
         </p:xfrm>
         <a:graphic>
           <a:graphicData uri="http://schemas.openxmlformats.org/drawingml/2006/table">
@@ -12132,7 +12168,7 @@
                     <a:p>
                       <a:pPr algn="l"/>
                       <a:r>
-                        <a:rPr sz="1300" b="1">
+                        <a:rPr sz="1200" b="1">
                           <a:solidFill>
                             <a:srgbClr val="FFFFFF"/>
                           </a:solidFill>
@@ -12155,7 +12191,7 @@
                     <a:p>
                       <a:pPr algn="r"/>
                       <a:r>
-                        <a:rPr sz="1300" b="1">
+                        <a:rPr sz="1200" b="1">
                           <a:solidFill>
                             <a:srgbClr val="FFFFFF"/>
                           </a:solidFill>
@@ -12180,7 +12216,7 @@
                     <a:p>
                       <a:pPr algn="l"/>
                       <a:r>
-                        <a:rPr sz="1300" b="0">
+                        <a:rPr sz="1200" b="0">
                           <a:solidFill>
                             <a:srgbClr val="2B2B2B"/>
                           </a:solidFill>
@@ -12203,7 +12239,7 @@
                     <a:p>
                       <a:pPr algn="r"/>
                       <a:r>
-                        <a:rPr sz="1300" b="0">
+                        <a:rPr sz="1200" b="0">
                           <a:solidFill>
                             <a:srgbClr val="2B2B2B"/>
                           </a:solidFill>
@@ -12228,7 +12264,7 @@
                     <a:p>
                       <a:pPr algn="l"/>
                       <a:r>
-                        <a:rPr sz="1300" b="0">
+                        <a:rPr sz="1200" b="0">
                           <a:solidFill>
                             <a:srgbClr val="2B2B2B"/>
                           </a:solidFill>
@@ -12251,7 +12287,7 @@
                     <a:p>
                       <a:pPr algn="r"/>
                       <a:r>
-                        <a:rPr sz="1300" b="0">
+                        <a:rPr sz="1200" b="0">
                           <a:solidFill>
                             <a:srgbClr val="2B2B2B"/>
                           </a:solidFill>
@@ -12276,13 +12312,13 @@
                     <a:p>
                       <a:pPr algn="l"/>
                       <a:r>
-                        <a:rPr sz="1300" b="0">
+                        <a:rPr sz="1200" b="0">
                           <a:solidFill>
                             <a:srgbClr val="2B2B2B"/>
                           </a:solidFill>
                           <a:latin typeface="Arial"/>
                         </a:rPr>
-                        <a:t>Cache billing unverified</a:t>
+                        <a:t>Not every $ gap is a finding</a:t>
                       </a:r>
                     </a:p>
                   </a:txBody>
@@ -12299,13 +12335,13 @@
                     <a:p>
                       <a:pPr algn="r"/>
                       <a:r>
-                        <a:rPr sz="1300" b="0">
+                        <a:rPr sz="1200" b="0">
                           <a:solidFill>
                             <a:srgbClr val="2B2B2B"/>
                           </a:solidFill>
                           <a:latin typeface="Arial"/>
                         </a:rPr>
-                        <a:t>4–5× on ABSOLUTE cost; no headline ranking changes, but the two sonnets swap on colors</a:t>
+                        <a:t>the sonnet-5 vs sonnet-4-6 saving is established on 1 of 3 cells (p=0.008), marginal on a 2nd (p=0.056) and a tie on the 3rd (p=0.78, ~617 reps/cell to settle)</a:t>
                       </a:r>
                     </a:p>
                   </a:txBody>
@@ -12324,13 +12360,13 @@
                     <a:p>
                       <a:pPr algn="l"/>
                       <a:r>
-                        <a:rPr sz="1300" b="0">
+                        <a:rPr sz="1200" b="0">
                           <a:solidFill>
                             <a:srgbClr val="2B2B2B"/>
                           </a:solidFill>
                           <a:latin typeface="Arial"/>
                         </a:rPr>
-                        <a:t>Two tasks, one narrow genre</a:t>
+                        <a:t>Cache billing unverified</a:t>
                       </a:r>
                     </a:p>
                   </a:txBody>
@@ -12347,13 +12383,13 @@
                     <a:p>
                       <a:pPr algn="r"/>
                       <a:r>
-                        <a:rPr sz="1300" b="0">
+                        <a:rPr sz="1200" b="0">
                           <a:solidFill>
                             <a:srgbClr val="2B2B2B"/>
                           </a:solidFill>
                           <a:latin typeface="Arial"/>
                         </a:rPr>
-                        <a:t>financial-spreadsheet formatting. Not a general coding benchmark</a:t>
+                        <a:t>4–5× on ABSOLUTE cost; no headline ranking changes, and the sonnets' apparent swap on colors is an unresolved comparison, not a real reversal</a:t>
                       </a:r>
                     </a:p>
                   </a:txBody>
@@ -12372,13 +12408,13 @@
                     <a:p>
                       <a:pPr algn="l"/>
                       <a:r>
-                        <a:rPr sz="1300" b="0">
+                        <a:rPr sz="1200" b="0">
                           <a:solidFill>
                             <a:srgbClr val="2B2B2B"/>
                           </a:solidFill>
                           <a:latin typeface="Arial"/>
                         </a:rPr>
-                        <a:t>aws/ vs bare alias pricing</a:t>
+                        <a:t>Two tasks, one narrow genre</a:t>
                       </a:r>
                     </a:p>
                   </a:txBody>
@@ -12395,13 +12431,13 @@
                     <a:p>
                       <a:pPr algn="r"/>
                       <a:r>
-                        <a:rPr sz="1300" b="0">
+                        <a:rPr sz="1200" b="0">
                           <a:solidFill>
                             <a:srgbClr val="2B2B2B"/>
                           </a:solidFill>
                           <a:latin typeface="Arial"/>
                         </a:rPr>
-                        <a:t>assumed identical; unprovable with a non-admin key</a:t>
+                        <a:t>financial-spreadsheet formatting. Not a general coding benchmark</a:t>
                       </a:r>
                     </a:p>
                   </a:txBody>
@@ -12420,19 +12456,67 @@
                     <a:p>
                       <a:pPr algn="l"/>
                       <a:r>
-                        <a:rPr sz="1300" b="0">
+                        <a:rPr sz="1200" b="0">
                           <a:solidFill>
                             <a:srgbClr val="2B2B2B"/>
                           </a:solidFill>
                           <a:latin typeface="Arial"/>
                         </a:rPr>
+                        <a:t>aws/ vs bare alias pricing</a:t>
+                      </a:r>
+                    </a:p>
+                  </a:txBody>
+                  <a:tcPr marL="64008" marR="64008" marT="18288" marB="18288">
+                    <a:solidFill>
+                      <a:srgbClr val="FFFFFF"/>
+                    </a:solidFill>
+                  </a:tcPr>
+                </a:tc>
+                <a:tc>
+                  <a:txBody>
+                    <a:bodyPr/>
+                    <a:lstStyle/>
+                    <a:p>
+                      <a:pPr algn="r"/>
+                      <a:r>
+                        <a:rPr sz="1200" b="0">
+                          <a:solidFill>
+                            <a:srgbClr val="2B2B2B"/>
+                          </a:solidFill>
+                          <a:latin typeface="Arial"/>
+                        </a:rPr>
+                        <a:t>assumed identical; unprovable with a non-admin key</a:t>
+                      </a:r>
+                    </a:p>
+                  </a:txBody>
+                  <a:tcPr marL="64008" marR="64008" marT="18288" marB="18288">
+                    <a:solidFill>
+                      <a:srgbClr val="FFFFFF"/>
+                    </a:solidFill>
+                  </a:tcPr>
+                </a:tc>
+              </a:tr>
+              <a:tr h="292608">
+                <a:tc>
+                  <a:txBody>
+                    <a:bodyPr/>
+                    <a:lstStyle/>
+                    <a:p>
+                      <a:pPr algn="l"/>
+                      <a:r>
+                        <a:rPr sz="1200" b="0">
+                          <a:solidFill>
+                            <a:srgbClr val="2B2B2B"/>
+                          </a:solidFill>
+                          <a:latin typeface="Arial"/>
+                        </a:rPr>
                         <a:t>Wall-clock not load-controlled</a:t>
                       </a:r>
                     </a:p>
                   </a:txBody>
                   <a:tcPr marL="64008" marR="64008" marT="18288" marB="18288">
                     <a:solidFill>
-                      <a:srgbClr val="FFFFFF"/>
+                      <a:srgbClr val="FAF9F5"/>
                     </a:solidFill>
                   </a:tcPr>
                 </a:tc>
@@ -12443,7 +12527,7 @@
                     <a:p>
                       <a:pPr algn="r"/>
                       <a:r>
-                        <a:rPr sz="1300" b="0">
+                        <a:rPr sz="1200" b="0">
                           <a:solidFill>
                             <a:srgbClr val="2B2B2B"/>
                           </a:solidFill>
@@ -12455,7 +12539,7 @@
                   </a:txBody>
                   <a:tcPr marL="64008" marR="64008" marT="18288" marB="18288">
                     <a:solidFill>
-                      <a:srgbClr val="FFFFFF"/>
+                      <a:srgbClr val="FAF9F5"/>
                     </a:solidFill>
                   </a:tcPr>
                 </a:tc>
@@ -12472,7 +12556,7 @@
         </p:nvSpPr>
         <p:spPr>
           <a:xfrm>
-            <a:off x="640080" y="4114800"/>
+            <a:off x="640080" y="4526280"/>
             <a:ext cx="10881360" cy="914400"/>
           </a:xfrm>
           <a:prstGeom prst="rect">

--- a/results/autobench-claudecode-summary.pptx
+++ b/results/autobench-claudecode-summary.pptx
@@ -3261,7 +3261,7 @@
                 </a:solidFill>
                 <a:latin typeface="Arial"/>
               </a:rPr>
-              <a:t>Last modified 2026-09-09 21:09 EDT</a:t>
+              <a:t>Last modified 2026-09-09 21:10 EDT</a:t>
             </a:r>
           </a:p>
         </p:txBody>
@@ -16523,7 +16523,7 @@
                           </a:solidFill>
                           <a:latin typeface="Arial"/>
                         </a:rPr>
-                        <a:t>one (task × arm × model), measured over n repetitions — e.g. xlsx-fin-colors / ON / sonnet-5, n=8</a:t>
+                        <a:t>one (task × arm × model), measured over n repetitions — e.g. xlsx-fin-colors / ON / sonnet-5, n=5</a:t>
                       </a:r>
                     </a:p>
                   </a:txBody>
@@ -16619,7 +16619,7 @@
                           </a:solidFill>
                           <a:latin typeface="Arial"/>
                         </a:rPr>
-                        <a:t>ONE /v1/chat/completions on the wire. A task makes SEVERAL — 5 to 24 here</a:t>
+                        <a:t>ONE /v1/chat/completions on the wire. A task makes SEVERAL — 2 to 29 here</a:t>
                       </a:r>
                     </a:p>
                   </a:txBody>

--- a/results/autobench-claudecode-summary.pptx
+++ b/results/autobench-claudecode-summary.pptx
@@ -3261,7 +3261,7 @@
                 </a:solidFill>
                 <a:latin typeface="Arial"/>
               </a:rPr>
-              <a:t>Last modified 2026-09-09 21:10 EDT</a:t>
+              <a:t>Last modified 2026-09-09 22:01 EDT</a:t>
             </a:r>
           </a:p>
         </p:txBody>
@@ -6657,7 +6657,7 @@
           <a:p>
             <a:pPr algn="ctr"/>
             <a:r>
-              <a:rPr sz="1250" b="1">
+              <a:rPr sz="1100" b="1">
                 <a:solidFill>
                   <a:srgbClr val="FFFFFF"/>
                 </a:solidFill>
@@ -6669,25 +6669,37 @@
           <a:p>
             <a:pPr algn="ctr"/>
             <a:r>
-              <a:rPr sz="1250" b="1">
+              <a:rPr sz="1100" b="1">
                 <a:solidFill>
                   <a:srgbClr val="FFFFFF"/>
                 </a:solidFill>
                 <a:latin typeface="Arial"/>
               </a:rPr>
-              <a:t>on 2 of 3 cells, at 2/3 the unit price. The 3rd (colors) is a</a:t>
+              <a:t>on 2 of 3 cells, at 2/3 the unit price — but only ONE of the</a:t>
             </a:r>
           </a:p>
           <a:p>
             <a:pPr algn="ctr"/>
             <a:r>
-              <a:rPr sz="1250" b="1">
+              <a:rPr sz="1100" b="1">
                 <a:solidFill>
                   <a:srgbClr val="FFFFFF"/>
                 </a:solidFill>
                 <a:latin typeface="Arial"/>
               </a:rPr>
-              <a:t>statistical TIE — 7.9% apart, p = 0.78. Don't quote it.</a:t>
+              <a:t>three separates them (canary, p=0.008). Colors is a TIE</a:t>
+            </a:r>
+          </a:p>
+          <a:p>
+            <a:pPr algn="ctr"/>
+            <a:r>
+              <a:rPr sz="1100" b="1">
+                <a:solidFill>
+                  <a:srgbClr val="FFFFFF"/>
+                </a:solidFill>
+                <a:latin typeface="Arial"/>
+              </a:rPr>
+              <a:t>(p=0.78); font-clean flipped sign on a re-run. Don't quote 2/3.</a:t>
             </a:r>
           </a:p>
         </p:txBody>
@@ -11411,7 +11423,7 @@
           <a:p>
             <a:pPr algn="ctr"/>
             <a:r>
-              <a:rPr sz="1200" b="0">
+              <a:rPr sz="1150" b="0">
                 <a:solidFill>
                   <a:srgbClr val="2B2B2B"/>
                 </a:solidFill>
@@ -11423,7 +11435,7 @@
           <a:p>
             <a:pPr algn="ctr"/>
             <a:r>
-              <a:rPr sz="1200" b="0">
+              <a:rPr sz="1150" b="0">
                 <a:solidFill>
                   <a:srgbClr val="2B2B2B"/>
                 </a:solidFill>
@@ -11435,7 +11447,7 @@
           <a:p>
             <a:pPr algn="ctr"/>
             <a:r>
-              <a:rPr sz="1200" b="0">
+              <a:rPr sz="1150" b="0">
                 <a:solidFill>
                   <a:srgbClr val="2B2B2B"/>
                 </a:solidFill>
@@ -11447,7 +11459,7 @@
           <a:p>
             <a:pPr algn="ctr"/>
             <a:r>
-              <a:rPr sz="1200" b="0">
+              <a:rPr sz="1150" b="0">
                 <a:solidFill>
                   <a:srgbClr val="2B2B2B"/>
                 </a:solidFill>
@@ -11459,7 +11471,7 @@
           <a:p>
             <a:pPr algn="ctr"/>
             <a:r>
-              <a:rPr sz="1200" b="0">
+              <a:rPr sz="1150" b="0">
                 <a:solidFill>
                   <a:srgbClr val="2B2B2B"/>
                 </a:solidFill>
@@ -11471,79 +11483,91 @@
           <a:p>
             <a:pPr algn="ctr"/>
             <a:r>
-              <a:rPr sz="1200" b="0">
+              <a:rPr sz="1150" b="0">
                 <a:solidFill>
                   <a:srgbClr val="2B2B2B"/>
                 </a:solidFill>
                 <a:latin typeface="Arial"/>
               </a:rPr>
-              <a:t>dearer than sonnet-4-6 (scenario B):</a:t>
+              <a:t>ESTABLISHED as dearer than</a:t>
             </a:r>
           </a:p>
           <a:p>
             <a:pPr algn="ctr"/>
             <a:r>
-              <a:rPr sz="1200" b="0">
+              <a:rPr sz="1150" b="0">
                 <a:solidFill>
                   <a:srgbClr val="2B2B2B"/>
                 </a:solidFill>
                 <a:latin typeface="Arial"/>
               </a:rPr>
-              <a:t>decisively cheaper on the canary</a:t>
+              <a:t>sonnet-4-6 (scenario B): decisively</a:t>
             </a:r>
           </a:p>
           <a:p>
             <a:pPr algn="ctr"/>
             <a:r>
-              <a:rPr sz="1200" b="0">
+              <a:rPr sz="1150" b="0">
                 <a:solidFill>
                   <a:srgbClr val="2B2B2B"/>
                 </a:solidFill>
                 <a:latin typeface="Arial"/>
               </a:rPr>
-              <a:t>(30%, p=0.008), near-decisively on</a:t>
+              <a:t>cheaper on the canary (30%,</a:t>
             </a:r>
           </a:p>
           <a:p>
             <a:pPr algn="ctr"/>
             <a:r>
-              <a:rPr sz="1200" b="0">
+              <a:rPr sz="1150" b="0">
                 <a:solidFill>
                   <a:srgbClr val="2B2B2B"/>
                 </a:solidFill>
                 <a:latin typeface="Arial"/>
               </a:rPr>
-              <a:t>font-clean (33%, p=0.056), a TIE on</a:t>
+              <a:t>p=0.008); colors a TIE (8%, p=0.78);</a:t>
             </a:r>
           </a:p>
           <a:p>
             <a:pPr algn="ctr"/>
             <a:r>
-              <a:rPr sz="1200" b="0">
+              <a:rPr sz="1150" b="0">
                 <a:solidFill>
                   <a:srgbClr val="2B2B2B"/>
                 </a:solidFill>
                 <a:latin typeface="Arial"/>
               </a:rPr>
-              <a:t>colors (8%, p=0.78). Despite MORE</a:t>
+              <a:t>font-clean UNRESOLVED — it flipped</a:t>
             </a:r>
           </a:p>
           <a:p>
             <a:pPr algn="ctr"/>
             <a:r>
-              <a:rPr sz="1200" b="0">
+              <a:rPr sz="1150" b="0">
                 <a:solidFill>
                   <a:srgbClr val="2B2B2B"/>
                 </a:solidFill>
                 <a:latin typeface="Arial"/>
               </a:rPr>
-              <a:t>tokens — 2/3 unit price absorbs</a:t>
+              <a:t>sign on a re-run. Despite MORE</a:t>
             </a:r>
           </a:p>
           <a:p>
             <a:pPr algn="ctr"/>
             <a:r>
-              <a:rPr sz="1200" b="0">
+              <a:rPr sz="1150" b="0">
+                <a:solidFill>
+                  <a:srgbClr val="2B2B2B"/>
+                </a:solidFill>
+                <a:latin typeface="Arial"/>
+              </a:rPr>
+              <a:t>tokens: 2/3 unit price absorbs</a:t>
+            </a:r>
+          </a:p>
+          <a:p>
+            <a:pPr algn="ctr"/>
+            <a:r>
+              <a:rPr sz="1150" b="0">
                 <a:solidFill>
                   <a:srgbClr val="2B2B2B"/>
                 </a:solidFill>
@@ -11958,7 +11982,7 @@
                 </a:solidFill>
                 <a:latin typeface="Arial"/>
               </a:rPr>
-              <a:t>cache billing unverified, and the two sonnets are indistinguishable on xlsx-fin-colors under EITHER scenario.</a:t>
+              <a:t>cache billing unverified, and only 1 of the 3 sonnet-vs-sonnet cells separates the two models at all.</a:t>
             </a:r>
           </a:p>
         </p:txBody>
@@ -12147,8 +12171,8 @@
           <p:nvPr/>
         </p:nvGraphicFramePr>
         <p:xfrm>
-          <a:off x="640080" y="1783080"/>
-          <a:ext cx="10881360" cy="2340864"/>
+          <a:off x="640080" y="1737360"/>
+          <a:ext cx="10881360" cy="2633472"/>
         </p:xfrm>
         <a:graphic>
           <a:graphicData uri="http://schemas.openxmlformats.org/drawingml/2006/table">
@@ -12168,7 +12192,7 @@
                     <a:p>
                       <a:pPr algn="l"/>
                       <a:r>
-                        <a:rPr sz="1200" b="1">
+                        <a:rPr sz="1100" b="1">
                           <a:solidFill>
                             <a:srgbClr val="FFFFFF"/>
                           </a:solidFill>
@@ -12191,7 +12215,7 @@
                     <a:p>
                       <a:pPr algn="r"/>
                       <a:r>
-                        <a:rPr sz="1200" b="1">
+                        <a:rPr sz="1100" b="1">
                           <a:solidFill>
                             <a:srgbClr val="FFFFFF"/>
                           </a:solidFill>
@@ -12216,7 +12240,7 @@
                     <a:p>
                       <a:pPr algn="l"/>
                       <a:r>
-                        <a:rPr sz="1200" b="0">
+                        <a:rPr sz="1100" b="0">
                           <a:solidFill>
                             <a:srgbClr val="2B2B2B"/>
                           </a:solidFill>
@@ -12239,7 +12263,7 @@
                     <a:p>
                       <a:pPr algn="r"/>
                       <a:r>
-                        <a:rPr sz="1200" b="0">
+                        <a:rPr sz="1100" b="0">
                           <a:solidFill>
                             <a:srgbClr val="2B2B2B"/>
                           </a:solidFill>
@@ -12264,7 +12288,7 @@
                     <a:p>
                       <a:pPr algn="l"/>
                       <a:r>
-                        <a:rPr sz="1200" b="0">
+                        <a:rPr sz="1100" b="0">
                           <a:solidFill>
                             <a:srgbClr val="2B2B2B"/>
                           </a:solidFill>
@@ -12287,7 +12311,7 @@
                     <a:p>
                       <a:pPr algn="r"/>
                       <a:r>
-                        <a:rPr sz="1200" b="0">
+                        <a:rPr sz="1100" b="0">
                           <a:solidFill>
                             <a:srgbClr val="2B2B2B"/>
                           </a:solidFill>
@@ -12312,7 +12336,7 @@
                     <a:p>
                       <a:pPr algn="l"/>
                       <a:r>
-                        <a:rPr sz="1200" b="0">
+                        <a:rPr sz="1100" b="0">
                           <a:solidFill>
                             <a:srgbClr val="2B2B2B"/>
                           </a:solidFill>
@@ -12335,13 +12359,13 @@
                     <a:p>
                       <a:pPr algn="r"/>
                       <a:r>
-                        <a:rPr sz="1200" b="0">
+                        <a:rPr sz="1100" b="0">
                           <a:solidFill>
                             <a:srgbClr val="2B2B2B"/>
                           </a:solidFill>
                           <a:latin typeface="Arial"/>
                         </a:rPr>
-                        <a:t>the sonnet-5 vs sonnet-4-6 saving is established on 1 of 3 cells (p=0.008), marginal on a 2nd (p=0.056) and a tie on the 3rd (p=0.78, ~617 reps/cell to settle)</a:t>
+                        <a:t>the sonnet-5 vs sonnet-4-6 saving is established on only 1 of 3 cells (canary, p=0.008); colors is a tie (p=0.78, ~617 reps/cell to settle) and font-clean is unresolved</a:t>
                       </a:r>
                     </a:p>
                   </a:txBody>
@@ -12360,13 +12384,13 @@
                     <a:p>
                       <a:pPr algn="l"/>
                       <a:r>
-                        <a:rPr sz="1200" b="0">
+                        <a:rPr sz="1100" b="0">
                           <a:solidFill>
                             <a:srgbClr val="2B2B2B"/>
                           </a:solidFill>
                           <a:latin typeface="Arial"/>
                         </a:rPr>
-                        <a:t>Cache billing unverified</a:t>
+                        <a:t>One cell is NOT stationary</a:t>
                       </a:r>
                     </a:p>
                   </a:txBody>
@@ -12383,13 +12407,13 @@
                     <a:p>
                       <a:pPr algn="r"/>
                       <a:r>
-                        <a:rPr sz="1200" b="0">
+                        <a:rPr sz="1100" b="0">
                           <a:solidFill>
                             <a:srgbClr val="2B2B2B"/>
                           </a:solidFill>
                           <a:latin typeface="Arial"/>
                         </a:rPr>
-                        <a:t>4–5× on ABSOLUTE cost; no headline ranking changes, and the sonnets' apparent swap on colors is an unresolved comparison, not a real reversal</a:t>
+                        <a:t>re-run 23 h later, sonnet-5 took ×3.4 cost / ×4.1 tokens on font-clean for the same output while sonnet-4-6 held to 3%. Gateway change vs fat tail: indistinguishable — the wire only echoes the alias</a:t>
                       </a:r>
                     </a:p>
                   </a:txBody>
@@ -12408,13 +12432,13 @@
                     <a:p>
                       <a:pPr algn="l"/>
                       <a:r>
-                        <a:rPr sz="1200" b="0">
+                        <a:rPr sz="1100" b="0">
                           <a:solidFill>
                             <a:srgbClr val="2B2B2B"/>
                           </a:solidFill>
                           <a:latin typeface="Arial"/>
                         </a:rPr>
-                        <a:t>Two tasks, one narrow genre</a:t>
+                        <a:t>Cache billing unverified</a:t>
                       </a:r>
                     </a:p>
                   </a:txBody>
@@ -12431,13 +12455,13 @@
                     <a:p>
                       <a:pPr algn="r"/>
                       <a:r>
-                        <a:rPr sz="1200" b="0">
+                        <a:rPr sz="1100" b="0">
                           <a:solidFill>
                             <a:srgbClr val="2B2B2B"/>
                           </a:solidFill>
                           <a:latin typeface="Arial"/>
                         </a:rPr>
-                        <a:t>financial-spreadsheet formatting. Not a general coding benchmark</a:t>
+                        <a:t>4–5× on ABSOLUTE cost; no headline ranking changes, and the sonnets' apparent swap on colors is an unresolved comparison, not a real reversal</a:t>
                       </a:r>
                     </a:p>
                   </a:txBody>
@@ -12456,13 +12480,13 @@
                     <a:p>
                       <a:pPr algn="l"/>
                       <a:r>
-                        <a:rPr sz="1200" b="0">
+                        <a:rPr sz="1100" b="0">
                           <a:solidFill>
                             <a:srgbClr val="2B2B2B"/>
                           </a:solidFill>
                           <a:latin typeface="Arial"/>
                         </a:rPr>
-                        <a:t>aws/ vs bare alias pricing</a:t>
+                        <a:t>Two tasks, one narrow genre</a:t>
                       </a:r>
                     </a:p>
                   </a:txBody>
@@ -12479,13 +12503,13 @@
                     <a:p>
                       <a:pPr algn="r"/>
                       <a:r>
-                        <a:rPr sz="1200" b="0">
+                        <a:rPr sz="1100" b="0">
                           <a:solidFill>
                             <a:srgbClr val="2B2B2B"/>
                           </a:solidFill>
                           <a:latin typeface="Arial"/>
                         </a:rPr>
-                        <a:t>assumed identical; unprovable with a non-admin key</a:t>
+                        <a:t>financial-spreadsheet formatting. Not a general coding benchmark</a:t>
                       </a:r>
                     </a:p>
                   </a:txBody>
@@ -12504,19 +12528,67 @@
                     <a:p>
                       <a:pPr algn="l"/>
                       <a:r>
-                        <a:rPr sz="1200" b="0">
+                        <a:rPr sz="1100" b="0">
                           <a:solidFill>
                             <a:srgbClr val="2B2B2B"/>
                           </a:solidFill>
                           <a:latin typeface="Arial"/>
                         </a:rPr>
+                        <a:t>aws/ vs bare alias pricing</a:t>
+                      </a:r>
+                    </a:p>
+                  </a:txBody>
+                  <a:tcPr marL="64008" marR="64008" marT="18288" marB="18288">
+                    <a:solidFill>
+                      <a:srgbClr val="FAF9F5"/>
+                    </a:solidFill>
+                  </a:tcPr>
+                </a:tc>
+                <a:tc>
+                  <a:txBody>
+                    <a:bodyPr/>
+                    <a:lstStyle/>
+                    <a:p>
+                      <a:pPr algn="r"/>
+                      <a:r>
+                        <a:rPr sz="1100" b="0">
+                          <a:solidFill>
+                            <a:srgbClr val="2B2B2B"/>
+                          </a:solidFill>
+                          <a:latin typeface="Arial"/>
+                        </a:rPr>
+                        <a:t>assumed identical; unprovable with a non-admin key</a:t>
+                      </a:r>
+                    </a:p>
+                  </a:txBody>
+                  <a:tcPr marL="64008" marR="64008" marT="18288" marB="18288">
+                    <a:solidFill>
+                      <a:srgbClr val="FAF9F5"/>
+                    </a:solidFill>
+                  </a:tcPr>
+                </a:tc>
+              </a:tr>
+              <a:tr h="292608">
+                <a:tc>
+                  <a:txBody>
+                    <a:bodyPr/>
+                    <a:lstStyle/>
+                    <a:p>
+                      <a:pPr algn="l"/>
+                      <a:r>
+                        <a:rPr sz="1100" b="0">
+                          <a:solidFill>
+                            <a:srgbClr val="2B2B2B"/>
+                          </a:solidFill>
+                          <a:latin typeface="Arial"/>
+                        </a:rPr>
                         <a:t>Wall-clock not load-controlled</a:t>
                       </a:r>
                     </a:p>
                   </a:txBody>
                   <a:tcPr marL="64008" marR="64008" marT="18288" marB="18288">
                     <a:solidFill>
-                      <a:srgbClr val="FAF9F5"/>
+                      <a:srgbClr val="FFFFFF"/>
                     </a:solidFill>
                   </a:tcPr>
                 </a:tc>
@@ -12527,7 +12599,7 @@
                     <a:p>
                       <a:pPr algn="r"/>
                       <a:r>
-                        <a:rPr sz="1200" b="0">
+                        <a:rPr sz="1100" b="0">
                           <a:solidFill>
                             <a:srgbClr val="2B2B2B"/>
                           </a:solidFill>
@@ -12539,7 +12611,7 @@
                   </a:txBody>
                   <a:tcPr marL="64008" marR="64008" marT="18288" marB="18288">
                     <a:solidFill>
-                      <a:srgbClr val="FAF9F5"/>
+                      <a:srgbClr val="FFFFFF"/>
                     </a:solidFill>
                   </a:tcPr>
                 </a:tc>
@@ -12556,8 +12628,8 @@
         </p:nvSpPr>
         <p:spPr>
           <a:xfrm>
-            <a:off x="640080" y="4526280"/>
-            <a:ext cx="10881360" cy="914400"/>
+            <a:off x="640080" y="4800600"/>
+            <a:ext cx="10881360" cy="822960"/>
           </a:xfrm>
           <a:prstGeom prst="rect">
             <a:avLst/>

--- a/results/autobench-claudecode-summary.pptx
+++ b/results/autobench-claudecode-summary.pptx
@@ -3261,7 +3261,7 @@
                 </a:solidFill>
                 <a:latin typeface="Arial"/>
               </a:rPr>
-              <a:t>Last modified 2026-09-09 22:01 EDT</a:t>
+              <a:t>Last modified 2026-09-09 22:34 EDT</a:t>
             </a:r>
           </a:p>
         </p:txBody>
@@ -6663,7 +6663,7 @@
                 </a:solidFill>
                 <a:latin typeface="Arial"/>
               </a:rPr>
-              <a:t>sonnet-5 uses MORE tokens than sonnet-4-6 yet costs LESS</a:t>
+              <a:t>sonnet-5 uses MORE tokens than sonnet-4-6 yet costs LESS on</a:t>
             </a:r>
           </a:p>
           <a:p>
@@ -6675,7 +6675,7 @@
                 </a:solidFill>
                 <a:latin typeface="Arial"/>
               </a:rPr>
-              <a:t>on 2 of 3 cells, at 2/3 the unit price — but only ONE of the</a:t>
+              <a:t>2 of 3 cells, at 2/3 the unit price — but only ONE separates</a:t>
             </a:r>
           </a:p>
           <a:p>
@@ -6687,7 +6687,7 @@
                 </a:solidFill>
                 <a:latin typeface="Arial"/>
               </a:rPr>
-              <a:t>three separates them (canary, p=0.008). Colors is a TIE</a:t>
+              <a:t>them: canary, p=0.008, REPRODUCED at 30.6% next day. Colors</a:t>
             </a:r>
           </a:p>
           <a:p>
@@ -6699,7 +6699,7 @@
                 </a:solidFill>
                 <a:latin typeface="Arial"/>
               </a:rPr>
-              <a:t>(p=0.78); font-clean flipped sign on a re-run. Don't quote 2/3.</a:t>
+              <a:t>is a TIE (p=0.78); font-clean flipped. Don't quote 2 of 3.</a:t>
             </a:r>
           </a:p>
         </p:txBody>
@@ -11525,7 +11525,7 @@
                 </a:solidFill>
                 <a:latin typeface="Arial"/>
               </a:rPr>
-              <a:t>p=0.008); colors a TIE (8%, p=0.78);</a:t>
+              <a:t>p=0.008, and it REPRODUCED at 30.6%</a:t>
             </a:r>
           </a:p>
           <a:p>
@@ -11537,7 +11537,7 @@
                 </a:solidFill>
                 <a:latin typeface="Arial"/>
               </a:rPr>
-              <a:t>font-clean UNRESOLVED — it flipped</a:t>
+              <a:t>a day later); colors a TIE (8%,</a:t>
             </a:r>
           </a:p>
           <a:p>
@@ -11549,7 +11549,7 @@
                 </a:solidFill>
                 <a:latin typeface="Arial"/>
               </a:rPr>
-              <a:t>sign on a re-run. Despite MORE</a:t>
+              <a:t>p=0.78); font-clean UNRESOLVED — it</a:t>
             </a:r>
           </a:p>
           <a:p>
@@ -11561,7 +11561,19 @@
                 </a:solidFill>
                 <a:latin typeface="Arial"/>
               </a:rPr>
-              <a:t>tokens: 2/3 unit price absorbs</a:t>
+              <a:t>flipped sign on a re-run. Despite</a:t>
+            </a:r>
+          </a:p>
+          <a:p>
+            <a:pPr algn="ctr"/>
+            <a:r>
+              <a:rPr sz="1150" b="0">
+                <a:solidFill>
+                  <a:srgbClr val="2B2B2B"/>
+                </a:solidFill>
+                <a:latin typeface="Arial"/>
+              </a:rPr>
+              <a:t>MORE tokens: 2/3 unit price absorbs</a:t>
             </a:r>
           </a:p>
           <a:p>
@@ -11982,7 +11994,19 @@
                 </a:solidFill>
                 <a:latin typeface="Arial"/>
               </a:rPr>
-              <a:t>cache billing unverified, and only 1 of the 3 sonnet-vs-sonnet cells separates the two models at all.</a:t>
+              <a:t>cache billing unverified, and only 1 of the 3 sonnet-vs-sonnet cells separates the two models at all — that one</a:t>
+            </a:r>
+          </a:p>
+          <a:p>
+            <a:pPr algn="l"/>
+            <a:r>
+              <a:rPr sz="1300" b="0">
+                <a:solidFill>
+                  <a:srgbClr val="CADCFC"/>
+                </a:solidFill>
+                <a:latin typeface="Arial"/>
+              </a:rPr>
+              <a:t>cell was re-measured a day later and held, but 18 of 20 cells have never been re-measured.</a:t>
             </a:r>
           </a:p>
         </p:txBody>
@@ -12171,7 +12195,7 @@
           <p:nvPr/>
         </p:nvGraphicFramePr>
         <p:xfrm>
-          <a:off x="640080" y="1737360"/>
+          <a:off x="640080" y="1627632"/>
           <a:ext cx="10881360" cy="2633472"/>
         </p:xfrm>
         <a:graphic>
@@ -12413,7 +12437,7 @@
                           </a:solidFill>
                           <a:latin typeface="Arial"/>
                         </a:rPr>
-                        <a:t>re-run 23 h later, sonnet-5 took ×3.4 cost / ×4.1 tokens on font-clean for the same output while sonnet-4-6 held to 3%. Gateway change vs fat tail: indistinguishable — the wire only echoes the alias</a:t>
+                        <a:t>re-run 23 h later, sonnet-5 took ×3.4 cost / ×4.1 tokens on font-clean for the same output while sonnet-4-6 held to 3%. A second probe on the canary cell reproduced to 0.1%, so it is cell-specific, not a gateway alias change — but stability proven on 1 cell says nothing about the other 18</a:t>
                       </a:r>
                     </a:p>
                   </a:txBody>

--- a/results/autobench-claudecode-summary.pptx
+++ b/results/autobench-claudecode-summary.pptx
@@ -3226,7 +3226,7 @@
                 </a:solidFill>
                 <a:latin typeface="Arial"/>
               </a:rPr>
-              <a:t>209 recorded repetitions  ·  149 in the cost grid (18 cells n=5, 2 at n≈30)  ·  4 models  ·  internal LiteLLM</a:t>
+              <a:t>209 recorded repetitions  ·  149 in the cost grid (18 cells n=5, 2 at n≈30)  ·  4 models  ·  IBM Research ETE LiteLLM</a:t>
             </a:r>
           </a:p>
         </p:txBody>
@@ -3261,7 +3261,7 @@
                 </a:solidFill>
                 <a:latin typeface="Arial"/>
               </a:rPr>
-              <a:t>Last modified 2026-09-09 22:34 EDT</a:t>
+              <a:t>Last modified 2026-09-24 11:55 EDT</a:t>
             </a:r>
           </a:p>
         </p:txBody>
@@ -3392,7 +3392,7 @@
                 </a:solidFill>
                 <a:latin typeface="Arial"/>
               </a:rPr>
-              <a:t>Model pricing — internal LiteLLM</a:t>
+              <a:t>Model pricing — the gateway rate card</a:t>
             </a:r>
           </a:p>
         </p:txBody>
@@ -3441,16 +3441,51 @@
           </a:p>
         </p:txBody>
       </p:sp>
+      <p:sp>
+        <p:nvSpPr>
+          <p:cNvPr id="5" name="TextBox 4"/>
+          <p:cNvSpPr txBox="1"/>
+          <p:nvPr/>
+        </p:nvSpPr>
+        <p:spPr>
+          <a:xfrm>
+            <a:off x="640080" y="1764792"/>
+            <a:ext cx="10881360" cy="274320"/>
+          </a:xfrm>
+          <a:prstGeom prst="rect">
+            <a:avLst/>
+          </a:prstGeom>
+          <a:noFill/>
+        </p:spPr>
+        <p:txBody>
+          <a:bodyPr wrap="square" anchor="t" lIns="0" rIns="0">
+            <a:spAutoFit/>
+          </a:bodyPr>
+          <a:lstStyle/>
+          <a:p>
+            <a:pPr algn="l"/>
+            <a:r>
+              <a:rPr sz="1400" b="0">
+                <a:solidFill>
+                  <a:srgbClr val="1E2761"/>
+                </a:solidFill>
+                <a:latin typeface="Arial"/>
+              </a:rPr>
+              <a:t>Whose gateway: IBM Research’s ETE LiteLLM, an enterprise deployment we are a tenant of — not a Red Hat service, and not ours.</a:t>
+            </a:r>
+          </a:p>
+        </p:txBody>
+      </p:sp>
       <p:graphicFrame>
         <p:nvGraphicFramePr>
-          <p:cNvPr id="5" name="Table 4"/>
+          <p:cNvPr id="6" name="Table 5"/>
           <p:cNvGraphicFramePr>
             <a:graphicFrameLocks noGrp="1"/>
           </p:cNvGraphicFramePr>
           <p:nvPr/>
         </p:nvGraphicFramePr>
         <p:xfrm>
-          <a:off x="640080" y="1828800"/>
+          <a:off x="640080" y="2121408"/>
           <a:ext cx="10881360" cy="1463040"/>
         </p:xfrm>
         <a:graphic>
@@ -4057,14 +4092,14 @@
       </p:graphicFrame>
       <p:sp>
         <p:nvSpPr>
-          <p:cNvPr id="6" name="TextBox 5"/>
+          <p:cNvPr id="7" name="TextBox 6"/>
           <p:cNvSpPr txBox="1"/>
           <p:nvPr/>
         </p:nvSpPr>
         <p:spPr>
           <a:xfrm>
-            <a:off x="640080" y="3429000"/>
-            <a:ext cx="10881360" cy="502920"/>
+            <a:off x="640080" y="3730752"/>
+            <a:ext cx="10881360" cy="320040"/>
           </a:xfrm>
           <a:prstGeom prst="rect">
             <a:avLst/>
@@ -4079,39 +4114,27 @@
           <a:p>
             <a:pPr algn="l"/>
             <a:r>
-              <a:rPr sz="1200" b="0">
-                <a:solidFill>
-                  <a:srgbClr val="6B6B6B"/>
-                </a:solidFill>
-                <a:latin typeface="Arial"/>
-              </a:rPr>
-              <a:t>Transcribed by hand from the gateway model pages on 2026-09-09. That page needs interactive internal web</a:t>
-            </a:r>
-          </a:p>
-          <a:p>
-            <a:pPr algn="l"/>
-            <a:r>
-              <a:rPr sz="1200" b="0">
-                <a:solidFill>
-                  <a:srgbClr val="6B6B6B"/>
-                </a:solidFill>
-                <a:latin typeface="Arial"/>
-              </a:rPr>
-              <a:t>authorization and fills itself by script, so no automated pull is possible or attempted.</a:t>
-            </a:r>
-          </a:p>
-        </p:txBody>
-      </p:sp>
-      <p:sp>
-        <p:nvSpPr>
-          <p:cNvPr id="7" name="TextBox 6"/>
+              <a:rPr sz="1600" b="1">
+                <a:solidFill>
+                  <a:srgbClr val="2C5F2D"/>
+                </a:solidFill>
+                <a:latin typeface="Arial"/>
+              </a:rPr>
+              <a:t>sonnet-5 is priced at 2/3 of sonnet-4-6 — the single most consequential fact in the analysis.</a:t>
+            </a:r>
+          </a:p>
+        </p:txBody>
+      </p:sp>
+      <p:sp>
+        <p:nvSpPr>
+          <p:cNvPr id="8" name="TextBox 7"/>
           <p:cNvSpPr txBox="1"/>
           <p:nvPr/>
         </p:nvSpPr>
         <p:spPr>
           <a:xfrm>
-            <a:off x="640080" y="3977639"/>
-            <a:ext cx="10881360" cy="320040"/>
+            <a:off x="640080" y="4187952"/>
+            <a:ext cx="10881360" cy="274320"/>
           </a:xfrm>
           <a:prstGeom prst="rect">
             <a:avLst/>
@@ -4126,27 +4149,27 @@
           <a:p>
             <a:pPr algn="l"/>
             <a:r>
-              <a:rPr sz="1600" b="1">
-                <a:solidFill>
-                  <a:srgbClr val="2C5F2D"/>
-                </a:solidFill>
-                <a:latin typeface="Arial"/>
-              </a:rPr>
-              <a:t>sonnet-5 is priced at 2/3 of sonnet-4-6 — the single most consequential fact in the analysis.</a:t>
-            </a:r>
-          </a:p>
-        </p:txBody>
-      </p:sp>
-      <p:sp>
-        <p:nvSpPr>
-          <p:cNvPr id="8" name="TextBox 7"/>
+              <a:rPr sz="1400" b="1">
+                <a:solidFill>
+                  <a:srgbClr val="B85042"/>
+                </a:solidFill>
+                <a:latin typeface="Arial"/>
+              </a:rPr>
+              <a:t>Correction, 2026-09-23 — an earlier version of this slide said no automated pull was possible</a:t>
+            </a:r>
+          </a:p>
+        </p:txBody>
+      </p:sp>
+      <p:sp>
+        <p:nvSpPr>
+          <p:cNvPr id="9" name="TextBox 8"/>
           <p:cNvSpPr txBox="1"/>
           <p:nvPr/>
         </p:nvSpPr>
         <p:spPr>
           <a:xfrm>
-            <a:off x="640080" y="4434840"/>
-            <a:ext cx="10881360" cy="274320"/>
+            <a:off x="640080" y="4498848"/>
+            <a:ext cx="10332720" cy="868680"/>
           </a:xfrm>
           <a:prstGeom prst="rect">
             <a:avLst/>
@@ -4161,27 +4184,75 @@
           <a:p>
             <a:pPr algn="l"/>
             <a:r>
-              <a:rPr sz="1500" b="1">
-                <a:solidFill>
-                  <a:srgbClr val="1E2761"/>
-                </a:solidFill>
-                <a:latin typeface="Arial"/>
-              </a:rPr>
-              <a:t>The cache caveat</a:t>
-            </a:r>
-          </a:p>
-        </p:txBody>
-      </p:sp>
-      <p:sp>
-        <p:nvSpPr>
-          <p:cNvPr id="9" name="TextBox 8"/>
+              <a:rPr sz="1150" b="0">
+                <a:solidFill>
+                  <a:srgbClr val="2B2B2B"/>
+                </a:solidFill>
+                <a:latin typeface="Arial"/>
+              </a:rPr>
+              <a:t>True of the UI, wrong about the API. The rates above were transcribed by hand on 2026-09-09 from a page that does need an interactive</a:t>
+            </a:r>
+          </a:p>
+          <a:p>
+            <a:pPr algn="l"/>
+            <a:r>
+              <a:rPr sz="1150" b="0">
+                <a:solidFill>
+                  <a:srgbClr val="2B2B2B"/>
+                </a:solidFill>
+                <a:latin typeface="Arial"/>
+              </a:rPr>
+              <a:t>web authorization — but GET /public/litellm_model_cost_map needs NO credential, and agrees with that transcription on all four models and</a:t>
+            </a:r>
+          </a:p>
+          <a:p>
+            <a:pPr algn="l"/>
+            <a:r>
+              <a:rPr sz="1150" b="0">
+                <a:solidFill>
+                  <a:srgbClr val="2B2B2B"/>
+                </a:solidFill>
+                <a:latin typeface="Arial"/>
+              </a:rPr>
+              <a:t>both directions. It is now pinned in prices.json and drift-checked. What it publishes is the UPSTREAM provider’s list price: this gateway bills</a:t>
+            </a:r>
+          </a:p>
+          <a:p>
+            <a:pPr algn="l"/>
+            <a:r>
+              <a:rPr sz="1150" b="0">
+                <a:solidFill>
+                  <a:srgbClr val="2B2B2B"/>
+                </a:solidFill>
+                <a:latin typeface="Arial"/>
+              </a:rPr>
+              <a:t>BELOW list, by the same proportion for every model and both directions. The proportion is a term of somebody else’s enterprise deployment,</a:t>
+            </a:r>
+          </a:p>
+          <a:p>
+            <a:pPr algn="l"/>
+            <a:r>
+              <a:rPr sz="1150" b="0">
+                <a:solidFill>
+                  <a:srgbClr val="2B2B2B"/>
+                </a:solidFill>
+                <a:latin typeface="Arial"/>
+              </a:rPr>
+              <a:t>so it is not stated here — and it is inferred from the two cards agreeing, never read: /config/cost_margin_config is 403 for our key.</a:t>
+            </a:r>
+          </a:p>
+        </p:txBody>
+      </p:sp>
+      <p:sp>
+        <p:nvSpPr>
+          <p:cNvPr id="10" name="TextBox 9"/>
           <p:cNvSpPr txBox="1"/>
           <p:nvPr/>
         </p:nvSpPr>
         <p:spPr>
           <a:xfrm>
-            <a:off x="640080" y="4754880"/>
-            <a:ext cx="10881360" cy="1371600"/>
+            <a:off x="640080" y="5504688"/>
+            <a:ext cx="10881360" cy="274320"/>
           </a:xfrm>
           <a:prstGeom prst="rect">
             <a:avLst/>
@@ -4194,90 +4265,81 @@
           </a:bodyPr>
           <a:lstStyle/>
           <a:p>
-            <a:pPr algn="l">
-              <a:spcAft>
-                <a:spcPts val="200"/>
-              </a:spcAft>
-            </a:pPr>
-            <a:r>
-              <a:rPr sz="1250" b="0">
+            <a:pPr algn="l"/>
+            <a:r>
+              <a:rPr sz="1400" b="1">
+                <a:solidFill>
+                  <a:srgbClr val="1E2761"/>
+                </a:solidFill>
+                <a:latin typeface="Arial"/>
+              </a:rPr>
+              <a:t>The cache caveat — narrower than it was</a:t>
+            </a:r>
+          </a:p>
+        </p:txBody>
+      </p:sp>
+      <p:sp>
+        <p:nvSpPr>
+          <p:cNvPr id="11" name="TextBox 10"/>
+          <p:cNvSpPr txBox="1"/>
+          <p:nvPr/>
+        </p:nvSpPr>
+        <p:spPr>
+          <a:xfrm>
+            <a:off x="640080" y="5797296"/>
+            <a:ext cx="10332720" cy="548640"/>
+          </a:xfrm>
+          <a:prstGeom prst="rect">
+            <a:avLst/>
+          </a:prstGeom>
+          <a:noFill/>
+        </p:spPr>
+        <p:txBody>
+          <a:bodyPr wrap="square" anchor="t" lIns="0" rIns="0">
+            <a:spAutoFit/>
+          </a:bodyPr>
+          <a:lstStyle/>
+          <a:p>
+            <a:pPr algn="l"/>
+            <a:r>
+              <a:rPr sz="1150" b="0">
                 <a:solidFill>
                   <a:srgbClr val="2B2B2B"/>
                 </a:solidFill>
                 <a:latin typeface="Arial"/>
               </a:rPr>
-              <a:t>The gateway publishes only Input and Output rates, but 81–97% of our prompt tokens are CACHE READS.</a:t>
-            </a:r>
-          </a:p>
-          <a:p>
-            <a:pPr algn="l">
-              <a:spcAft>
-                <a:spcPts val="200"/>
-              </a:spcAft>
-            </a:pPr>
-            <a:r>
-              <a:rPr sz="1250" b="0">
+              <a:t>81–97% of our prompt tokens are CACHE READS. Scenario B prices them ×0.10 and cacheWrite ×1.25, landing ~4–5× below scenario A, which</a:t>
+            </a:r>
+          </a:p>
+          <a:p>
+            <a:pPr algn="l"/>
+            <a:r>
+              <a:rPr sz="1150" b="0">
                 <a:solidFill>
                   <a:srgbClr val="2B2B2B"/>
                 </a:solidFill>
                 <a:latin typeface="Arial"/>
               </a:rPr>
-              <a:t>  Scenario A — no discount: every prompt token at the Input rate (upper bound)</a:t>
-            </a:r>
-          </a:p>
-          <a:p>
-            <a:pPr algn="l">
-              <a:spcAft>
-                <a:spcPts val="200"/>
-              </a:spcAft>
-            </a:pPr>
-            <a:r>
-              <a:rPr sz="1250" b="0">
+              <a:t>bills every prompt token at the input rate. Those multipliers were an assumption about the Anthropic convention; the map states them</a:t>
+            </a:r>
+          </a:p>
+          <a:p>
+            <a:pPr algn="l"/>
+            <a:r>
+              <a:rPr sz="1150" b="0">
                 <a:solidFill>
                   <a:srgbClr val="2B2B2B"/>
                 </a:solidFill>
                 <a:latin typeface="Arial"/>
               </a:rPr>
-              <a:t>  Scenario B — standard Anthropic/Bedrock convention: cacheRead ×0.10, cacheWrite ×1.25</a:t>
-            </a:r>
-          </a:p>
-          <a:p>
-            <a:pPr algn="l">
-              <a:spcAft>
-                <a:spcPts val="200"/>
-              </a:spcAft>
-            </a:pPr>
-            <a:r>
-              <a:rPr sz="1250" b="0">
-                <a:solidFill>
-                  <a:srgbClr val="2B2B2B"/>
-                </a:solidFill>
-                <a:latin typeface="Arial"/>
-              </a:rPr>
-              <a:t>B lands ~4–5× below A. Which the gateway actually bills is UNVERIFIED.</a:t>
-            </a:r>
-          </a:p>
-          <a:p>
-            <a:pPr algn="l">
-              <a:spcAft>
-                <a:spcPts val="200"/>
-              </a:spcAft>
-            </a:pPr>
-            <a:r>
-              <a:rPr sz="1250" b="0">
-                <a:solidFill>
-                  <a:srgbClr val="2B2B2B"/>
-                </a:solidFill>
-                <a:latin typeface="Arial"/>
-              </a:rPr>
-              <a:t>The model ranking is identical under both, so the recommendation does not depend on resolving it.</a:t>
-            </a:r>
-          </a:p>
-        </p:txBody>
-      </p:sp>
-      <p:sp>
-        <p:nvSpPr>
-          <p:cNvPr id="10" name="TextBox 9"/>
+              <a:t>outright, so they are a READING now. Whether the gateway APPLIES the tiers when it invoices is still UNVERIFIED — but ranking holds in both.</a:t>
+            </a:r>
+          </a:p>
+        </p:txBody>
+      </p:sp>
+      <p:sp>
+        <p:nvSpPr>
+          <p:cNvPr id="12" name="TextBox 11"/>
           <p:cNvSpPr txBox="1"/>
           <p:nvPr/>
         </p:nvSpPr>
@@ -12437,7 +12499,7 @@
                           </a:solidFill>
                           <a:latin typeface="Arial"/>
                         </a:rPr>
-                        <a:t>re-run 23 h later, sonnet-5 took ×3.4 cost / ×4.1 tokens on font-clean for the same output while sonnet-4-6 held to 3%. A second probe on the canary cell reproduced to 0.1%, so it is cell-specific, not a gateway alias change — but stability proven on 1 cell says nothing about the other 18</a:t>
+                        <a:t>re-run 23 h later, sonnet-5 took ×3.4 cost / ×4.1 tokens on font-clean for the same output while sonnet-4-6 held to 3%. A second probe on the canary cell reproduced sonnet-5 to 0.1%, so it is cell-specific, not a gateway alias change — but stability proven on 1 cell says nothing about the other 18</a:t>
                       </a:r>
                     </a:p>
                   </a:txBody>
@@ -13538,7 +13600,7 @@
                 </a:solidFill>
                 <a:latin typeface="Arial"/>
               </a:rPr>
-              <a:t>Model pricing — internal LiteLLM rate card</a:t>
+              <a:t>Model pricing — the gateway rate card</a:t>
             </a:r>
           </a:p>
         </p:txBody>
